--- a/Day1_Probability/FW536_Day1_Morning_intro to probability_accessible.pptx
+++ b/Day1_Probability/FW536_Day1_Morning_intro to probability_accessible.pptx
@@ -26138,60 +26138,6 @@
       </p:sp>
       <p:pic>
         <p:nvPicPr>
-          <p:cNvPr id="73730" name="Picture 4" descr="Equation: Pr{A, B} = (Area common to A and B) divided by (Area of S); the joint probability of A and B." title="Equation: Pr{A, B} = (Area common to A and B) divided by (Area of S); the joint "/>
-          <p:cNvPicPr>
-            <a:picLocks noChangeAspect="1"/>
-          </p:cNvPicPr>
-          <p:nvPr/>
-        </p:nvPicPr>
-        <p:blipFill>
-          <a:blip r:embed="rId3">
-            <a:extLst>
-              <a:ext uri="{28A0092B-C50C-407E-A947-70E740481C1C}">
-                <a14:useLocalDpi xmlns:a14="http://schemas.microsoft.com/office/drawing/2010/main" val="0"/>
-              </a:ext>
-            </a:extLst>
-          </a:blip>
-          <a:srcRect/>
-          <a:stretch>
-            <a:fillRect/>
-          </a:stretch>
-        </p:blipFill>
-        <p:spPr bwMode="auto">
-          <a:xfrm>
-            <a:off x="2309813" y="1258888"/>
-            <a:ext cx="7823200" cy="1790700"/>
-          </a:xfrm>
-          <a:prstGeom prst="rect">
-            <a:avLst/>
-          </a:prstGeom>
-          <a:noFill/>
-          <a:ln>
-            <a:noFill/>
-          </a:ln>
-          <a:extLst>
-            <a:ext uri="{909E8E84-426E-40DD-AFC4-6F175D3DCCD1}">
-              <a14:hiddenFill xmlns:a14="http://schemas.microsoft.com/office/drawing/2010/main">
-                <a:solidFill>
-                  <a:srgbClr val="FFFFFF"/>
-                </a:solidFill>
-              </a14:hiddenFill>
-            </a:ext>
-            <a:ext uri="{91240B29-F687-4F45-9708-019B960494DF}">
-              <a14:hiddenLine xmlns:a14="http://schemas.microsoft.com/office/drawing/2010/main" w="9525">
-                <a:solidFill>
-                  <a:srgbClr val="000000"/>
-                </a:solidFill>
-                <a:miter lim="800000"/>
-                <a:headEnd/>
-                <a:tailEnd/>
-              </a14:hiddenLine>
-            </a:ext>
-          </a:extLst>
-        </p:spPr>
-      </p:pic>
-      <p:pic>
-        <p:nvPicPr>
           <p:cNvPr id="73731" name="Picture 5" descr="Diagram: sample space S with two overlapping events A and B, their overlap shaded, illustrating the joint probability of A and B." title="Diagram: sample space S with two overlapping events A and B, their overlap shade"/>
           <p:cNvPicPr>
             <a:picLocks noChangeAspect="1"/>
@@ -26490,6 +26436,37 @@
             <a:r>
               <a:rPr lang="en-US" altLang="en-US" sz="2200" i="1" dirty="0"/>
               <a:t>Note the multiplication. What’s another way to write this?</a:t>
+            </a:r>
+          </a:p>
+        </p:txBody>
+      </p:sp>
+      <p:sp>
+        <p:nvSpPr>
+          <p:cNvPr id="73734" name="TextBox 73733"/>
+          <p:cNvSpPr txBox="1"/>
+          <p:nvPr/>
+        </p:nvSpPr>
+        <p:spPr>
+          <a:xfrm>
+            <a:off x="2309813" y="1258888"/>
+            <a:ext cx="7823200" cy="1790700"/>
+          </a:xfrm>
+          <a:prstGeom prst="rect">
+            <a:avLst/>
+          </a:prstGeom>
+          <a:noFill/>
+        </p:spPr>
+        <p:txBody>
+          <a:bodyPr wrap="square" anchor="ctr" lIns="0" rIns="0" tIns="0" bIns="0">
+            <a:spAutoFit/>
+          </a:bodyPr>
+          <a:lstStyle/>
+          <a:p>
+            <a:r>
+              <a:rPr sz="2200" b="0">
+                <a:latin typeface="Cambria"/>
+              </a:rPr>
+              <a:t>Pr{A, B} = (Area common to A and B) / (Area of S)</a:t>
             </a:r>
           </a:p>
         </p:txBody>
@@ -36877,28 +36854,13 @@
           </a:p>
         </p:txBody>
       </p:sp>
-      <p:pic>
-        <p:nvPicPr>
-          <p:cNvPr id="83970" name="Picture 2" descr="Equation: P(A given B) = P(B given A) times P(A), divided by P(B). This is Bayes' rule." title="Equation: P(A given B) = P(B given A) times P(A), divided by P(B). This is Bayes"/>
-          <p:cNvPicPr>
-            <a:picLocks noChangeAspect="1" noChangeArrowheads="1"/>
-          </p:cNvPicPr>
+      <p:sp>
+        <p:nvSpPr>
+          <p:cNvPr id="3075" name="TextBox 3074"/>
+          <p:cNvSpPr txBox="1"/>
           <p:nvPr/>
-        </p:nvPicPr>
-        <p:blipFill>
-          <a:blip r:embed="rId3">
-            <a:extLst>
-              <a:ext uri="{28A0092B-C50C-407E-A947-70E740481C1C}">
-                <a14:useLocalDpi xmlns:a14="http://schemas.microsoft.com/office/drawing/2010/main" val="0"/>
-              </a:ext>
-            </a:extLst>
-          </a:blip>
-          <a:srcRect/>
-          <a:stretch>
-            <a:fillRect/>
-          </a:stretch>
-        </p:blipFill>
-        <p:spPr bwMode="auto">
+        </p:nvSpPr>
+        <p:spPr>
           <a:xfrm>
             <a:off x="2514600" y="1676400"/>
             <a:ext cx="6991350" cy="2819400"/>
@@ -36907,30 +36869,22 @@
             <a:avLst/>
           </a:prstGeom>
           <a:noFill/>
-          <a:ln>
-            <a:noFill/>
-          </a:ln>
-          <a:extLst>
-            <a:ext uri="{909E8E84-426E-40DD-AFC4-6F175D3DCCD1}">
-              <a14:hiddenFill xmlns:a14="http://schemas.microsoft.com/office/drawing/2010/main">
-                <a:solidFill>
-                  <a:srgbClr val="FFFFFF"/>
-                </a:solidFill>
-              </a14:hiddenFill>
-            </a:ext>
-            <a:ext uri="{91240B29-F687-4F45-9708-019B960494DF}">
-              <a14:hiddenLine xmlns:a14="http://schemas.microsoft.com/office/drawing/2010/main" w="9525">
-                <a:solidFill>
-                  <a:srgbClr val="000000"/>
-                </a:solidFill>
-                <a:miter lim="800000"/>
-                <a:headEnd/>
-                <a:tailEnd/>
-              </a14:hiddenLine>
-            </a:ext>
-          </a:extLst>
         </p:spPr>
-      </p:pic>
+        <p:txBody>
+          <a:bodyPr wrap="square" anchor="ctr" lIns="0" rIns="0" tIns="0" bIns="0">
+            <a:spAutoFit/>
+          </a:bodyPr>
+          <a:lstStyle/>
+          <a:p>
+            <a:r>
+              <a:rPr sz="2600" b="0">
+                <a:latin typeface="Cambria"/>
+              </a:rPr>
+              <a:t>P(A | B) = ( P(B | A) · P(A) ) / P(B)</a:t>
+            </a:r>
+          </a:p>
+        </p:txBody>
+      </p:sp>
     </p:spTree>
     <p:extLst>
       <p:ext uri="{BB962C8B-B14F-4D97-AF65-F5344CB8AC3E}">
@@ -39813,60 +39767,85 @@
           </a:p>
         </p:txBody>
       </p:sp>
-      <p:pic>
-        <p:nvPicPr>
-          <p:cNvPr id="124931" name="Picture 4" descr="Equation: F(x) = P(X &lt;= x) = sum over x_i &lt;= x of P(X = x_i) = sum over x_i &lt;= x of p(x_i). The discrete cumulative distribution function sums the pmf up to x." title="Equation: F(x) = P(X &lt;= x) = sum over x_i &lt;= x of P(X = x_i) = sum over x_i &lt;= x"/>
-          <p:cNvPicPr>
-            <a:picLocks noChangeAspect="1"/>
-          </p:cNvPicPr>
+      <p:sp>
+        <p:nvSpPr>
+          <p:cNvPr id="9219" name="TextBox 9218"/>
+          <p:cNvSpPr txBox="1"/>
           <p:nvPr/>
-        </p:nvPicPr>
-        <p:blipFill>
-          <a:blip r:embed="rId3">
-            <a:extLst>
-              <a:ext uri="{28A0092B-C50C-407E-A947-70E740481C1C}">
-                <a14:useLocalDpi xmlns:a14="http://schemas.microsoft.com/office/drawing/2010/main" val="0"/>
-              </a:ext>
-            </a:extLst>
-          </a:blip>
-          <a:srcRect/>
-          <a:stretch>
-            <a:fillRect/>
-          </a:stretch>
-        </p:blipFill>
-        <p:spPr bwMode="auto">
+        </p:nvSpPr>
+        <p:spPr>
           <a:xfrm>
             <a:off x="2293257" y="2841168"/>
-            <a:ext cx="6769100" cy="965200"/>
+            <a:ext cx="7455876" cy="965200"/>
           </a:xfrm>
           <a:prstGeom prst="rect">
             <a:avLst/>
           </a:prstGeom>
           <a:noFill/>
-          <a:ln>
-            <a:noFill/>
-          </a:ln>
-          <a:extLst>
-            <a:ext uri="{909E8E84-426E-40DD-AFC4-6F175D3DCCD1}">
-              <a14:hiddenFill xmlns:a14="http://schemas.microsoft.com/office/drawing/2010/main">
-                <a:solidFill>
-                  <a:srgbClr val="FFFFFF"/>
-                </a:solidFill>
-              </a14:hiddenFill>
-            </a:ext>
-            <a:ext uri="{91240B29-F687-4F45-9708-019B960494DF}">
-              <a14:hiddenLine xmlns:a14="http://schemas.microsoft.com/office/drawing/2010/main" w="9525">
-                <a:solidFill>
-                  <a:srgbClr val="000000"/>
-                </a:solidFill>
-                <a:miter lim="800000"/>
-                <a:headEnd/>
-                <a:tailEnd/>
-              </a14:hiddenLine>
-            </a:ext>
-          </a:extLst>
         </p:spPr>
-      </p:pic>
+        <p:txBody>
+          <a:bodyPr wrap="square" anchor="ctr" lIns="0" rIns="0" tIns="0" bIns="0">
+            <a:spAutoFit/>
+          </a:bodyPr>
+          <a:lstStyle/>
+          <a:p>
+            <a:r>
+              <a:rPr sz="1900" b="0">
+                <a:latin typeface="Cambria"/>
+              </a:rPr>
+              <a:t>F(x) = P(X ≤ x) = ∑</a:t>
+            </a:r>
+            <a:r>
+              <a:rPr sz="1900" b="0" baseline="-25000">
+                <a:latin typeface="Cambria"/>
+              </a:rPr>
+              <a:t>x_i ≤ x</a:t>
+            </a:r>
+            <a:r>
+              <a:rPr sz="1900" b="0">
+                <a:latin typeface="Cambria"/>
+              </a:rPr>
+              <a:t> P(X = x</a:t>
+            </a:r>
+            <a:r>
+              <a:rPr sz="1900" b="0" baseline="-25000">
+                <a:latin typeface="Cambria"/>
+              </a:rPr>
+              <a:t>i</a:t>
+            </a:r>
+            <a:r>
+              <a:rPr sz="1900" b="0">
+                <a:latin typeface="Cambria"/>
+              </a:rPr>
+              <a:t>) = ∑</a:t>
+            </a:r>
+            <a:r>
+              <a:rPr sz="1900" b="0" baseline="-25000">
+                <a:latin typeface="Cambria"/>
+              </a:rPr>
+              <a:t>x_i ≤ x</a:t>
+            </a:r>
+            <a:r>
+              <a:rPr sz="1900" b="0">
+                <a:latin typeface="Cambria"/>
+              </a:rPr>
+              <a:t> p(x</a:t>
+            </a:r>
+            <a:r>
+              <a:rPr sz="1900" b="0" baseline="-25000">
+                <a:latin typeface="Cambria"/>
+              </a:rPr>
+              <a:t>i</a:t>
+            </a:r>
+            <a:r>
+              <a:rPr sz="1900" b="0">
+                <a:latin typeface="Cambria"/>
+              </a:rPr>
+              <a:t>)</a:t>
+            </a:r>
+          </a:p>
+        </p:txBody>
+      </p:sp>
     </p:spTree>
     <p:extLst>
       <p:ext uri="{BB962C8B-B14F-4D97-AF65-F5344CB8AC3E}">
@@ -40052,82 +40031,92 @@
           </a:p>
         </p:txBody>
       </p:sp>
-      <p:pic>
-        <p:nvPicPr>
-          <p:cNvPr id="126979" name="Picture 4" descr="Equation: F(x) = P(X &lt;= x) = sum over x_i &lt;= x of P(X = x_i) = sum over x_i &lt;= x of p(x_i). The discrete cumulative distribution function." title="Equation: F(x) = P(X &lt;= x) = sum over x_i &lt;= x of P(X = x_i) = sum over x_i &lt;= x"/>
-          <p:cNvPicPr>
-            <a:picLocks noChangeAspect="1"/>
-          </p:cNvPicPr>
+      <p:sp>
+        <p:nvSpPr>
+          <p:cNvPr id="126981" name="TextBox 126980"/>
+          <p:cNvSpPr txBox="1"/>
           <p:nvPr/>
-        </p:nvPicPr>
-        <p:blipFill>
-          <a:blip r:embed="rId3">
-            <a:extLst>
-              <a:ext uri="{28A0092B-C50C-407E-A947-70E740481C1C}">
-                <a14:useLocalDpi xmlns:a14="http://schemas.microsoft.com/office/drawing/2010/main" val="0"/>
-              </a:ext>
-            </a:extLst>
-          </a:blip>
-          <a:srcRect/>
-          <a:stretch>
-            <a:fillRect/>
-          </a:stretch>
-        </p:blipFill>
-        <p:spPr bwMode="auto">
+        </p:nvSpPr>
+        <p:spPr>
           <a:xfrm>
             <a:off x="2235200" y="2576514"/>
-            <a:ext cx="6769100" cy="965200"/>
+            <a:ext cx="7455876" cy="965200"/>
           </a:xfrm>
           <a:prstGeom prst="rect">
             <a:avLst/>
           </a:prstGeom>
           <a:noFill/>
-          <a:ln>
-            <a:noFill/>
-          </a:ln>
-          <a:extLst>
-            <a:ext uri="{909E8E84-426E-40DD-AFC4-6F175D3DCCD1}">
-              <a14:hiddenFill xmlns:a14="http://schemas.microsoft.com/office/drawing/2010/main">
-                <a:solidFill>
-                  <a:srgbClr val="FFFFFF"/>
-                </a:solidFill>
-              </a14:hiddenFill>
-            </a:ext>
-            <a:ext uri="{91240B29-F687-4F45-9708-019B960494DF}">
-              <a14:hiddenLine xmlns:a14="http://schemas.microsoft.com/office/drawing/2010/main" w="9525">
-                <a:solidFill>
-                  <a:srgbClr val="000000"/>
-                </a:solidFill>
-                <a:miter lim="800000"/>
-                <a:headEnd/>
-                <a:tailEnd/>
-              </a14:hiddenLine>
-            </a:ext>
-          </a:extLst>
         </p:spPr>
-      </p:pic>
-      <p:pic>
-        <p:nvPicPr>
-          <p:cNvPr id="126980" name="Picture 2" descr="Equation: P(a &lt; X &lt;= b) = F_X(b) minus F_X(a); the probability X falls in an interval is a difference of CDF values." title="Equation: P(a &lt; X &lt;= b) = F_X(b) minus F_X(a); the probability X falls in an int"/>
-          <p:cNvPicPr>
-            <a:picLocks noChangeAspect="1"/>
-          </p:cNvPicPr>
+        <p:txBody>
+          <a:bodyPr wrap="square" anchor="ctr" lIns="0" rIns="0" tIns="0" bIns="0">
+            <a:spAutoFit/>
+          </a:bodyPr>
+          <a:lstStyle/>
+          <a:p>
+            <a:r>
+              <a:rPr sz="1900" b="0">
+                <a:latin typeface="Cambria"/>
+              </a:rPr>
+              <a:t>F(x) = P(X ≤ x) = ∑</a:t>
+            </a:r>
+            <a:r>
+              <a:rPr sz="1900" b="0" baseline="-25000">
+                <a:latin typeface="Cambria"/>
+              </a:rPr>
+              <a:t>x_i ≤ x</a:t>
+            </a:r>
+            <a:r>
+              <a:rPr sz="1900" b="0">
+                <a:latin typeface="Cambria"/>
+              </a:rPr>
+              <a:t> P(X = x</a:t>
+            </a:r>
+            <a:r>
+              <a:rPr sz="1900" b="0" baseline="-25000">
+                <a:latin typeface="Cambria"/>
+              </a:rPr>
+              <a:t>i</a:t>
+            </a:r>
+            <a:r>
+              <a:rPr sz="1900" b="0">
+                <a:latin typeface="Cambria"/>
+              </a:rPr>
+              <a:t>) = ∑</a:t>
+            </a:r>
+            <a:r>
+              <a:rPr sz="1900" b="0" baseline="-25000">
+                <a:latin typeface="Cambria"/>
+              </a:rPr>
+              <a:t>x_i ≤ x</a:t>
+            </a:r>
+            <a:r>
+              <a:rPr sz="1900" b="0">
+                <a:latin typeface="Cambria"/>
+              </a:rPr>
+              <a:t> p(x</a:t>
+            </a:r>
+            <a:r>
+              <a:rPr sz="1900" b="0" baseline="-25000">
+                <a:latin typeface="Cambria"/>
+              </a:rPr>
+              <a:t>i</a:t>
+            </a:r>
+            <a:r>
+              <a:rPr sz="1900" b="0">
+                <a:latin typeface="Cambria"/>
+              </a:rPr>
+              <a:t>)</a:t>
+            </a:r>
+          </a:p>
+        </p:txBody>
+      </p:sp>
+      <p:sp>
+        <p:nvSpPr>
+          <p:cNvPr id="126982" name="TextBox 126981"/>
+          <p:cNvSpPr txBox="1"/>
           <p:nvPr/>
-        </p:nvPicPr>
-        <p:blipFill>
-          <a:blip r:embed="rId4">
-            <a:extLst>
-              <a:ext uri="{28A0092B-C50C-407E-A947-70E740481C1C}">
-                <a14:useLocalDpi xmlns:a14="http://schemas.microsoft.com/office/drawing/2010/main" val="0"/>
-              </a:ext>
-            </a:extLst>
-          </a:blip>
-          <a:srcRect/>
-          <a:stretch>
-            <a:fillRect/>
-          </a:stretch>
-        </p:blipFill>
-        <p:spPr bwMode="auto">
+        </p:nvSpPr>
+        <p:spPr>
           <a:xfrm>
             <a:off x="3080656" y="4394200"/>
             <a:ext cx="5448300" cy="914400"/>
@@ -40136,30 +40125,46 @@
             <a:avLst/>
           </a:prstGeom>
           <a:noFill/>
-          <a:ln>
-            <a:noFill/>
-          </a:ln>
-          <a:extLst>
-            <a:ext uri="{909E8E84-426E-40DD-AFC4-6F175D3DCCD1}">
-              <a14:hiddenFill xmlns:a14="http://schemas.microsoft.com/office/drawing/2010/main">
-                <a:solidFill>
-                  <a:srgbClr val="FFFFFF"/>
-                </a:solidFill>
-              </a14:hiddenFill>
-            </a:ext>
-            <a:ext uri="{91240B29-F687-4F45-9708-019B960494DF}">
-              <a14:hiddenLine xmlns:a14="http://schemas.microsoft.com/office/drawing/2010/main" w="9525">
-                <a:solidFill>
-                  <a:srgbClr val="000000"/>
-                </a:solidFill>
-                <a:miter lim="800000"/>
-                <a:headEnd/>
-                <a:tailEnd/>
-              </a14:hiddenLine>
-            </a:ext>
-          </a:extLst>
         </p:spPr>
-      </p:pic>
+        <p:txBody>
+          <a:bodyPr wrap="square" anchor="ctr" lIns="0" rIns="0" tIns="0" bIns="0">
+            <a:spAutoFit/>
+          </a:bodyPr>
+          <a:lstStyle/>
+          <a:p>
+            <a:r>
+              <a:rPr sz="2600" b="0">
+                <a:latin typeface="Cambria"/>
+              </a:rPr>
+              <a:t>P(a &lt; X ≤ b) = F</a:t>
+            </a:r>
+            <a:r>
+              <a:rPr sz="2600" b="0" baseline="-25000">
+                <a:latin typeface="Cambria"/>
+              </a:rPr>
+              <a:t>X</a:t>
+            </a:r>
+            <a:r>
+              <a:rPr sz="2600" b="0">
+                <a:latin typeface="Cambria"/>
+              </a:rPr>
+              <a:t>(b) − F</a:t>
+            </a:r>
+            <a:r>
+              <a:rPr sz="2600" b="0" baseline="-25000">
+                <a:latin typeface="Cambria"/>
+              </a:rPr>
+              <a:t>X</a:t>
+            </a:r>
+            <a:r>
+              <a:rPr sz="2600" b="0">
+                <a:latin typeface="Cambria"/>
+              </a:rPr>
+              <a:t>(a)</a:t>
+            </a:r>
+          </a:p>
+        </p:txBody>
+      </p:sp>
     </p:spTree>
     <p:extLst>
       <p:ext uri="{BB962C8B-B14F-4D97-AF65-F5344CB8AC3E}">

--- a/Day1_Probability/FW536_Day1_Morning_intro to probability_accessible.pptx
+++ b/Day1_Probability/FW536_Day1_Morning_intro to probability_accessible.pptx
@@ -10382,201 +10382,6 @@
           </a:p>
         </p:txBody>
       </p:sp>
-      <p:graphicFrame>
-        <p:nvGraphicFramePr>
-          <p:cNvPr id="55299" name="Object 7"/>
-          <p:cNvGraphicFramePr>
-            <a:graphicFrameLocks noGrp="1" noChangeAspect="1"/>
-          </p:cNvGraphicFramePr>
-          <p:nvPr>
-            <p:ph sz="quarter" idx="2"/>
-          </p:nvPr>
-        </p:nvGraphicFramePr>
-        <p:xfrm>
-          <a:off x="4953000" y="2362200"/>
-          <a:ext cx="2185988" cy="565150"/>
-        </p:xfrm>
-        <a:graphic>
-          <a:graphicData uri="http://schemas.openxmlformats.org/presentationml/2006/ole">
-            <mc:AlternateContent xmlns:mc="http://schemas.openxmlformats.org/markup-compatibility/2006">
-              <mc:Choice xmlns:v="urn:schemas-microsoft-com:vml" Requires="v">
-                <p:oleObj name="Equation" r:id="rId3" imgW="787058" imgH="203112" progId="Equation.DSMT4">
-                  <p:embed/>
-                </p:oleObj>
-              </mc:Choice>
-              <mc:Fallback>
-                <p:oleObj name="Equation" r:id="rId3" imgW="787058" imgH="203112" progId="Equation.DSMT4">
-                  <p:embed/>
-                  <p:pic>
-                    <p:nvPicPr>
-                      <p:cNvPr id="0" name=""/>
-                      <p:cNvPicPr>
-                        <a:picLocks noChangeAspect="1" noChangeArrowheads="1"/>
-                      </p:cNvPicPr>
-                      <p:nvPr/>
-                    </p:nvPicPr>
-                    <p:blipFill>
-                      <a:blip r:embed="rId4">
-                        <a:extLst>
-                          <a:ext uri="{28A0092B-C50C-407E-A947-70E740481C1C}">
-                            <a14:useLocalDpi xmlns:a14="http://schemas.microsoft.com/office/drawing/2010/main" val="0"/>
-                          </a:ext>
-                        </a:extLst>
-                      </a:blip>
-                      <a:srcRect/>
-                      <a:stretch>
-                        <a:fillRect/>
-                      </a:stretch>
-                    </p:blipFill>
-                    <p:spPr bwMode="auto">
-                      <a:xfrm>
-                        <a:off x="4953000" y="2362200"/>
-                        <a:ext cx="2185988" cy="565150"/>
-                      </a:xfrm>
-                      <a:prstGeom prst="rect">
-                        <a:avLst/>
-                      </a:prstGeom>
-                      <a:noFill/>
-                      <a:ln>
-                        <a:noFill/>
-                      </a:ln>
-                      <a:effectLst/>
-                      <a:extLst>
-                        <a:ext uri="{909E8E84-426E-40DD-AFC4-6F175D3DCCD1}">
-                          <a14:hiddenFill xmlns:a14="http://schemas.microsoft.com/office/drawing/2010/main">
-                            <a:solidFill>
-                              <a:srgbClr val="FFFFFF"/>
-                            </a:solidFill>
-                          </a14:hiddenFill>
-                        </a:ext>
-                        <a:ext uri="{91240B29-F687-4F45-9708-019B960494DF}">
-                          <a14:hiddenLine xmlns:a14="http://schemas.microsoft.com/office/drawing/2010/main" w="9525">
-                            <a:solidFill>
-                              <a:srgbClr val="000000"/>
-                            </a:solidFill>
-                            <a:miter lim="800000"/>
-                            <a:headEnd/>
-                            <a:tailEnd/>
-                          </a14:hiddenLine>
-                        </a:ext>
-                        <a:ext uri="{AF507438-7753-43E0-B8FC-AC1667EBCBE1}">
-                          <a14:hiddenEffects xmlns:a14="http://schemas.microsoft.com/office/drawing/2010/main">
-                            <a:effectLst>
-                              <a:outerShdw dist="35921" dir="2700000" algn="ctr" rotWithShape="0">
-                                <a:srgbClr val="808080"/>
-                              </a:outerShdw>
-                            </a:effectLst>
-                          </a14:hiddenEffects>
-                        </a:ext>
-                      </a:extLst>
-                    </p:spPr>
-                  </p:pic>
-                </p:oleObj>
-              </mc:Fallback>
-            </mc:AlternateContent>
-          </a:graphicData>
-        </a:graphic>
-      </p:graphicFrame>
-      <p:graphicFrame>
-        <p:nvGraphicFramePr>
-          <p:cNvPr id="55300" name="Object 9"/>
-          <p:cNvGraphicFramePr>
-            <a:graphicFrameLocks noGrp="1" noChangeAspect="1"/>
-          </p:cNvGraphicFramePr>
-          <p:nvPr>
-            <p:ph sz="quarter" idx="3"/>
-            <p:extLst>
-              <p:ext uri="{D42A27DB-BD31-4B8C-83A1-F6EECF244321}">
-                <p14:modId xmlns:p14="http://schemas.microsoft.com/office/powerpoint/2010/main" val="3763483402"/>
-              </p:ext>
-            </p:extLst>
-          </p:nvPr>
-        </p:nvGraphicFramePr>
-        <p:xfrm>
-          <a:off x="4453759" y="4750676"/>
-          <a:ext cx="2971800" cy="573088"/>
-        </p:xfrm>
-        <a:graphic>
-          <a:graphicData uri="http://schemas.openxmlformats.org/presentationml/2006/ole">
-            <mc:AlternateContent xmlns:mc="http://schemas.openxmlformats.org/markup-compatibility/2006">
-              <mc:Choice xmlns:v="urn:schemas-microsoft-com:vml" Requires="v">
-                <p:oleObj name="Equation" r:id="rId5" imgW="1054100" imgH="203200" progId="Equation.DSMT4">
-                  <p:embed/>
-                </p:oleObj>
-              </mc:Choice>
-              <mc:Fallback>
-                <p:oleObj name="Equation" r:id="rId5" imgW="1054100" imgH="203200" progId="Equation.DSMT4">
-                  <p:embed/>
-                  <p:pic>
-                    <p:nvPicPr>
-                      <p:cNvPr id="0" name=""/>
-                      <p:cNvPicPr>
-                        <a:picLocks noChangeAspect="1" noChangeArrowheads="1"/>
-                      </p:cNvPicPr>
-                      <p:nvPr/>
-                    </p:nvPicPr>
-                    <p:blipFill>
-                      <a:blip r:embed="rId6">
-                        <a:extLst>
-                          <a:ext uri="{28A0092B-C50C-407E-A947-70E740481C1C}">
-                            <a14:useLocalDpi xmlns:a14="http://schemas.microsoft.com/office/drawing/2010/main" val="0"/>
-                          </a:ext>
-                        </a:extLst>
-                      </a:blip>
-                      <a:srcRect/>
-                      <a:stretch>
-                        <a:fillRect/>
-                      </a:stretch>
-                    </p:blipFill>
-                    <p:spPr bwMode="auto">
-                      <a:xfrm>
-                        <a:off x="4453759" y="4750676"/>
-                        <a:ext cx="2971800" cy="573088"/>
-                      </a:xfrm>
-                      <a:prstGeom prst="rect">
-                        <a:avLst/>
-                      </a:prstGeom>
-                      <a:noFill/>
-                      <a:ln>
-                        <a:noFill/>
-                      </a:ln>
-                      <a:effectLst/>
-                      <a:extLst>
-                        <a:ext uri="{909E8E84-426E-40DD-AFC4-6F175D3DCCD1}">
-                          <a14:hiddenFill xmlns:a14="http://schemas.microsoft.com/office/drawing/2010/main">
-                            <a:solidFill>
-                              <a:srgbClr val="FFFFFF"/>
-                            </a:solidFill>
-                          </a14:hiddenFill>
-                        </a:ext>
-                        <a:ext uri="{91240B29-F687-4F45-9708-019B960494DF}">
-                          <a14:hiddenLine xmlns:a14="http://schemas.microsoft.com/office/drawing/2010/main" w="9525">
-                            <a:solidFill>
-                              <a:srgbClr val="000000"/>
-                            </a:solidFill>
-                            <a:miter lim="800000"/>
-                            <a:headEnd/>
-                            <a:tailEnd/>
-                          </a14:hiddenLine>
-                        </a:ext>
-                        <a:ext uri="{AF507438-7753-43E0-B8FC-AC1667EBCBE1}">
-                          <a14:hiddenEffects xmlns:a14="http://schemas.microsoft.com/office/drawing/2010/main">
-                            <a:effectLst>
-                              <a:outerShdw dist="35921" dir="2700000" algn="ctr" rotWithShape="0">
-                                <a:srgbClr val="808080"/>
-                              </a:outerShdw>
-                            </a:effectLst>
-                          </a14:hiddenEffects>
-                        </a:ext>
-                      </a:extLst>
-                    </p:spPr>
-                  </p:pic>
-                </p:oleObj>
-              </mc:Fallback>
-            </mc:AlternateContent>
-          </a:graphicData>
-        </a:graphic>
-      </p:graphicFrame>
       <p:sp>
         <p:nvSpPr>
           <p:cNvPr id="55301" name="TextBox 1"/>
@@ -10801,6 +10606,68 @@
             <a:r>
               <a:rPr lang="en-US" altLang="en-US" sz="2400"/>
               <a:t>Why “1” here?</a:t>
+            </a:r>
+          </a:p>
+        </p:txBody>
+      </p:sp>
+      <p:sp>
+        <p:nvSpPr>
+          <p:cNvPr id="55302" name="TextBox 55301"/>
+          <p:cNvSpPr txBox="1"/>
+          <p:nvPr/>
+        </p:nvSpPr>
+        <p:spPr>
+          <a:xfrm>
+            <a:off x="4953000" y="2362200"/>
+            <a:ext cx="2185988" cy="565150"/>
+          </a:xfrm>
+          <a:prstGeom prst="rect">
+            <a:avLst/>
+          </a:prstGeom>
+          <a:noFill/>
+        </p:spPr>
+        <p:txBody>
+          <a:bodyPr wrap="square" anchor="ctr" lIns="0" rIns="0" tIns="0" bIns="0">
+            <a:spAutoFit/>
+          </a:bodyPr>
+          <a:lstStyle/>
+          <a:p>
+            <a:r>
+              <a:rPr sz="2500">
+                <a:latin typeface="Cambria"/>
+              </a:rPr>
+              <a:t>0 ≤ P(E) ≤ 1</a:t>
+            </a:r>
+          </a:p>
+        </p:txBody>
+      </p:sp>
+      <p:sp>
+        <p:nvSpPr>
+          <p:cNvPr id="55303" name="TextBox 55302"/>
+          <p:cNvSpPr txBox="1"/>
+          <p:nvPr/>
+        </p:nvSpPr>
+        <p:spPr>
+          <a:xfrm>
+            <a:off x="4453759" y="4750676"/>
+            <a:ext cx="2971800" cy="573088"/>
+          </a:xfrm>
+          <a:prstGeom prst="rect">
+            <a:avLst/>
+          </a:prstGeom>
+          <a:noFill/>
+        </p:spPr>
+        <p:txBody>
+          <a:bodyPr wrap="square" anchor="ctr" lIns="0" rIns="0" tIns="0" bIns="0">
+            <a:spAutoFit/>
+          </a:bodyPr>
+          <a:lstStyle/>
+          <a:p>
+            <a:r>
+              <a:rPr sz="2600">
+                <a:latin typeface="Cambria"/>
+              </a:rPr>
+              <a:t>P(E') = 1 − P(E)</a:t>
             </a:r>
           </a:p>
         </p:txBody>
@@ -25491,106 +25358,37 @@
           </a:p>
         </p:txBody>
       </p:sp>
-      <p:graphicFrame>
-        <p:nvGraphicFramePr>
-          <p:cNvPr id="69636" name="Object 5"/>
-          <p:cNvGraphicFramePr>
-            <a:graphicFrameLocks noGrp="1" noChangeAspect="1"/>
-          </p:cNvGraphicFramePr>
-          <p:nvPr>
-            <p:ph sz="half" idx="2"/>
-            <p:extLst>
-              <p:ext uri="{D42A27DB-BD31-4B8C-83A1-F6EECF244321}">
-                <p14:modId xmlns:p14="http://schemas.microsoft.com/office/powerpoint/2010/main" val="505766225"/>
-              </p:ext>
-            </p:extLst>
-          </p:nvPr>
-        </p:nvGraphicFramePr>
-        <p:xfrm>
-          <a:off x="2393950" y="4096924"/>
-          <a:ext cx="6172200" cy="498475"/>
-        </p:xfrm>
-        <a:graphic>
-          <a:graphicData uri="http://schemas.openxmlformats.org/presentationml/2006/ole">
-            <mc:AlternateContent xmlns:mc="http://schemas.openxmlformats.org/markup-compatibility/2006">
-              <mc:Choice xmlns:v="urn:schemas-microsoft-com:vml" Requires="v">
-                <p:oleObj name="Equation" r:id="rId3" imgW="2514600" imgH="203200" progId="Equation.DSMT4">
-                  <p:embed/>
-                </p:oleObj>
-              </mc:Choice>
-              <mc:Fallback>
-                <p:oleObj name="Equation" r:id="rId3" imgW="2514600" imgH="203200" progId="Equation.DSMT4">
-                  <p:embed/>
-                  <p:pic>
-                    <p:nvPicPr>
-                      <p:cNvPr id="0" name=""/>
-                      <p:cNvPicPr>
-                        <a:picLocks noChangeAspect="1" noChangeArrowheads="1"/>
-                      </p:cNvPicPr>
-                      <p:nvPr/>
-                    </p:nvPicPr>
-                    <p:blipFill>
-                      <a:blip r:embed="rId4">
-                        <a:extLst>
-                          <a:ext uri="{28A0092B-C50C-407E-A947-70E740481C1C}">
-                            <a14:useLocalDpi xmlns:a14="http://schemas.microsoft.com/office/drawing/2010/main" val="0"/>
-                          </a:ext>
-                        </a:extLst>
-                      </a:blip>
-                      <a:srcRect/>
-                      <a:stretch>
-                        <a:fillRect/>
-                      </a:stretch>
-                    </p:blipFill>
-                    <p:spPr bwMode="auto">
-                      <a:xfrm>
-                        <a:off x="2393950" y="4096924"/>
-                        <a:ext cx="6172200" cy="498475"/>
-                      </a:xfrm>
-                      <a:prstGeom prst="rect">
-                        <a:avLst/>
-                      </a:prstGeom>
-                      <a:noFill/>
-                      <a:ln>
-                        <a:noFill/>
-                      </a:ln>
-                      <a:effectLst/>
-                      <a:extLst>
-                        <a:ext uri="{909E8E84-426E-40DD-AFC4-6F175D3DCCD1}">
-                          <a14:hiddenFill xmlns:a14="http://schemas.microsoft.com/office/drawing/2010/main">
-                            <a:solidFill>
-                              <a:srgbClr val="FFFFFF"/>
-                            </a:solidFill>
-                          </a14:hiddenFill>
-                        </a:ext>
-                        <a:ext uri="{91240B29-F687-4F45-9708-019B960494DF}">
-                          <a14:hiddenLine xmlns:a14="http://schemas.microsoft.com/office/drawing/2010/main" w="9525">
-                            <a:solidFill>
-                              <a:srgbClr val="000000"/>
-                            </a:solidFill>
-                            <a:miter lim="800000"/>
-                            <a:headEnd/>
-                            <a:tailEnd/>
-                          </a14:hiddenLine>
-                        </a:ext>
-                        <a:ext uri="{AF507438-7753-43E0-B8FC-AC1667EBCBE1}">
-                          <a14:hiddenEffects xmlns:a14="http://schemas.microsoft.com/office/drawing/2010/main">
-                            <a:effectLst>
-                              <a:outerShdw dist="35921" dir="2700000" algn="ctr" rotWithShape="0">
-                                <a:srgbClr val="808080"/>
-                              </a:outerShdw>
-                            </a:effectLst>
-                          </a14:hiddenEffects>
-                        </a:ext>
-                      </a:extLst>
-                    </p:spPr>
-                  </p:pic>
-                </p:oleObj>
-              </mc:Fallback>
-            </mc:AlternateContent>
-          </a:graphicData>
-        </a:graphic>
-      </p:graphicFrame>
+      <p:sp>
+        <p:nvSpPr>
+          <p:cNvPr id="4100" name="TextBox 4099"/>
+          <p:cNvSpPr txBox="1"/>
+          <p:nvPr/>
+        </p:nvSpPr>
+        <p:spPr>
+          <a:xfrm>
+            <a:off x="2393950" y="4096924"/>
+            <a:ext cx="6172200" cy="498475"/>
+          </a:xfrm>
+          <a:prstGeom prst="rect">
+            <a:avLst/>
+          </a:prstGeom>
+          <a:noFill/>
+        </p:spPr>
+        <p:txBody>
+          <a:bodyPr wrap="square" anchor="ctr" lIns="0" rIns="0" tIns="0" bIns="0">
+            <a:spAutoFit/>
+          </a:bodyPr>
+          <a:lstStyle/>
+          <a:p>
+            <a:r>
+              <a:rPr sz="2200">
+                <a:latin typeface="Cambria"/>
+              </a:rPr>
+              <a:t>P(A) = P(A | B);        P(B) = P(B | A)</a:t>
+            </a:r>
+          </a:p>
+        </p:txBody>
+      </p:sp>
     </p:spTree>
     <p:extLst>
       <p:ext uri="{BB962C8B-B14F-4D97-AF65-F5344CB8AC3E}">
@@ -25761,206 +25559,68 @@
           </a:p>
         </p:txBody>
       </p:sp>
-      <p:graphicFrame>
-        <p:nvGraphicFramePr>
-          <p:cNvPr id="71683" name="Object 4"/>
-          <p:cNvGraphicFramePr>
-            <a:graphicFrameLocks noGrp="1" noChangeAspect="1"/>
-          </p:cNvGraphicFramePr>
-          <p:nvPr>
-            <p:ph sz="quarter" idx="2"/>
-            <p:extLst>
-              <p:ext uri="{D42A27DB-BD31-4B8C-83A1-F6EECF244321}">
-                <p14:modId xmlns:p14="http://schemas.microsoft.com/office/powerpoint/2010/main" val="1668018776"/>
-              </p:ext>
-            </p:extLst>
-          </p:nvPr>
-        </p:nvGraphicFramePr>
-        <p:xfrm>
-          <a:off x="2779713" y="2743995"/>
-          <a:ext cx="5943600" cy="495300"/>
-        </p:xfrm>
-        <a:graphic>
-          <a:graphicData uri="http://schemas.openxmlformats.org/presentationml/2006/ole">
-            <mc:AlternateContent xmlns:mc="http://schemas.openxmlformats.org/markup-compatibility/2006">
-              <mc:Choice xmlns:v="urn:schemas-microsoft-com:vml" Requires="v">
-                <p:oleObj name="Equation" r:id="rId3" imgW="2438400" imgH="203200" progId="Equation.DSMT4">
-                  <p:embed/>
-                </p:oleObj>
-              </mc:Choice>
-              <mc:Fallback>
-                <p:oleObj name="Equation" r:id="rId3" imgW="2438400" imgH="203200" progId="Equation.DSMT4">
-                  <p:embed/>
-                  <p:pic>
-                    <p:nvPicPr>
-                      <p:cNvPr id="0" name=""/>
-                      <p:cNvPicPr>
-                        <a:picLocks noChangeAspect="1" noChangeArrowheads="1"/>
-                      </p:cNvPicPr>
-                      <p:nvPr/>
-                    </p:nvPicPr>
-                    <p:blipFill>
-                      <a:blip r:embed="rId4">
-                        <a:extLst>
-                          <a:ext uri="{28A0092B-C50C-407E-A947-70E740481C1C}">
-                            <a14:useLocalDpi xmlns:a14="http://schemas.microsoft.com/office/drawing/2010/main" val="0"/>
-                          </a:ext>
-                        </a:extLst>
-                      </a:blip>
-                      <a:srcRect/>
-                      <a:stretch>
-                        <a:fillRect/>
-                      </a:stretch>
-                    </p:blipFill>
-                    <p:spPr bwMode="auto">
-                      <a:xfrm>
-                        <a:off x="2779713" y="2743995"/>
-                        <a:ext cx="5943600" cy="495300"/>
-                      </a:xfrm>
-                      <a:prstGeom prst="rect">
-                        <a:avLst/>
-                      </a:prstGeom>
-                      <a:noFill/>
-                      <a:ln>
-                        <a:noFill/>
-                      </a:ln>
-                      <a:effectLst/>
-                      <a:extLst>
-                        <a:ext uri="{909E8E84-426E-40DD-AFC4-6F175D3DCCD1}">
-                          <a14:hiddenFill xmlns:a14="http://schemas.microsoft.com/office/drawing/2010/main">
-                            <a:solidFill>
-                              <a:srgbClr val="FFFFFF"/>
-                            </a:solidFill>
-                          </a14:hiddenFill>
-                        </a:ext>
-                        <a:ext uri="{91240B29-F687-4F45-9708-019B960494DF}">
-                          <a14:hiddenLine xmlns:a14="http://schemas.microsoft.com/office/drawing/2010/main" w="9525">
-                            <a:solidFill>
-                              <a:srgbClr val="000000"/>
-                            </a:solidFill>
-                            <a:miter lim="800000"/>
-                            <a:headEnd/>
-                            <a:tailEnd/>
-                          </a14:hiddenLine>
-                        </a:ext>
-                        <a:ext uri="{AF507438-7753-43E0-B8FC-AC1667EBCBE1}">
-                          <a14:hiddenEffects xmlns:a14="http://schemas.microsoft.com/office/drawing/2010/main">
-                            <a:effectLst>
-                              <a:outerShdw dist="35921" dir="2700000" algn="ctr" rotWithShape="0">
-                                <a:srgbClr val="808080"/>
-                              </a:outerShdw>
-                            </a:effectLst>
-                          </a14:hiddenEffects>
-                        </a:ext>
-                      </a:extLst>
-                    </p:spPr>
-                  </p:pic>
-                </p:oleObj>
-              </mc:Fallback>
-            </mc:AlternateContent>
-          </a:graphicData>
-        </a:graphic>
-      </p:graphicFrame>
-      <p:graphicFrame>
-        <p:nvGraphicFramePr>
-          <p:cNvPr id="6149" name="Object 6"/>
-          <p:cNvGraphicFramePr>
-            <a:graphicFrameLocks noGrp="1" noChangeAspect="1"/>
-          </p:cNvGraphicFramePr>
-          <p:nvPr>
-            <p:ph sz="quarter" idx="3"/>
-            <p:extLst>
-              <p:ext uri="{D42A27DB-BD31-4B8C-83A1-F6EECF244321}">
-                <p14:modId xmlns:p14="http://schemas.microsoft.com/office/powerpoint/2010/main" val="2138061314"/>
-              </p:ext>
-            </p:extLst>
-          </p:nvPr>
-        </p:nvGraphicFramePr>
-        <p:xfrm>
-          <a:off x="4018756" y="4658158"/>
-          <a:ext cx="4154487" cy="554037"/>
-        </p:xfrm>
-        <a:graphic>
-          <a:graphicData uri="http://schemas.openxmlformats.org/presentationml/2006/ole">
-            <mc:AlternateContent xmlns:mc="http://schemas.openxmlformats.org/markup-compatibility/2006">
-              <mc:Choice xmlns:v="urn:schemas-microsoft-com:vml" Requires="v">
-                <p:oleObj name="Equation" r:id="rId5" imgW="1524000" imgH="203200" progId="Equation.DSMT4">
-                  <p:embed/>
-                </p:oleObj>
-              </mc:Choice>
-              <mc:Fallback>
-                <p:oleObj name="Equation" r:id="rId5" imgW="1524000" imgH="203200" progId="Equation.DSMT4">
-                  <p:embed/>
-                  <p:pic>
-                    <p:nvPicPr>
-                      <p:cNvPr id="0" name=""/>
-                      <p:cNvPicPr>
-                        <a:picLocks noChangeAspect="1" noChangeArrowheads="1"/>
-                      </p:cNvPicPr>
-                      <p:nvPr/>
-                    </p:nvPicPr>
-                    <p:blipFill>
-                      <a:blip r:embed="rId6">
-                        <a:extLst>
-                          <a:ext uri="{28A0092B-C50C-407E-A947-70E740481C1C}">
-                            <a14:useLocalDpi xmlns:a14="http://schemas.microsoft.com/office/drawing/2010/main" val="0"/>
-                          </a:ext>
-                        </a:extLst>
-                      </a:blip>
-                      <a:srcRect/>
-                      <a:stretch>
-                        <a:fillRect/>
-                      </a:stretch>
-                    </p:blipFill>
-                    <p:spPr bwMode="auto">
-                      <a:xfrm>
-                        <a:off x="4018756" y="4658158"/>
-                        <a:ext cx="4154487" cy="554037"/>
-                      </a:xfrm>
-                      <a:prstGeom prst="rect">
-                        <a:avLst/>
-                      </a:prstGeom>
-                      <a:noFill/>
-                      <a:ln>
-                        <a:noFill/>
-                      </a:ln>
-                      <a:effectLst/>
-                      <a:extLst>
-                        <a:ext uri="{909E8E84-426E-40DD-AFC4-6F175D3DCCD1}">
-                          <a14:hiddenFill xmlns:a14="http://schemas.microsoft.com/office/drawing/2010/main">
-                            <a:solidFill>
-                              <a:srgbClr val="FFFFFF"/>
-                            </a:solidFill>
-                          </a14:hiddenFill>
-                        </a:ext>
-                        <a:ext uri="{91240B29-F687-4F45-9708-019B960494DF}">
-                          <a14:hiddenLine xmlns:a14="http://schemas.microsoft.com/office/drawing/2010/main" w="9525">
-                            <a:solidFill>
-                              <a:srgbClr val="000000"/>
-                            </a:solidFill>
-                            <a:miter lim="800000"/>
-                            <a:headEnd/>
-                            <a:tailEnd/>
-                          </a14:hiddenLine>
-                        </a:ext>
-                        <a:ext uri="{AF507438-7753-43E0-B8FC-AC1667EBCBE1}">
-                          <a14:hiddenEffects xmlns:a14="http://schemas.microsoft.com/office/drawing/2010/main">
-                            <a:effectLst>
-                              <a:outerShdw dist="35921" dir="2700000" algn="ctr" rotWithShape="0">
-                                <a:srgbClr val="808080"/>
-                              </a:outerShdw>
-                            </a:effectLst>
-                          </a14:hiddenEffects>
-                        </a:ext>
-                      </a:extLst>
-                    </p:spPr>
-                  </p:pic>
-                </p:oleObj>
-              </mc:Fallback>
-            </mc:AlternateContent>
-          </a:graphicData>
-        </a:graphic>
-      </p:graphicFrame>
+      <p:sp>
+        <p:nvSpPr>
+          <p:cNvPr id="6150" name="TextBox 6149"/>
+          <p:cNvSpPr txBox="1"/>
+          <p:nvPr/>
+        </p:nvSpPr>
+        <p:spPr>
+          <a:xfrm>
+            <a:off x="2779713" y="2743995"/>
+            <a:ext cx="5943600" cy="495300"/>
+          </a:xfrm>
+          <a:prstGeom prst="rect">
+            <a:avLst/>
+          </a:prstGeom>
+          <a:noFill/>
+        </p:spPr>
+        <p:txBody>
+          <a:bodyPr wrap="square" anchor="ctr" lIns="0" rIns="0" tIns="0" bIns="0">
+            <a:spAutoFit/>
+          </a:bodyPr>
+          <a:lstStyle/>
+          <a:p>
+            <a:r>
+              <a:rPr sz="2100">
+                <a:latin typeface="Cambria"/>
+              </a:rPr>
+              <a:t>P(A and B) = P(A ∩ B) = P(A) · P(B | A)</a:t>
+            </a:r>
+          </a:p>
+        </p:txBody>
+      </p:sp>
+      <p:sp>
+        <p:nvSpPr>
+          <p:cNvPr id="6151" name="TextBox 6150"/>
+          <p:cNvSpPr txBox="1"/>
+          <p:nvPr/>
+        </p:nvSpPr>
+        <p:spPr>
+          <a:xfrm>
+            <a:off x="4018756" y="4658158"/>
+            <a:ext cx="4154487" cy="554037"/>
+          </a:xfrm>
+          <a:prstGeom prst="rect">
+            <a:avLst/>
+          </a:prstGeom>
+          <a:noFill/>
+        </p:spPr>
+        <p:txBody>
+          <a:bodyPr wrap="square" anchor="ctr" lIns="0" rIns="0" tIns="0" bIns="0">
+            <a:spAutoFit/>
+          </a:bodyPr>
+          <a:lstStyle/>
+          <a:p>
+            <a:r>
+              <a:rPr sz="2400">
+                <a:latin typeface="Cambria"/>
+              </a:rPr>
+              <a:t>P(A and B) = P(A) · P(B)</a:t>
+            </a:r>
+          </a:p>
+        </p:txBody>
+      </p:sp>
     </p:spTree>
     <p:extLst>
       <p:ext uri="{BB962C8B-B14F-4D97-AF65-F5344CB8AC3E}">
@@ -26190,106 +25850,6 @@
           </a:extLst>
         </p:spPr>
       </p:pic>
-      <p:graphicFrame>
-        <p:nvGraphicFramePr>
-          <p:cNvPr id="73732" name="Object 4"/>
-          <p:cNvGraphicFramePr>
-            <a:graphicFrameLocks noGrp="1" noChangeAspect="1"/>
-          </p:cNvGraphicFramePr>
-          <p:nvPr>
-            <p:ph sz="quarter" idx="2"/>
-            <p:extLst>
-              <p:ext uri="{D42A27DB-BD31-4B8C-83A1-F6EECF244321}">
-                <p14:modId xmlns:p14="http://schemas.microsoft.com/office/powerpoint/2010/main" val="2023378143"/>
-              </p:ext>
-            </p:extLst>
-          </p:nvPr>
-        </p:nvGraphicFramePr>
-        <p:xfrm>
-          <a:off x="3086100" y="5715000"/>
-          <a:ext cx="5943600" cy="495300"/>
-        </p:xfrm>
-        <a:graphic>
-          <a:graphicData uri="http://schemas.openxmlformats.org/presentationml/2006/ole">
-            <mc:AlternateContent xmlns:mc="http://schemas.openxmlformats.org/markup-compatibility/2006">
-              <mc:Choice xmlns:v="urn:schemas-microsoft-com:vml" Requires="v">
-                <p:oleObj name="Equation" r:id="rId5" imgW="2438400" imgH="203200" progId="Equation.DSMT4">
-                  <p:embed/>
-                </p:oleObj>
-              </mc:Choice>
-              <mc:Fallback>
-                <p:oleObj name="Equation" r:id="rId5" imgW="2438400" imgH="203200" progId="Equation.DSMT4">
-                  <p:embed/>
-                  <p:pic>
-                    <p:nvPicPr>
-                      <p:cNvPr id="0" name=""/>
-                      <p:cNvPicPr>
-                        <a:picLocks noChangeAspect="1" noChangeArrowheads="1"/>
-                      </p:cNvPicPr>
-                      <p:nvPr/>
-                    </p:nvPicPr>
-                    <p:blipFill>
-                      <a:blip r:embed="rId6">
-                        <a:extLst>
-                          <a:ext uri="{28A0092B-C50C-407E-A947-70E740481C1C}">
-                            <a14:useLocalDpi xmlns:a14="http://schemas.microsoft.com/office/drawing/2010/main" val="0"/>
-                          </a:ext>
-                        </a:extLst>
-                      </a:blip>
-                      <a:srcRect/>
-                      <a:stretch>
-                        <a:fillRect/>
-                      </a:stretch>
-                    </p:blipFill>
-                    <p:spPr bwMode="auto">
-                      <a:xfrm>
-                        <a:off x="3086100" y="5715000"/>
-                        <a:ext cx="5943600" cy="495300"/>
-                      </a:xfrm>
-                      <a:prstGeom prst="rect">
-                        <a:avLst/>
-                      </a:prstGeom>
-                      <a:noFill/>
-                      <a:ln>
-                        <a:noFill/>
-                      </a:ln>
-                      <a:effectLst/>
-                      <a:extLst>
-                        <a:ext uri="{909E8E84-426E-40DD-AFC4-6F175D3DCCD1}">
-                          <a14:hiddenFill xmlns:a14="http://schemas.microsoft.com/office/drawing/2010/main">
-                            <a:solidFill>
-                              <a:srgbClr val="FFFFFF"/>
-                            </a:solidFill>
-                          </a14:hiddenFill>
-                        </a:ext>
-                        <a:ext uri="{91240B29-F687-4F45-9708-019B960494DF}">
-                          <a14:hiddenLine xmlns:a14="http://schemas.microsoft.com/office/drawing/2010/main" w="9525">
-                            <a:solidFill>
-                              <a:srgbClr val="000000"/>
-                            </a:solidFill>
-                            <a:miter lim="800000"/>
-                            <a:headEnd/>
-                            <a:tailEnd/>
-                          </a14:hiddenLine>
-                        </a:ext>
-                        <a:ext uri="{AF507438-7753-43E0-B8FC-AC1667EBCBE1}">
-                          <a14:hiddenEffects xmlns:a14="http://schemas.microsoft.com/office/drawing/2010/main">
-                            <a:effectLst>
-                              <a:outerShdw dist="35921" dir="2700000" algn="ctr" rotWithShape="0">
-                                <a:srgbClr val="808080"/>
-                              </a:outerShdw>
-                            </a:effectLst>
-                          </a14:hiddenEffects>
-                        </a:ext>
-                      </a:extLst>
-                    </p:spPr>
-                  </p:pic>
-                </p:oleObj>
-              </mc:Fallback>
-            </mc:AlternateContent>
-          </a:graphicData>
-        </a:graphic>
-      </p:graphicFrame>
       <p:sp>
         <p:nvSpPr>
           <p:cNvPr id="73733" name="TextBox 1"/>
@@ -26467,6 +26027,37 @@
                 <a:latin typeface="Cambria"/>
               </a:rPr>
               <a:t>Pr{A, B} = (Area common to A and B) / (Area of S)</a:t>
+            </a:r>
+          </a:p>
+        </p:txBody>
+      </p:sp>
+      <p:sp>
+        <p:nvSpPr>
+          <p:cNvPr id="73735" name="TextBox 73734"/>
+          <p:cNvSpPr txBox="1"/>
+          <p:nvPr/>
+        </p:nvSpPr>
+        <p:spPr>
+          <a:xfrm>
+            <a:off x="3086100" y="5715000"/>
+            <a:ext cx="5943600" cy="495300"/>
+          </a:xfrm>
+          <a:prstGeom prst="rect">
+            <a:avLst/>
+          </a:prstGeom>
+          <a:noFill/>
+        </p:spPr>
+        <p:txBody>
+          <a:bodyPr wrap="square" anchor="ctr" lIns="0" rIns="0" tIns="0" bIns="0">
+            <a:spAutoFit/>
+          </a:bodyPr>
+          <a:lstStyle/>
+          <a:p>
+            <a:r>
+              <a:rPr sz="2100">
+                <a:latin typeface="Cambria"/>
+              </a:rPr>
+              <a:t>P(A and B) = P(A ∩ B) = P(A) · P(B | A)</a:t>
             </a:r>
           </a:p>
         </p:txBody>
@@ -27972,196 +27563,6 @@
           </a:p>
         </p:txBody>
       </p:sp>
-      <p:graphicFrame>
-        <p:nvGraphicFramePr>
-          <p:cNvPr id="75779" name="Object 4"/>
-          <p:cNvGraphicFramePr>
-            <a:graphicFrameLocks noGrp="1" noChangeAspect="1"/>
-          </p:cNvGraphicFramePr>
-          <p:nvPr>
-            <p:ph sz="quarter" idx="2"/>
-          </p:nvPr>
-        </p:nvGraphicFramePr>
-        <p:xfrm>
-          <a:off x="3019425" y="2857501"/>
-          <a:ext cx="6224588" cy="411163"/>
-        </p:xfrm>
-        <a:graphic>
-          <a:graphicData uri="http://schemas.openxmlformats.org/presentationml/2006/ole">
-            <mc:AlternateContent xmlns:mc="http://schemas.openxmlformats.org/markup-compatibility/2006">
-              <mc:Choice xmlns:v="urn:schemas-microsoft-com:vml" Requires="v">
-                <p:oleObj name="Equation" r:id="rId3" imgW="3073400" imgH="203200" progId="Equation.DSMT4">
-                  <p:embed/>
-                </p:oleObj>
-              </mc:Choice>
-              <mc:Fallback>
-                <p:oleObj name="Equation" r:id="rId3" imgW="3073400" imgH="203200" progId="Equation.DSMT4">
-                  <p:embed/>
-                  <p:pic>
-                    <p:nvPicPr>
-                      <p:cNvPr id="0" name=""/>
-                      <p:cNvPicPr>
-                        <a:picLocks noChangeAspect="1" noChangeArrowheads="1"/>
-                      </p:cNvPicPr>
-                      <p:nvPr/>
-                    </p:nvPicPr>
-                    <p:blipFill>
-                      <a:blip r:embed="rId4">
-                        <a:extLst>
-                          <a:ext uri="{28A0092B-C50C-407E-A947-70E740481C1C}">
-                            <a14:useLocalDpi xmlns:a14="http://schemas.microsoft.com/office/drawing/2010/main" val="0"/>
-                          </a:ext>
-                        </a:extLst>
-                      </a:blip>
-                      <a:srcRect/>
-                      <a:stretch>
-                        <a:fillRect/>
-                      </a:stretch>
-                    </p:blipFill>
-                    <p:spPr bwMode="auto">
-                      <a:xfrm>
-                        <a:off x="3019425" y="2857501"/>
-                        <a:ext cx="6224588" cy="411163"/>
-                      </a:xfrm>
-                      <a:prstGeom prst="rect">
-                        <a:avLst/>
-                      </a:prstGeom>
-                      <a:noFill/>
-                      <a:ln>
-                        <a:noFill/>
-                      </a:ln>
-                      <a:effectLst/>
-                      <a:extLst>
-                        <a:ext uri="{909E8E84-426E-40DD-AFC4-6F175D3DCCD1}">
-                          <a14:hiddenFill xmlns:a14="http://schemas.microsoft.com/office/drawing/2010/main">
-                            <a:solidFill>
-                              <a:srgbClr val="FFFFFF"/>
-                            </a:solidFill>
-                          </a14:hiddenFill>
-                        </a:ext>
-                        <a:ext uri="{91240B29-F687-4F45-9708-019B960494DF}">
-                          <a14:hiddenLine xmlns:a14="http://schemas.microsoft.com/office/drawing/2010/main" w="9525">
-                            <a:solidFill>
-                              <a:srgbClr val="000000"/>
-                            </a:solidFill>
-                            <a:miter lim="800000"/>
-                            <a:headEnd/>
-                            <a:tailEnd/>
-                          </a14:hiddenLine>
-                        </a:ext>
-                        <a:ext uri="{AF507438-7753-43E0-B8FC-AC1667EBCBE1}">
-                          <a14:hiddenEffects xmlns:a14="http://schemas.microsoft.com/office/drawing/2010/main">
-                            <a:effectLst>
-                              <a:outerShdw dist="35921" dir="2700000" algn="ctr" rotWithShape="0">
-                                <a:srgbClr val="808080"/>
-                              </a:outerShdw>
-                            </a:effectLst>
-                          </a14:hiddenEffects>
-                        </a:ext>
-                      </a:extLst>
-                    </p:spPr>
-                  </p:pic>
-                </p:oleObj>
-              </mc:Fallback>
-            </mc:AlternateContent>
-          </a:graphicData>
-        </a:graphic>
-      </p:graphicFrame>
-      <p:graphicFrame>
-        <p:nvGraphicFramePr>
-          <p:cNvPr id="75780" name="Object 6"/>
-          <p:cNvGraphicFramePr>
-            <a:graphicFrameLocks noGrp="1" noChangeAspect="1"/>
-          </p:cNvGraphicFramePr>
-          <p:nvPr>
-            <p:ph sz="quarter" idx="3"/>
-          </p:nvPr>
-        </p:nvGraphicFramePr>
-        <p:xfrm>
-          <a:off x="4695825" y="4551363"/>
-          <a:ext cx="2971800" cy="393700"/>
-        </p:xfrm>
-        <a:graphic>
-          <a:graphicData uri="http://schemas.openxmlformats.org/presentationml/2006/ole">
-            <mc:AlternateContent xmlns:mc="http://schemas.openxmlformats.org/markup-compatibility/2006">
-              <mc:Choice xmlns:v="urn:schemas-microsoft-com:vml" Requires="v">
-                <p:oleObj name="Equation" r:id="rId5" imgW="1536033" imgH="203112" progId="Equation.DSMT4">
-                  <p:embed/>
-                </p:oleObj>
-              </mc:Choice>
-              <mc:Fallback>
-                <p:oleObj name="Equation" r:id="rId5" imgW="1536033" imgH="203112" progId="Equation.DSMT4">
-                  <p:embed/>
-                  <p:pic>
-                    <p:nvPicPr>
-                      <p:cNvPr id="0" name=""/>
-                      <p:cNvPicPr>
-                        <a:picLocks noChangeAspect="1" noChangeArrowheads="1"/>
-                      </p:cNvPicPr>
-                      <p:nvPr/>
-                    </p:nvPicPr>
-                    <p:blipFill>
-                      <a:blip r:embed="rId6">
-                        <a:extLst>
-                          <a:ext uri="{28A0092B-C50C-407E-A947-70E740481C1C}">
-                            <a14:useLocalDpi xmlns:a14="http://schemas.microsoft.com/office/drawing/2010/main" val="0"/>
-                          </a:ext>
-                        </a:extLst>
-                      </a:blip>
-                      <a:srcRect/>
-                      <a:stretch>
-                        <a:fillRect/>
-                      </a:stretch>
-                    </p:blipFill>
-                    <p:spPr bwMode="auto">
-                      <a:xfrm>
-                        <a:off x="4695825" y="4551363"/>
-                        <a:ext cx="2971800" cy="393700"/>
-                      </a:xfrm>
-                      <a:prstGeom prst="rect">
-                        <a:avLst/>
-                      </a:prstGeom>
-                      <a:noFill/>
-                      <a:ln>
-                        <a:noFill/>
-                      </a:ln>
-                      <a:effectLst/>
-                      <a:extLst>
-                        <a:ext uri="{909E8E84-426E-40DD-AFC4-6F175D3DCCD1}">
-                          <a14:hiddenFill xmlns:a14="http://schemas.microsoft.com/office/drawing/2010/main">
-                            <a:solidFill>
-                              <a:srgbClr val="FFFFFF"/>
-                            </a:solidFill>
-                          </a14:hiddenFill>
-                        </a:ext>
-                        <a:ext uri="{91240B29-F687-4F45-9708-019B960494DF}">
-                          <a14:hiddenLine xmlns:a14="http://schemas.microsoft.com/office/drawing/2010/main" w="9525">
-                            <a:solidFill>
-                              <a:srgbClr val="000000"/>
-                            </a:solidFill>
-                            <a:miter lim="800000"/>
-                            <a:headEnd/>
-                            <a:tailEnd/>
-                          </a14:hiddenLine>
-                        </a:ext>
-                        <a:ext uri="{AF507438-7753-43E0-B8FC-AC1667EBCBE1}">
-                          <a14:hiddenEffects xmlns:a14="http://schemas.microsoft.com/office/drawing/2010/main">
-                            <a:effectLst>
-                              <a:outerShdw dist="35921" dir="2700000" algn="ctr" rotWithShape="0">
-                                <a:srgbClr val="808080"/>
-                              </a:outerShdw>
-                            </a:effectLst>
-                          </a14:hiddenEffects>
-                        </a:ext>
-                      </a:extLst>
-                    </p:spPr>
-                  </p:pic>
-                </p:oleObj>
-              </mc:Fallback>
-            </mc:AlternateContent>
-          </a:graphicData>
-        </a:graphic>
-      </p:graphicFrame>
       <p:sp>
         <p:nvSpPr>
           <p:cNvPr id="75781" name="TextBox 5"/>
@@ -28502,6 +27903,68 @@
           </a:extLst>
         </p:spPr>
       </p:cxnSp>
+      <p:sp>
+        <p:nvSpPr>
+          <p:cNvPr id="75784" name="TextBox 75783"/>
+          <p:cNvSpPr txBox="1"/>
+          <p:nvPr/>
+        </p:nvSpPr>
+        <p:spPr>
+          <a:xfrm>
+            <a:off x="3019425" y="2857501"/>
+            <a:ext cx="6224588" cy="411163"/>
+          </a:xfrm>
+          <a:prstGeom prst="rect">
+            <a:avLst/>
+          </a:prstGeom>
+          <a:noFill/>
+        </p:spPr>
+        <p:txBody>
+          <a:bodyPr wrap="square" anchor="ctr" lIns="0" rIns="0" tIns="0" bIns="0">
+            <a:spAutoFit/>
+          </a:bodyPr>
+          <a:lstStyle/>
+          <a:p>
+            <a:r>
+              <a:rPr sz="1800">
+                <a:latin typeface="Cambria"/>
+              </a:rPr>
+              <a:t>P(A or B) = P(A ∪ B) = P(A) + P(B) − P(A and B)</a:t>
+            </a:r>
+          </a:p>
+        </p:txBody>
+      </p:sp>
+      <p:sp>
+        <p:nvSpPr>
+          <p:cNvPr id="75785" name="TextBox 75784"/>
+          <p:cNvSpPr txBox="1"/>
+          <p:nvPr/>
+        </p:nvSpPr>
+        <p:spPr>
+          <a:xfrm>
+            <a:off x="4695825" y="4551363"/>
+            <a:ext cx="3235569" cy="393700"/>
+          </a:xfrm>
+          <a:prstGeom prst="rect">
+            <a:avLst/>
+          </a:prstGeom>
+          <a:noFill/>
+        </p:spPr>
+        <p:txBody>
+          <a:bodyPr wrap="square" anchor="ctr" lIns="0" rIns="0" tIns="0" bIns="0">
+            <a:spAutoFit/>
+          </a:bodyPr>
+          <a:lstStyle/>
+          <a:p>
+            <a:r>
+              <a:rPr sz="1900">
+                <a:latin typeface="Cambria"/>
+              </a:rPr>
+              <a:t>P(A or B) = P(A) + P(B)</a:t>
+            </a:r>
+          </a:p>
+        </p:txBody>
+      </p:sp>
     </p:spTree>
     <p:extLst>
       <p:ext uri="{BB962C8B-B14F-4D97-AF65-F5344CB8AC3E}">
@@ -28620,101 +28083,6 @@
           </a:p>
         </p:txBody>
       </p:sp>
-      <p:graphicFrame>
-        <p:nvGraphicFramePr>
-          <p:cNvPr id="77827" name="Object 4"/>
-          <p:cNvGraphicFramePr>
-            <a:graphicFrameLocks noGrp="1" noChangeAspect="1"/>
-          </p:cNvGraphicFramePr>
-          <p:nvPr>
-            <p:ph sz="quarter" idx="2"/>
-          </p:nvPr>
-        </p:nvGraphicFramePr>
-        <p:xfrm>
-          <a:off x="3324225" y="2400301"/>
-          <a:ext cx="6224588" cy="411163"/>
-        </p:xfrm>
-        <a:graphic>
-          <a:graphicData uri="http://schemas.openxmlformats.org/presentationml/2006/ole">
-            <mc:AlternateContent xmlns:mc="http://schemas.openxmlformats.org/markup-compatibility/2006">
-              <mc:Choice xmlns:v="urn:schemas-microsoft-com:vml" Requires="v">
-                <p:oleObj name="Equation" r:id="rId3" imgW="3073400" imgH="203200" progId="Equation.DSMT4">
-                  <p:embed/>
-                </p:oleObj>
-              </mc:Choice>
-              <mc:Fallback>
-                <p:oleObj name="Equation" r:id="rId3" imgW="3073400" imgH="203200" progId="Equation.DSMT4">
-                  <p:embed/>
-                  <p:pic>
-                    <p:nvPicPr>
-                      <p:cNvPr id="0" name=""/>
-                      <p:cNvPicPr>
-                        <a:picLocks noChangeAspect="1" noChangeArrowheads="1"/>
-                      </p:cNvPicPr>
-                      <p:nvPr/>
-                    </p:nvPicPr>
-                    <p:blipFill>
-                      <a:blip r:embed="rId4">
-                        <a:extLst>
-                          <a:ext uri="{28A0092B-C50C-407E-A947-70E740481C1C}">
-                            <a14:useLocalDpi xmlns:a14="http://schemas.microsoft.com/office/drawing/2010/main" val="0"/>
-                          </a:ext>
-                        </a:extLst>
-                      </a:blip>
-                      <a:srcRect/>
-                      <a:stretch>
-                        <a:fillRect/>
-                      </a:stretch>
-                    </p:blipFill>
-                    <p:spPr bwMode="auto">
-                      <a:xfrm>
-                        <a:off x="3324225" y="2400301"/>
-                        <a:ext cx="6224588" cy="411163"/>
-                      </a:xfrm>
-                      <a:prstGeom prst="rect">
-                        <a:avLst/>
-                      </a:prstGeom>
-                      <a:noFill/>
-                      <a:ln>
-                        <a:noFill/>
-                      </a:ln>
-                      <a:effectLst/>
-                      <a:extLst>
-                        <a:ext uri="{909E8E84-426E-40DD-AFC4-6F175D3DCCD1}">
-                          <a14:hiddenFill xmlns:a14="http://schemas.microsoft.com/office/drawing/2010/main">
-                            <a:solidFill>
-                              <a:srgbClr val="FFFFFF"/>
-                            </a:solidFill>
-                          </a14:hiddenFill>
-                        </a:ext>
-                        <a:ext uri="{91240B29-F687-4F45-9708-019B960494DF}">
-                          <a14:hiddenLine xmlns:a14="http://schemas.microsoft.com/office/drawing/2010/main" w="9525">
-                            <a:solidFill>
-                              <a:srgbClr val="000000"/>
-                            </a:solidFill>
-                            <a:miter lim="800000"/>
-                            <a:headEnd/>
-                            <a:tailEnd/>
-                          </a14:hiddenLine>
-                        </a:ext>
-                        <a:ext uri="{AF507438-7753-43E0-B8FC-AC1667EBCBE1}">
-                          <a14:hiddenEffects xmlns:a14="http://schemas.microsoft.com/office/drawing/2010/main">
-                            <a:effectLst>
-                              <a:outerShdw dist="35921" dir="2700000" algn="ctr" rotWithShape="0">
-                                <a:srgbClr val="808080"/>
-                              </a:outerShdw>
-                            </a:effectLst>
-                          </a14:hiddenEffects>
-                        </a:ext>
-                      </a:extLst>
-                    </p:spPr>
-                  </p:pic>
-                </p:oleObj>
-              </mc:Fallback>
-            </mc:AlternateContent>
-          </a:graphicData>
-        </a:graphic>
-      </p:graphicFrame>
       <p:pic>
         <p:nvPicPr>
           <p:cNvPr id="77828" name="Picture 1" descr="Diagram: sample space S with two overlapping events A and B, overlap shaded, illustrating why the overlap is subtracted in the additive (OR) rule to avoid double counting." title="Diagram: sample space S with two overlapping events A and B, overlap shaded, ill"/>
@@ -29041,6 +28409,37 @@
           </a:extLst>
         </p:spPr>
       </p:cxnSp>
+      <p:sp>
+        <p:nvSpPr>
+          <p:cNvPr id="77829" name="TextBox 77828"/>
+          <p:cNvSpPr txBox="1"/>
+          <p:nvPr/>
+        </p:nvSpPr>
+        <p:spPr>
+          <a:xfrm>
+            <a:off x="3324225" y="2400301"/>
+            <a:ext cx="6224588" cy="411163"/>
+          </a:xfrm>
+          <a:prstGeom prst="rect">
+            <a:avLst/>
+          </a:prstGeom>
+          <a:noFill/>
+        </p:spPr>
+        <p:txBody>
+          <a:bodyPr wrap="square" anchor="ctr" lIns="0" rIns="0" tIns="0" bIns="0">
+            <a:spAutoFit/>
+          </a:bodyPr>
+          <a:lstStyle/>
+          <a:p>
+            <a:r>
+              <a:rPr sz="1800">
+                <a:latin typeface="Cambria"/>
+              </a:rPr>
+              <a:t>P(A or B) = P(A ∪ B) = P(A) + P(B) − P(A and B)</a:t>
+            </a:r>
+          </a:p>
+        </p:txBody>
+      </p:sp>
     </p:spTree>
     <p:extLst>
       <p:ext uri="{BB962C8B-B14F-4D97-AF65-F5344CB8AC3E}">
@@ -36671,125 +36070,101 @@
           </a:p>
         </p:txBody>
       </p:sp>
-      <p:graphicFrame>
-        <p:nvGraphicFramePr>
-          <p:cNvPr id="81922" name="Object 4"/>
-          <p:cNvGraphicFramePr>
-            <a:graphicFrameLocks noGrp="1" noChangeAspect="1"/>
-          </p:cNvGraphicFramePr>
-          <p:nvPr>
-            <p:ph idx="1"/>
-          </p:nvPr>
-        </p:nvGraphicFramePr>
-        <p:xfrm>
-          <a:off x="1828800" y="1820863"/>
-          <a:ext cx="8686800" cy="3714750"/>
-        </p:xfrm>
-        <a:graphic>
-          <a:graphicData uri="http://schemas.openxmlformats.org/presentationml/2006/ole">
-            <mc:AlternateContent xmlns:mc="http://schemas.openxmlformats.org/markup-compatibility/2006">
-              <mc:Choice xmlns:v="urn:schemas-microsoft-com:vml" Requires="v">
-                <p:oleObj name="Equation" r:id="rId3" imgW="4749800" imgH="2032000" progId="Equation.DSMT4">
-                  <p:embed/>
-                </p:oleObj>
-              </mc:Choice>
-              <mc:Fallback>
-                <p:oleObj name="Equation" r:id="rId3" imgW="4749800" imgH="2032000" progId="Equation.DSMT4">
-                  <p:embed/>
-                  <p:pic>
-                    <p:nvPicPr>
-                      <p:cNvPr id="0" name=""/>
-                      <p:cNvPicPr>
-                        <a:picLocks noChangeAspect="1" noChangeArrowheads="1"/>
-                      </p:cNvPicPr>
-                      <p:nvPr/>
-                    </p:nvPicPr>
-                    <p:blipFill>
-                      <a:blip r:embed="rId4">
-                        <a:extLst>
-                          <a:ext uri="{28A0092B-C50C-407E-A947-70E740481C1C}">
-                            <a14:useLocalDpi xmlns:a14="http://schemas.microsoft.com/office/drawing/2010/main" val="0"/>
-                          </a:ext>
-                        </a:extLst>
-                      </a:blip>
-                      <a:srcRect/>
-                      <a:stretch>
-                        <a:fillRect/>
-                      </a:stretch>
-                    </p:blipFill>
-                    <p:spPr bwMode="auto">
-                      <a:xfrm>
-                        <a:off x="1828800" y="1820863"/>
-                        <a:ext cx="8686800" cy="3714750"/>
-                      </a:xfrm>
-                      <a:prstGeom prst="rect">
-                        <a:avLst/>
-                      </a:prstGeom>
-                      <a:noFill/>
-                      <a:ln>
-                        <a:noFill/>
-                      </a:ln>
-                      <a:effectLst/>
-                      <a:extLst>
-                        <a:ext uri="{909E8E84-426E-40DD-AFC4-6F175D3DCCD1}">
-                          <a14:hiddenFill xmlns:a14="http://schemas.microsoft.com/office/drawing/2010/main">
-                            <a:solidFill>
-                              <a:srgbClr val="FFFFFF"/>
-                            </a:solidFill>
-                          </a14:hiddenFill>
-                        </a:ext>
-                        <a:ext uri="{91240B29-F687-4F45-9708-019B960494DF}">
-                          <a14:hiddenLine xmlns:a14="http://schemas.microsoft.com/office/drawing/2010/main" w="9525">
-                            <a:solidFill>
-                              <a:srgbClr val="000000"/>
-                            </a:solidFill>
-                            <a:miter lim="800000"/>
-                            <a:headEnd/>
-                            <a:tailEnd/>
-                          </a14:hiddenLine>
-                        </a:ext>
-                        <a:ext uri="{AF507438-7753-43E0-B8FC-AC1667EBCBE1}">
-                          <a14:hiddenEffects xmlns:a14="http://schemas.microsoft.com/office/drawing/2010/main">
-                            <a:effectLst>
-                              <a:outerShdw dist="35921" dir="2700000" algn="ctr" rotWithShape="0">
-                                <a:srgbClr val="808080"/>
-                              </a:outerShdw>
-                            </a:effectLst>
-                          </a14:hiddenEffects>
-                        </a:ext>
-                      </a:extLst>
-                    </p:spPr>
-                  </p:pic>
-                </p:oleObj>
-              </mc:Fallback>
-            </mc:AlternateContent>
-          </a:graphicData>
-        </a:graphic>
-      </p:graphicFrame>
-      <p:pic>
-        <p:nvPicPr>
-          <p:cNvPr id="3" name="Picture 2" descr="The word 'complement' rendered as an image, labeling the complement rule in the review of probability concepts." title="The word 'complement' rendered as an image, labeling the complement rule in the "/>
-          <p:cNvPicPr>
-            <a:picLocks noChangeAspect="1"/>
-          </p:cNvPicPr>
+      <p:sp>
+        <p:nvSpPr>
+          <p:cNvPr id="11267" name="TextBox 11266"/>
+          <p:cNvSpPr txBox="1"/>
           <p:nvPr/>
-        </p:nvPicPr>
-        <p:blipFill>
-          <a:blip r:embed="rId5"/>
-          <a:stretch>
-            <a:fillRect/>
-          </a:stretch>
-        </p:blipFill>
+        </p:nvSpPr>
         <p:spPr>
           <a:xfrm>
-            <a:off x="5805066" y="2313263"/>
-            <a:ext cx="1318548" cy="261771"/>
+            <a:off x="1828800" y="1820863"/>
+            <a:ext cx="8686800" cy="3714750"/>
           </a:xfrm>
           <a:prstGeom prst="rect">
             <a:avLst/>
           </a:prstGeom>
+          <a:noFill/>
         </p:spPr>
-      </p:pic>
+        <p:txBody>
+          <a:bodyPr wrap="square" anchor="ctr" lIns="0" rIns="0" tIns="0" bIns="0">
+            <a:spAutoFit/>
+          </a:bodyPr>
+          <a:lstStyle/>
+          <a:p>
+            <a:r>
+              <a:rPr sz="1600">
+                <a:latin typeface="Cambria"/>
+              </a:rPr>
+              <a:t>P(A) : probability of event A</a:t>
+            </a:r>
+          </a:p>
+          <a:p>
+            <a:r>
+              <a:rPr sz="1600">
+                <a:latin typeface="Cambria"/>
+              </a:rPr>
+              <a:t>P(A') = 1 − P(A) : probability of the complement of the event A</a:t>
+            </a:r>
+          </a:p>
+          <a:p>
+            <a:r>
+              <a:rPr sz="1600">
+                <a:latin typeface="Cambria"/>
+              </a:rPr>
+              <a:t>P(A) = P(A and B) + P(A and B') : decomposition of the probability of event A</a:t>
+            </a:r>
+          </a:p>
+          <a:p>
+            <a:r>
+              <a:rPr sz="1600">
+                <a:latin typeface="Cambria"/>
+              </a:rPr>
+              <a:t>P(B | A) = P(A and B) / P(A) : conditional events</a:t>
+            </a:r>
+          </a:p>
+          <a:p>
+            <a:r>
+              <a:rPr sz="1600">
+                <a:latin typeface="Cambria"/>
+              </a:rPr>
+              <a:t>P(B | A) = P(B) : independent events</a:t>
+            </a:r>
+          </a:p>
+          <a:p>
+            <a:r>
+              <a:rPr sz="1600">
+                <a:latin typeface="Cambria"/>
+              </a:rPr>
+              <a:t>P(A and B) = P(B | A) · P(A) : multiplication rule</a:t>
+            </a:r>
+          </a:p>
+          <a:p>
+            <a:r>
+              <a:rPr sz="1600">
+                <a:latin typeface="Cambria"/>
+              </a:rPr>
+              <a:t>P(A and B) = P(A) · P(B) : independent events</a:t>
+            </a:r>
+          </a:p>
+          <a:p>
+            <a:r>
+              <a:rPr sz="1600">
+                <a:latin typeface="Cambria"/>
+              </a:rPr>
+              <a:t>P(A or B) = P(A) + P(B) − P(A ∩ B) : addition rule</a:t>
+            </a:r>
+          </a:p>
+          <a:p>
+            <a:r>
+              <a:rPr sz="1600">
+                <a:latin typeface="Cambria"/>
+              </a:rPr>
+              <a:t>P(A or B) = P(A) + P(B) : mutually exclusive events</a:t>
+            </a:r>
+          </a:p>
+        </p:txBody>
+      </p:sp>
     </p:spTree>
     <p:extLst>
       <p:ext uri="{BB962C8B-B14F-4D97-AF65-F5344CB8AC3E}">
@@ -38583,259 +37958,6 @@
           </a:p>
         </p:txBody>
       </p:sp>
-      <p:graphicFrame>
-        <p:nvGraphicFramePr>
-          <p:cNvPr id="122883" name="Object 4"/>
-          <p:cNvGraphicFramePr>
-            <a:graphicFrameLocks noGrp="1" noChangeAspect="1"/>
-          </p:cNvGraphicFramePr>
-          <p:nvPr>
-            <p:ph sz="quarter" idx="2"/>
-          </p:nvPr>
-        </p:nvGraphicFramePr>
-        <p:xfrm>
-          <a:off x="9015412" y="2115006"/>
-          <a:ext cx="1882775" cy="457200"/>
-        </p:xfrm>
-        <a:graphic>
-          <a:graphicData uri="http://schemas.openxmlformats.org/presentationml/2006/ole">
-            <mc:AlternateContent xmlns:mc="http://schemas.openxmlformats.org/markup-compatibility/2006">
-              <mc:Choice xmlns:v="urn:schemas-microsoft-com:vml" Requires="v">
-                <p:oleObj name="Equation" r:id="rId3" imgW="939754" imgH="228738" progId="">
-                  <p:embed/>
-                </p:oleObj>
-              </mc:Choice>
-              <mc:Fallback>
-                <p:oleObj name="Equation" r:id="rId3" imgW="939754" imgH="228738" progId="">
-                  <p:embed/>
-                  <p:pic>
-                    <p:nvPicPr>
-                      <p:cNvPr id="122883" name="Object 4"/>
-                      <p:cNvPicPr>
-                        <a:picLocks noGrp="1" noChangeAspect="1" noChangeArrowheads="1"/>
-                      </p:cNvPicPr>
-                      <p:nvPr/>
-                    </p:nvPicPr>
-                    <p:blipFill>
-                      <a:blip r:embed="rId4">
-                        <a:extLst>
-                          <a:ext uri="{28A0092B-C50C-407E-A947-70E740481C1C}">
-                            <a14:useLocalDpi xmlns:a14="http://schemas.microsoft.com/office/drawing/2010/main" val="0"/>
-                          </a:ext>
-                        </a:extLst>
-                      </a:blip>
-                      <a:srcRect/>
-                      <a:stretch>
-                        <a:fillRect/>
-                      </a:stretch>
-                    </p:blipFill>
-                    <p:spPr bwMode="auto">
-                      <a:xfrm>
-                        <a:off x="9015412" y="2115006"/>
-                        <a:ext cx="1882775" cy="457200"/>
-                      </a:xfrm>
-                      <a:prstGeom prst="rect">
-                        <a:avLst/>
-                      </a:prstGeom>
-                      <a:noFill/>
-                      <a:ln>
-                        <a:noFill/>
-                      </a:ln>
-                      <a:extLst>
-                        <a:ext uri="{909E8E84-426E-40DD-AFC4-6F175D3DCCD1}">
-                          <a14:hiddenFill xmlns:a14="http://schemas.microsoft.com/office/drawing/2010/main">
-                            <a:solidFill>
-                              <a:srgbClr val="FFFFFF"/>
-                            </a:solidFill>
-                          </a14:hiddenFill>
-                        </a:ext>
-                        <a:ext uri="{91240B29-F687-4F45-9708-019B960494DF}">
-                          <a14:hiddenLine xmlns:a14="http://schemas.microsoft.com/office/drawing/2010/main" w="9525">
-                            <a:solidFill>
-                              <a:schemeClr val="tx1"/>
-                            </a:solidFill>
-                            <a:miter lim="800000"/>
-                            <a:headEnd/>
-                            <a:tailEnd/>
-                          </a14:hiddenLine>
-                        </a:ext>
-                      </a:extLst>
-                    </p:spPr>
-                  </p:pic>
-                </p:oleObj>
-              </mc:Fallback>
-            </mc:AlternateContent>
-          </a:graphicData>
-        </a:graphic>
-      </p:graphicFrame>
-      <p:graphicFrame>
-        <p:nvGraphicFramePr>
-          <p:cNvPr id="122884" name="Object 6"/>
-          <p:cNvGraphicFramePr>
-            <a:graphicFrameLocks noGrp="1" noChangeAspect="1"/>
-          </p:cNvGraphicFramePr>
-          <p:nvPr>
-            <p:ph sz="quarter" idx="3"/>
-          </p:nvPr>
-        </p:nvGraphicFramePr>
-        <p:xfrm>
-          <a:off x="3237707" y="2973387"/>
-          <a:ext cx="2422525" cy="703263"/>
-        </p:xfrm>
-        <a:graphic>
-          <a:graphicData uri="http://schemas.openxmlformats.org/presentationml/2006/ole">
-            <mc:AlternateContent xmlns:mc="http://schemas.openxmlformats.org/markup-compatibility/2006">
-              <mc:Choice xmlns:v="urn:schemas-microsoft-com:vml" Requires="v">
-                <p:oleObj name="Equation" r:id="rId5" imgW="787078" imgH="228738" progId="">
-                  <p:embed/>
-                </p:oleObj>
-              </mc:Choice>
-              <mc:Fallback>
-                <p:oleObj name="Equation" r:id="rId5" imgW="787078" imgH="228738" progId="">
-                  <p:embed/>
-                  <p:pic>
-                    <p:nvPicPr>
-                      <p:cNvPr id="122884" name="Object 6"/>
-                      <p:cNvPicPr>
-                        <a:picLocks noGrp="1" noChangeAspect="1" noChangeArrowheads="1"/>
-                      </p:cNvPicPr>
-                      <p:nvPr/>
-                    </p:nvPicPr>
-                    <p:blipFill>
-                      <a:blip r:embed="rId6">
-                        <a:extLst>
-                          <a:ext uri="{28A0092B-C50C-407E-A947-70E740481C1C}">
-                            <a14:useLocalDpi xmlns:a14="http://schemas.microsoft.com/office/drawing/2010/main" val="0"/>
-                          </a:ext>
-                        </a:extLst>
-                      </a:blip>
-                      <a:srcRect/>
-                      <a:stretch>
-                        <a:fillRect/>
-                      </a:stretch>
-                    </p:blipFill>
-                    <p:spPr bwMode="auto">
-                      <a:xfrm>
-                        <a:off x="3237707" y="2973387"/>
-                        <a:ext cx="2422525" cy="703263"/>
-                      </a:xfrm>
-                      <a:prstGeom prst="rect">
-                        <a:avLst/>
-                      </a:prstGeom>
-                      <a:noFill/>
-                      <a:ln>
-                        <a:noFill/>
-                      </a:ln>
-                      <a:extLst>
-                        <a:ext uri="{909E8E84-426E-40DD-AFC4-6F175D3DCCD1}">
-                          <a14:hiddenFill xmlns:a14="http://schemas.microsoft.com/office/drawing/2010/main">
-                            <a:solidFill>
-                              <a:srgbClr val="FFFFFF"/>
-                            </a:solidFill>
-                          </a14:hiddenFill>
-                        </a:ext>
-                        <a:ext uri="{91240B29-F687-4F45-9708-019B960494DF}">
-                          <a14:hiddenLine xmlns:a14="http://schemas.microsoft.com/office/drawing/2010/main" w="9525">
-                            <a:solidFill>
-                              <a:schemeClr val="tx1"/>
-                            </a:solidFill>
-                            <a:miter lim="800000"/>
-                            <a:headEnd/>
-                            <a:tailEnd/>
-                          </a14:hiddenLine>
-                        </a:ext>
-                      </a:extLst>
-                    </p:spPr>
-                  </p:pic>
-                </p:oleObj>
-              </mc:Fallback>
-            </mc:AlternateContent>
-          </a:graphicData>
-        </a:graphic>
-      </p:graphicFrame>
-      <p:graphicFrame>
-        <p:nvGraphicFramePr>
-          <p:cNvPr id="122885" name="Object 8"/>
-          <p:cNvGraphicFramePr>
-            <a:graphicFrameLocks noChangeAspect="1"/>
-          </p:cNvGraphicFramePr>
-          <p:nvPr/>
-        </p:nvGraphicFramePr>
-        <p:xfrm>
-          <a:off x="4543426" y="4945064"/>
-          <a:ext cx="2286000" cy="1317625"/>
-        </p:xfrm>
-        <a:graphic>
-          <a:graphicData uri="http://schemas.openxmlformats.org/presentationml/2006/ole">
-            <mc:AlternateContent xmlns:mc="http://schemas.openxmlformats.org/markup-compatibility/2006">
-              <mc:Choice xmlns:v="urn:schemas-microsoft-com:vml" Requires="v">
-                <p:oleObj name="Equation" r:id="rId7" imgW="749047" imgH="431570" progId="">
-                  <p:embed/>
-                </p:oleObj>
-              </mc:Choice>
-              <mc:Fallback>
-                <p:oleObj name="Equation" r:id="rId7" imgW="749047" imgH="431570" progId="">
-                  <p:embed/>
-                  <p:pic>
-                    <p:nvPicPr>
-                      <p:cNvPr id="122885" name="Object 8"/>
-                      <p:cNvPicPr>
-                        <a:picLocks noChangeAspect="1" noChangeArrowheads="1"/>
-                      </p:cNvPicPr>
-                      <p:nvPr/>
-                    </p:nvPicPr>
-                    <p:blipFill>
-                      <a:blip r:embed="rId8">
-                        <a:extLst>
-                          <a:ext uri="{28A0092B-C50C-407E-A947-70E740481C1C}">
-                            <a14:useLocalDpi xmlns:a14="http://schemas.microsoft.com/office/drawing/2010/main" val="0"/>
-                          </a:ext>
-                        </a:extLst>
-                      </a:blip>
-                      <a:srcRect/>
-                      <a:stretch>
-                        <a:fillRect/>
-                      </a:stretch>
-                    </p:blipFill>
-                    <p:spPr bwMode="auto">
-                      <a:xfrm>
-                        <a:off x="4543426" y="4945064"/>
-                        <a:ext cx="2286000" cy="1317625"/>
-                      </a:xfrm>
-                      <a:prstGeom prst="rect">
-                        <a:avLst/>
-                      </a:prstGeom>
-                      <a:noFill/>
-                      <a:ln>
-                        <a:noFill/>
-                      </a:ln>
-                      <a:extLst>
-                        <a:ext uri="{909E8E84-426E-40DD-AFC4-6F175D3DCCD1}">
-                          <a14:hiddenFill xmlns:a14="http://schemas.microsoft.com/office/drawing/2010/main">
-                            <a:solidFill>
-                              <a:srgbClr val="FFFFFF"/>
-                            </a:solidFill>
-                          </a14:hiddenFill>
-                        </a:ext>
-                        <a:ext uri="{91240B29-F687-4F45-9708-019B960494DF}">
-                          <a14:hiddenLine xmlns:a14="http://schemas.microsoft.com/office/drawing/2010/main" w="9525">
-                            <a:solidFill>
-                              <a:srgbClr val="000000"/>
-                            </a:solidFill>
-                            <a:miter lim="800000"/>
-                            <a:headEnd/>
-                            <a:tailEnd/>
-                          </a14:hiddenLine>
-                        </a:ext>
-                      </a:extLst>
-                    </p:spPr>
-                  </p:pic>
-                </p:oleObj>
-              </mc:Fallback>
-            </mc:AlternateContent>
-          </a:graphicData>
-        </a:graphic>
-      </p:graphicFrame>
       <p:sp>
         <p:nvSpPr>
           <p:cNvPr id="122886" name="TextBox 6"/>
@@ -39470,6 +38592,153 @@
                 </a:solidFill>
               </a:rPr>
               <a:t>Lower summation limit</a:t>
+            </a:r>
+          </a:p>
+        </p:txBody>
+      </p:sp>
+      <p:sp>
+        <p:nvSpPr>
+          <p:cNvPr id="122888" name="TextBox 122887"/>
+          <p:cNvSpPr txBox="1"/>
+          <p:nvPr/>
+        </p:nvSpPr>
+        <p:spPr>
+          <a:xfrm>
+            <a:off x="9015412" y="2115006"/>
+            <a:ext cx="2532184" cy="457200"/>
+          </a:xfrm>
+          <a:prstGeom prst="rect">
+            <a:avLst/>
+          </a:prstGeom>
+          <a:noFill/>
+        </p:spPr>
+        <p:txBody>
+          <a:bodyPr wrap="square" anchor="ctr" lIns="0" rIns="0" tIns="0" bIns="0">
+            <a:spAutoFit/>
+          </a:bodyPr>
+          <a:lstStyle/>
+          <a:p>
+            <a:r>
+              <a:rPr sz="1900">
+                <a:latin typeface="Cambria"/>
+              </a:rPr>
+              <a:t>{x</a:t>
+            </a:r>
+            <a:r>
+              <a:rPr sz="1900" baseline="-25000">
+                <a:latin typeface="Cambria"/>
+              </a:rPr>
+              <a:t>i</a:t>
+            </a:r>
+            <a:r>
+              <a:rPr sz="1900">
+                <a:latin typeface="Cambria"/>
+              </a:rPr>
+              <a:t> : i = 1, …, N}</a:t>
+            </a:r>
+          </a:p>
+        </p:txBody>
+      </p:sp>
+      <p:sp>
+        <p:nvSpPr>
+          <p:cNvPr id="122889" name="TextBox 122888"/>
+          <p:cNvSpPr txBox="1"/>
+          <p:nvPr/>
+        </p:nvSpPr>
+        <p:spPr>
+          <a:xfrm>
+            <a:off x="3237707" y="2973387"/>
+            <a:ext cx="2422525" cy="703263"/>
+          </a:xfrm>
+          <a:prstGeom prst="rect">
+            <a:avLst/>
+          </a:prstGeom>
+          <a:noFill/>
+        </p:spPr>
+        <p:txBody>
+          <a:bodyPr wrap="square" anchor="ctr" lIns="0" rIns="0" tIns="0" bIns="0">
+            <a:spAutoFit/>
+          </a:bodyPr>
+          <a:lstStyle/>
+          <a:p>
+            <a:r>
+              <a:rPr sz="2600">
+                <a:latin typeface="Cambria"/>
+              </a:rPr>
+              <a:t>0 ≤ P(x</a:t>
+            </a:r>
+            <a:r>
+              <a:rPr sz="2600" baseline="-25000">
+                <a:latin typeface="Cambria"/>
+              </a:rPr>
+              <a:t>i</a:t>
+            </a:r>
+            <a:r>
+              <a:rPr sz="2600">
+                <a:latin typeface="Cambria"/>
+              </a:rPr>
+              <a:t>) ≤ 1</a:t>
+            </a:r>
+          </a:p>
+        </p:txBody>
+      </p:sp>
+      <p:sp>
+        <p:nvSpPr>
+          <p:cNvPr id="122890" name="TextBox 122889"/>
+          <p:cNvSpPr txBox="1"/>
+          <p:nvPr/>
+        </p:nvSpPr>
+        <p:spPr>
+          <a:xfrm>
+            <a:off x="4543426" y="4945064"/>
+            <a:ext cx="2286000" cy="1317625"/>
+          </a:xfrm>
+          <a:prstGeom prst="rect">
+            <a:avLst/>
+          </a:prstGeom>
+          <a:noFill/>
+        </p:spPr>
+        <p:txBody>
+          <a:bodyPr wrap="square" anchor="ctr" lIns="0" rIns="0" tIns="0" bIns="0">
+            <a:spAutoFit/>
+          </a:bodyPr>
+          <a:lstStyle/>
+          <a:p>
+            <a:r>
+              <a:rPr sz="2100">
+                <a:latin typeface="Cambria"/>
+              </a:rPr>
+              <a:t>Σ</a:t>
+            </a:r>
+            <a:r>
+              <a:rPr sz="2100" baseline="-25000">
+                <a:latin typeface="Cambria"/>
+              </a:rPr>
+              <a:t>i=1</a:t>
+            </a:r>
+            <a:r>
+              <a:rPr sz="2100" baseline="30000">
+                <a:latin typeface="Cambria"/>
+              </a:rPr>
+              <a:t>N</a:t>
+            </a:r>
+            <a:r>
+              <a:rPr sz="2100">
+                <a:latin typeface="Cambria"/>
+              </a:rPr>
+              <a:t> P(x</a:t>
+            </a:r>
+            <a:r>
+              <a:rPr sz="2100" baseline="-25000">
+                <a:latin typeface="Cambria"/>
+              </a:rPr>
+              <a:t>i</a:t>
+            </a:r>
+            <a:r>
+              <a:rPr sz="2100">
+                <a:latin typeface="Cambria"/>
+              </a:rPr>
+              <a:t>) = 1</a:t>
             </a:r>
           </a:p>
         </p:txBody>
@@ -40299,91 +39568,6 @@
           </a:p>
         </p:txBody>
       </p:sp>
-      <p:graphicFrame>
-        <p:nvGraphicFramePr>
-          <p:cNvPr id="129028" name="Object 5"/>
-          <p:cNvGraphicFramePr>
-            <a:graphicFrameLocks noGrp="1" noChangeAspect="1"/>
-          </p:cNvGraphicFramePr>
-          <p:nvPr>
-            <p:ph sz="half" idx="2"/>
-          </p:nvPr>
-        </p:nvGraphicFramePr>
-        <p:xfrm>
-          <a:off x="5105400" y="2971800"/>
-          <a:ext cx="2362200" cy="1085850"/>
-        </p:xfrm>
-        <a:graphic>
-          <a:graphicData uri="http://schemas.openxmlformats.org/presentationml/2006/ole">
-            <mc:AlternateContent xmlns:mc="http://schemas.openxmlformats.org/markup-compatibility/2006">
-              <mc:Choice xmlns:v="urn:schemas-microsoft-com:vml" Requires="v">
-                <p:oleObj name="Equation" r:id="rId3" imgW="939754" imgH="431570" progId="">
-                  <p:embed/>
-                </p:oleObj>
-              </mc:Choice>
-              <mc:Fallback>
-                <p:oleObj name="Equation" r:id="rId3" imgW="939754" imgH="431570" progId="">
-                  <p:embed/>
-                  <p:pic>
-                    <p:nvPicPr>
-                      <p:cNvPr id="129028" name="Object 5"/>
-                      <p:cNvPicPr>
-                        <a:picLocks noGrp="1" noChangeAspect="1" noChangeArrowheads="1"/>
-                      </p:cNvPicPr>
-                      <p:nvPr/>
-                    </p:nvPicPr>
-                    <p:blipFill>
-                      <a:blip r:embed="rId4">
-                        <a:extLst>
-                          <a:ext uri="{28A0092B-C50C-407E-A947-70E740481C1C}">
-                            <a14:useLocalDpi xmlns:a14="http://schemas.microsoft.com/office/drawing/2010/main" val="0"/>
-                          </a:ext>
-                        </a:extLst>
-                      </a:blip>
-                      <a:srcRect/>
-                      <a:stretch>
-                        <a:fillRect/>
-                      </a:stretch>
-                    </p:blipFill>
-                    <p:spPr bwMode="auto">
-                      <a:xfrm>
-                        <a:off x="5105400" y="2971800"/>
-                        <a:ext cx="2362200" cy="1085850"/>
-                      </a:xfrm>
-                      <a:prstGeom prst="rect">
-                        <a:avLst/>
-                      </a:prstGeom>
-                      <a:noFill/>
-                      <a:ln>
-                        <a:noFill/>
-                      </a:ln>
-                      <a:extLst>
-                        <a:ext uri="{909E8E84-426E-40DD-AFC4-6F175D3DCCD1}">
-                          <a14:hiddenFill xmlns:a14="http://schemas.microsoft.com/office/drawing/2010/main">
-                            <a:solidFill>
-                              <a:srgbClr val="FFFFFF"/>
-                            </a:solidFill>
-                          </a14:hiddenFill>
-                        </a:ext>
-                        <a:ext uri="{91240B29-F687-4F45-9708-019B960494DF}">
-                          <a14:hiddenLine xmlns:a14="http://schemas.microsoft.com/office/drawing/2010/main" w="9525">
-                            <a:solidFill>
-                              <a:schemeClr val="tx1"/>
-                            </a:solidFill>
-                            <a:miter lim="800000"/>
-                            <a:headEnd/>
-                            <a:tailEnd/>
-                          </a14:hiddenLine>
-                        </a:ext>
-                      </a:extLst>
-                    </p:spPr>
-                  </p:pic>
-                </p:oleObj>
-              </mc:Fallback>
-            </mc:AlternateContent>
-          </a:graphicData>
-        </a:graphic>
-      </p:graphicFrame>
       <p:sp>
         <p:nvSpPr>
           <p:cNvPr id="129029" name="TextBox 5"/>
@@ -42212,6 +41396,79 @@
             <a:r>
               <a:rPr lang="en-US" altLang="en-US" sz="2400"/>
               <a:t>This is just a weighted average!</a:t>
+            </a:r>
+          </a:p>
+        </p:txBody>
+      </p:sp>
+      <p:sp>
+        <p:nvSpPr>
+          <p:cNvPr id="129037" name="TextBox 129036"/>
+          <p:cNvSpPr txBox="1"/>
+          <p:nvPr/>
+        </p:nvSpPr>
+        <p:spPr>
+          <a:xfrm>
+            <a:off x="5105400" y="2971800"/>
+            <a:ext cx="2362200" cy="1085850"/>
+          </a:xfrm>
+          <a:prstGeom prst="rect">
+            <a:avLst/>
+          </a:prstGeom>
+          <a:noFill/>
+        </p:spPr>
+        <p:txBody>
+          <a:bodyPr wrap="square" anchor="ctr" lIns="0" rIns="0" tIns="0" bIns="0">
+            <a:spAutoFit/>
+          </a:bodyPr>
+          <a:lstStyle/>
+          <a:p>
+            <a:r>
+              <a:rPr sz="1800">
+                <a:latin typeface="Cambria"/>
+              </a:rPr>
+              <a:t>μ = Σ</a:t>
+            </a:r>
+            <a:r>
+              <a:rPr sz="1800" baseline="-25000">
+                <a:latin typeface="Cambria"/>
+              </a:rPr>
+              <a:t>i=1</a:t>
+            </a:r>
+            <a:r>
+              <a:rPr sz="1800" baseline="30000">
+                <a:latin typeface="Cambria"/>
+              </a:rPr>
+              <a:t>N</a:t>
+            </a:r>
+            <a:r>
+              <a:rPr sz="1800">
+                <a:latin typeface="Cambria"/>
+              </a:rPr>
+              <a:t> x</a:t>
+            </a:r>
+            <a:r>
+              <a:rPr sz="1800" baseline="-25000">
+                <a:latin typeface="Cambria"/>
+              </a:rPr>
+              <a:t>i</a:t>
+            </a:r>
+            <a:r>
+              <a:rPr sz="1800">
+                <a:latin typeface="Cambria"/>
+              </a:rPr>
+              <a:t> P(x</a:t>
+            </a:r>
+            <a:r>
+              <a:rPr sz="1800" baseline="-25000">
+                <a:latin typeface="Cambria"/>
+              </a:rPr>
+              <a:t>i</a:t>
+            </a:r>
+            <a:r>
+              <a:rPr sz="1800">
+                <a:latin typeface="Cambria"/>
+              </a:rPr>
+              <a:t>)</a:t>
             </a:r>
           </a:p>
         </p:txBody>
@@ -42692,91 +41949,6 @@
           </a:p>
         </p:txBody>
       </p:sp>
-      <p:graphicFrame>
-        <p:nvGraphicFramePr>
-          <p:cNvPr id="131076" name="Object 5"/>
-          <p:cNvGraphicFramePr>
-            <a:graphicFrameLocks noGrp="1" noChangeAspect="1"/>
-          </p:cNvGraphicFramePr>
-          <p:nvPr>
-            <p:ph sz="half" idx="2"/>
-          </p:nvPr>
-        </p:nvGraphicFramePr>
-        <p:xfrm>
-          <a:off x="3802063" y="2617391"/>
-          <a:ext cx="3865562" cy="1095375"/>
-        </p:xfrm>
-        <a:graphic>
-          <a:graphicData uri="http://schemas.openxmlformats.org/presentationml/2006/ole">
-            <mc:AlternateContent xmlns:mc="http://schemas.openxmlformats.org/markup-compatibility/2006">
-              <mc:Choice xmlns:v="urn:schemas-microsoft-com:vml" Requires="v">
-                <p:oleObj name="Equation" r:id="rId3" imgW="1524368" imgH="431831" progId="">
-                  <p:embed/>
-                </p:oleObj>
-              </mc:Choice>
-              <mc:Fallback>
-                <p:oleObj name="Equation" r:id="rId3" imgW="1524368" imgH="431831" progId="">
-                  <p:embed/>
-                  <p:pic>
-                    <p:nvPicPr>
-                      <p:cNvPr id="131076" name="Object 5"/>
-                      <p:cNvPicPr>
-                        <a:picLocks noGrp="1" noChangeAspect="1" noChangeArrowheads="1"/>
-                      </p:cNvPicPr>
-                      <p:nvPr/>
-                    </p:nvPicPr>
-                    <p:blipFill>
-                      <a:blip r:embed="rId4">
-                        <a:extLst>
-                          <a:ext uri="{28A0092B-C50C-407E-A947-70E740481C1C}">
-                            <a14:useLocalDpi xmlns:a14="http://schemas.microsoft.com/office/drawing/2010/main" val="0"/>
-                          </a:ext>
-                        </a:extLst>
-                      </a:blip>
-                      <a:srcRect/>
-                      <a:stretch>
-                        <a:fillRect/>
-                      </a:stretch>
-                    </p:blipFill>
-                    <p:spPr bwMode="auto">
-                      <a:xfrm>
-                        <a:off x="3802063" y="2617391"/>
-                        <a:ext cx="3865562" cy="1095375"/>
-                      </a:xfrm>
-                      <a:prstGeom prst="rect">
-                        <a:avLst/>
-                      </a:prstGeom>
-                      <a:noFill/>
-                      <a:ln>
-                        <a:noFill/>
-                      </a:ln>
-                      <a:extLst>
-                        <a:ext uri="{909E8E84-426E-40DD-AFC4-6F175D3DCCD1}">
-                          <a14:hiddenFill xmlns:a14="http://schemas.microsoft.com/office/drawing/2010/main">
-                            <a:solidFill>
-                              <a:srgbClr val="FFFFFF"/>
-                            </a:solidFill>
-                          </a14:hiddenFill>
-                        </a:ext>
-                        <a:ext uri="{91240B29-F687-4F45-9708-019B960494DF}">
-                          <a14:hiddenLine xmlns:a14="http://schemas.microsoft.com/office/drawing/2010/main" w="9525">
-                            <a:solidFill>
-                              <a:schemeClr val="tx1"/>
-                            </a:solidFill>
-                            <a:miter lim="800000"/>
-                            <a:headEnd/>
-                            <a:tailEnd/>
-                          </a14:hiddenLine>
-                        </a:ext>
-                      </a:extLst>
-                    </p:spPr>
-                  </p:pic>
-                </p:oleObj>
-              </mc:Fallback>
-            </mc:AlternateContent>
-          </a:graphicData>
-        </a:graphic>
-      </p:graphicFrame>
       <p:sp>
         <p:nvSpPr>
           <p:cNvPr id="131077" name="TextBox 1"/>
@@ -43001,6 +42173,91 @@
             <a:r>
               <a:rPr lang="en-US" altLang="en-US" sz="2400"/>
               <a:t>This is just a weighted average!</a:t>
+            </a:r>
+          </a:p>
+        </p:txBody>
+      </p:sp>
+      <p:sp>
+        <p:nvSpPr>
+          <p:cNvPr id="131078" name="TextBox 131077"/>
+          <p:cNvSpPr txBox="1"/>
+          <p:nvPr/>
+        </p:nvSpPr>
+        <p:spPr>
+          <a:xfrm>
+            <a:off x="3802063" y="2617391"/>
+            <a:ext cx="3865562" cy="1095375"/>
+          </a:xfrm>
+          <a:prstGeom prst="rect">
+            <a:avLst/>
+          </a:prstGeom>
+          <a:noFill/>
+        </p:spPr>
+        <p:txBody>
+          <a:bodyPr wrap="square" anchor="ctr" lIns="0" rIns="0" tIns="0" bIns="0">
+            <a:spAutoFit/>
+          </a:bodyPr>
+          <a:lstStyle/>
+          <a:p>
+            <a:r>
+              <a:rPr sz="2100">
+                <a:latin typeface="Cambria"/>
+              </a:rPr>
+              <a:t>E(X) = μ</a:t>
+            </a:r>
+            <a:r>
+              <a:rPr sz="2100" baseline="-25000">
+                <a:latin typeface="Cambria"/>
+              </a:rPr>
+              <a:t>X</a:t>
+            </a:r>
+            <a:r>
+              <a:rPr sz="2100">
+                <a:latin typeface="Cambria"/>
+              </a:rPr>
+              <a:t> = Σ</a:t>
+            </a:r>
+            <a:r>
+              <a:rPr sz="2100" baseline="-25000">
+                <a:latin typeface="Cambria"/>
+              </a:rPr>
+              <a:t>i=1</a:t>
+            </a:r>
+            <a:r>
+              <a:rPr sz="2100" baseline="30000">
+                <a:latin typeface="Cambria"/>
+              </a:rPr>
+              <a:t>N</a:t>
+            </a:r>
+            <a:r>
+              <a:rPr sz="2100">
+                <a:latin typeface="Cambria"/>
+              </a:rPr>
+              <a:t> x</a:t>
+            </a:r>
+            <a:r>
+              <a:rPr sz="2100" baseline="-25000">
+                <a:latin typeface="Cambria"/>
+              </a:rPr>
+              <a:t>i</a:t>
+            </a:r>
+            <a:r>
+              <a:rPr sz="2100">
+                <a:latin typeface="Cambria"/>
+              </a:rPr>
+              <a:t> P(x</a:t>
+            </a:r>
+            <a:r>
+              <a:rPr sz="2100" baseline="-25000">
+                <a:latin typeface="Cambria"/>
+              </a:rPr>
+              <a:t>i</a:t>
+            </a:r>
+            <a:r>
+              <a:rPr sz="2100">
+                <a:latin typeface="Cambria"/>
+              </a:rPr>
+              <a:t>)</a:t>
             </a:r>
           </a:p>
         </p:txBody>
@@ -43202,91 +42459,6 @@
           </a:p>
         </p:txBody>
       </p:sp>
-      <p:graphicFrame>
-        <p:nvGraphicFramePr>
-          <p:cNvPr id="133123" name="Object 4"/>
-          <p:cNvGraphicFramePr>
-            <a:graphicFrameLocks noGrp="1" noChangeAspect="1"/>
-          </p:cNvGraphicFramePr>
-          <p:nvPr>
-            <p:ph sz="quarter" idx="2"/>
-          </p:nvPr>
-        </p:nvGraphicFramePr>
-        <p:xfrm>
-          <a:off x="4881076" y="2434774"/>
-          <a:ext cx="2855913" cy="882650"/>
-        </p:xfrm>
-        <a:graphic>
-          <a:graphicData uri="http://schemas.openxmlformats.org/presentationml/2006/ole">
-            <mc:AlternateContent xmlns:mc="http://schemas.openxmlformats.org/markup-compatibility/2006">
-              <mc:Choice xmlns:v="urn:schemas-microsoft-com:vml" Requires="v">
-                <p:oleObj name="Equation" r:id="rId3" imgW="1396678" imgH="431570" progId="">
-                  <p:embed/>
-                </p:oleObj>
-              </mc:Choice>
-              <mc:Fallback>
-                <p:oleObj name="Equation" r:id="rId3" imgW="1396678" imgH="431570" progId="">
-                  <p:embed/>
-                  <p:pic>
-                    <p:nvPicPr>
-                      <p:cNvPr id="133123" name="Object 4"/>
-                      <p:cNvPicPr>
-                        <a:picLocks noGrp="1" noChangeAspect="1" noChangeArrowheads="1"/>
-                      </p:cNvPicPr>
-                      <p:nvPr/>
-                    </p:nvPicPr>
-                    <p:blipFill>
-                      <a:blip r:embed="rId4">
-                        <a:extLst>
-                          <a:ext uri="{28A0092B-C50C-407E-A947-70E740481C1C}">
-                            <a14:useLocalDpi xmlns:a14="http://schemas.microsoft.com/office/drawing/2010/main" val="0"/>
-                          </a:ext>
-                        </a:extLst>
-                      </a:blip>
-                      <a:srcRect/>
-                      <a:stretch>
-                        <a:fillRect/>
-                      </a:stretch>
-                    </p:blipFill>
-                    <p:spPr bwMode="auto">
-                      <a:xfrm>
-                        <a:off x="4881076" y="2434774"/>
-                        <a:ext cx="2855913" cy="882650"/>
-                      </a:xfrm>
-                      <a:prstGeom prst="rect">
-                        <a:avLst/>
-                      </a:prstGeom>
-                      <a:noFill/>
-                      <a:ln>
-                        <a:noFill/>
-                      </a:ln>
-                      <a:extLst>
-                        <a:ext uri="{909E8E84-426E-40DD-AFC4-6F175D3DCCD1}">
-                          <a14:hiddenFill xmlns:a14="http://schemas.microsoft.com/office/drawing/2010/main">
-                            <a:solidFill>
-                              <a:srgbClr val="FFFFFF"/>
-                            </a:solidFill>
-                          </a14:hiddenFill>
-                        </a:ext>
-                        <a:ext uri="{91240B29-F687-4F45-9708-019B960494DF}">
-                          <a14:hiddenLine xmlns:a14="http://schemas.microsoft.com/office/drawing/2010/main" w="9525">
-                            <a:solidFill>
-                              <a:schemeClr val="tx1"/>
-                            </a:solidFill>
-                            <a:miter lim="800000"/>
-                            <a:headEnd/>
-                            <a:tailEnd/>
-                          </a14:hiddenLine>
-                        </a:ext>
-                      </a:extLst>
-                    </p:spPr>
-                  </p:pic>
-                </p:oleObj>
-              </mc:Fallback>
-            </mc:AlternateContent>
-          </a:graphicData>
-        </a:graphic>
-      </p:graphicFrame>
       <p:sp>
         <p:nvSpPr>
           <p:cNvPr id="133125" name="Rectangle 1"/>
@@ -43548,91 +42720,6 @@
           </a:p>
         </p:txBody>
       </p:sp>
-      <p:graphicFrame>
-        <p:nvGraphicFramePr>
-          <p:cNvPr id="8" name="Object 5"/>
-          <p:cNvGraphicFramePr>
-            <a:graphicFrameLocks noGrp="1" noChangeAspect="1"/>
-          </p:cNvGraphicFramePr>
-          <p:nvPr>
-            <p:ph sz="half" idx="2"/>
-          </p:nvPr>
-        </p:nvGraphicFramePr>
-        <p:xfrm>
-          <a:off x="4985267" y="5561043"/>
-          <a:ext cx="3865562" cy="1095375"/>
-        </p:xfrm>
-        <a:graphic>
-          <a:graphicData uri="http://schemas.openxmlformats.org/presentationml/2006/ole">
-            <mc:AlternateContent xmlns:mc="http://schemas.openxmlformats.org/markup-compatibility/2006">
-              <mc:Choice xmlns:v="urn:schemas-microsoft-com:vml" Requires="v">
-                <p:oleObj name="Equation" r:id="rId5" imgW="1524368" imgH="431831" progId="">
-                  <p:embed/>
-                </p:oleObj>
-              </mc:Choice>
-              <mc:Fallback>
-                <p:oleObj name="Equation" r:id="rId5" imgW="1524368" imgH="431831" progId="">
-                  <p:embed/>
-                  <p:pic>
-                    <p:nvPicPr>
-                      <p:cNvPr id="8" name="Object 5"/>
-                      <p:cNvPicPr>
-                        <a:picLocks noGrp="1" noChangeAspect="1" noChangeArrowheads="1"/>
-                      </p:cNvPicPr>
-                      <p:nvPr/>
-                    </p:nvPicPr>
-                    <p:blipFill>
-                      <a:blip r:embed="rId6">
-                        <a:extLst>
-                          <a:ext uri="{28A0092B-C50C-407E-A947-70E740481C1C}">
-                            <a14:useLocalDpi xmlns:a14="http://schemas.microsoft.com/office/drawing/2010/main" val="0"/>
-                          </a:ext>
-                        </a:extLst>
-                      </a:blip>
-                      <a:srcRect/>
-                      <a:stretch>
-                        <a:fillRect/>
-                      </a:stretch>
-                    </p:blipFill>
-                    <p:spPr bwMode="auto">
-                      <a:xfrm>
-                        <a:off x="4985267" y="5561043"/>
-                        <a:ext cx="3865562" cy="1095375"/>
-                      </a:xfrm>
-                      <a:prstGeom prst="rect">
-                        <a:avLst/>
-                      </a:prstGeom>
-                      <a:noFill/>
-                      <a:ln>
-                        <a:noFill/>
-                      </a:ln>
-                      <a:extLst>
-                        <a:ext uri="{909E8E84-426E-40DD-AFC4-6F175D3DCCD1}">
-                          <a14:hiddenFill xmlns:a14="http://schemas.microsoft.com/office/drawing/2010/main">
-                            <a:solidFill>
-                              <a:srgbClr val="FFFFFF"/>
-                            </a:solidFill>
-                          </a14:hiddenFill>
-                        </a:ext>
-                        <a:ext uri="{91240B29-F687-4F45-9708-019B960494DF}">
-                          <a14:hiddenLine xmlns:a14="http://schemas.microsoft.com/office/drawing/2010/main" w="9525">
-                            <a:solidFill>
-                              <a:schemeClr val="tx1"/>
-                            </a:solidFill>
-                            <a:miter lim="800000"/>
-                            <a:headEnd/>
-                            <a:tailEnd/>
-                          </a14:hiddenLine>
-                        </a:ext>
-                      </a:extLst>
-                    </p:spPr>
-                  </p:pic>
-                </p:oleObj>
-              </mc:Fallback>
-            </mc:AlternateContent>
-          </a:graphicData>
-        </a:graphic>
-      </p:graphicFrame>
       <p:sp>
         <p:nvSpPr>
           <p:cNvPr id="10" name="Rectangle 9"/>
@@ -43906,6 +42993,188 @@
               <a:buNone/>
             </a:pPr>
             <a:endParaRPr lang="en-US" altLang="en-US" sz="2800" dirty="0"/>
+          </a:p>
+        </p:txBody>
+      </p:sp>
+      <p:sp>
+        <p:nvSpPr>
+          <p:cNvPr id="133126" name="TextBox 133125"/>
+          <p:cNvSpPr txBox="1"/>
+          <p:nvPr/>
+        </p:nvSpPr>
+        <p:spPr>
+          <a:xfrm>
+            <a:off x="4881076" y="2434774"/>
+            <a:ext cx="2855913" cy="882650"/>
+          </a:xfrm>
+          <a:prstGeom prst="rect">
+            <a:avLst/>
+          </a:prstGeom>
+          <a:noFill/>
+        </p:spPr>
+        <p:txBody>
+          <a:bodyPr wrap="square" anchor="ctr" lIns="0" rIns="0" tIns="0" bIns="0">
+            <a:spAutoFit/>
+          </a:bodyPr>
+          <a:lstStyle/>
+          <a:p>
+            <a:r>
+              <a:rPr sz="1500">
+                <a:latin typeface="Cambria"/>
+              </a:rPr>
+              <a:t>σ</a:t>
+            </a:r>
+            <a:r>
+              <a:rPr sz="1500" baseline="30000">
+                <a:latin typeface="Cambria"/>
+              </a:rPr>
+              <a:t>2</a:t>
+            </a:r>
+            <a:r>
+              <a:rPr sz="1500">
+                <a:latin typeface="Cambria"/>
+              </a:rPr>
+              <a:t> = Σ</a:t>
+            </a:r>
+            <a:r>
+              <a:rPr sz="1500" baseline="-25000">
+                <a:latin typeface="Cambria"/>
+              </a:rPr>
+              <a:t>i=1</a:t>
+            </a:r>
+            <a:r>
+              <a:rPr sz="1500" baseline="30000">
+                <a:latin typeface="Cambria"/>
+              </a:rPr>
+              <a:t>N</a:t>
+            </a:r>
+            <a:r>
+              <a:rPr sz="1500">
+                <a:latin typeface="Cambria"/>
+              </a:rPr>
+              <a:t> (x</a:t>
+            </a:r>
+            <a:r>
+              <a:rPr sz="1500" baseline="-25000">
+                <a:latin typeface="Cambria"/>
+              </a:rPr>
+              <a:t>i</a:t>
+            </a:r>
+            <a:r>
+              <a:rPr sz="1500">
+                <a:latin typeface="Cambria"/>
+              </a:rPr>
+              <a:t> − μ)</a:t>
+            </a:r>
+            <a:r>
+              <a:rPr sz="1500" baseline="30000">
+                <a:latin typeface="Cambria"/>
+              </a:rPr>
+              <a:t>2</a:t>
+            </a:r>
+            <a:r>
+              <a:rPr sz="1500">
+                <a:latin typeface="Cambria"/>
+              </a:rPr>
+              <a:t> P(x</a:t>
+            </a:r>
+            <a:r>
+              <a:rPr sz="1500" baseline="-25000">
+                <a:latin typeface="Cambria"/>
+              </a:rPr>
+              <a:t>i</a:t>
+            </a:r>
+            <a:r>
+              <a:rPr sz="1500">
+                <a:latin typeface="Cambria"/>
+              </a:rPr>
+              <a:t>)</a:t>
+            </a:r>
+          </a:p>
+        </p:txBody>
+      </p:sp>
+      <p:sp>
+        <p:nvSpPr>
+          <p:cNvPr id="133127" name="TextBox 133126"/>
+          <p:cNvSpPr txBox="1"/>
+          <p:nvPr/>
+        </p:nvSpPr>
+        <p:spPr>
+          <a:xfrm>
+            <a:off x="4985267" y="5561043"/>
+            <a:ext cx="3865562" cy="1095375"/>
+          </a:xfrm>
+          <a:prstGeom prst="rect">
+            <a:avLst/>
+          </a:prstGeom>
+          <a:noFill/>
+        </p:spPr>
+        <p:txBody>
+          <a:bodyPr wrap="square" anchor="ctr" lIns="0" rIns="0" tIns="0" bIns="0">
+            <a:spAutoFit/>
+          </a:bodyPr>
+          <a:lstStyle/>
+          <a:p>
+            <a:r>
+              <a:rPr sz="2100">
+                <a:latin typeface="Cambria"/>
+              </a:rPr>
+              <a:t>E(X) = μ</a:t>
+            </a:r>
+            <a:r>
+              <a:rPr sz="2100" baseline="-25000">
+                <a:latin typeface="Cambria"/>
+              </a:rPr>
+              <a:t>X</a:t>
+            </a:r>
+            <a:r>
+              <a:rPr sz="2100">
+                <a:latin typeface="Cambria"/>
+              </a:rPr>
+              <a:t> = Σ</a:t>
+            </a:r>
+            <a:r>
+              <a:rPr sz="2100" baseline="-25000">
+                <a:latin typeface="Cambria"/>
+              </a:rPr>
+              <a:t>i=1</a:t>
+            </a:r>
+            <a:r>
+              <a:rPr sz="2100" baseline="30000">
+                <a:latin typeface="Cambria"/>
+              </a:rPr>
+              <a:t>N</a:t>
+            </a:r>
+            <a:r>
+              <a:rPr sz="2100">
+                <a:latin typeface="Cambria"/>
+              </a:rPr>
+              <a:t> x</a:t>
+            </a:r>
+            <a:r>
+              <a:rPr sz="2100" baseline="-25000">
+                <a:latin typeface="Cambria"/>
+              </a:rPr>
+              <a:t>i</a:t>
+            </a:r>
+            <a:r>
+              <a:rPr sz="2100">
+                <a:latin typeface="Cambria"/>
+              </a:rPr>
+              <a:t> P(x</a:t>
+            </a:r>
+            <a:r>
+              <a:rPr sz="2100" baseline="-25000">
+                <a:latin typeface="Cambria"/>
+              </a:rPr>
+              <a:t>i</a:t>
+            </a:r>
+            <a:r>
+              <a:rPr sz="2100">
+                <a:latin typeface="Cambria"/>
+              </a:rPr>
+              <a:t>)</a:t>
+            </a:r>
           </a:p>
         </p:txBody>
       </p:sp>

--- a/Day1_Probability/FW536_Day1_Morning_intro to probability_accessible.pptx
+++ b/Day1_Probability/FW536_Day1_Morning_intro to probability_accessible.pptx
@@ -9352,60 +9352,6 @@
       </p:pic>
       <p:pic>
         <p:nvPicPr>
-          <p:cNvPr id="50179" name="Picture 3" descr="Equation: Pr{A} = (Area of A) divided by (Area of S); probability of event A is its area relative to the whole sample space S." title="Equation: Pr{A} = (Area of A) divided by (Area of S); probability of event A is "/>
-          <p:cNvPicPr>
-            <a:picLocks noChangeAspect="1"/>
-          </p:cNvPicPr>
-          <p:nvPr/>
-        </p:nvPicPr>
-        <p:blipFill>
-          <a:blip r:embed="rId4">
-            <a:extLst>
-              <a:ext uri="{28A0092B-C50C-407E-A947-70E740481C1C}">
-                <a14:useLocalDpi xmlns:a14="http://schemas.microsoft.com/office/drawing/2010/main" val="0"/>
-              </a:ext>
-            </a:extLst>
-          </a:blip>
-          <a:srcRect/>
-          <a:stretch>
-            <a:fillRect/>
-          </a:stretch>
-        </p:blipFill>
-        <p:spPr bwMode="auto">
-          <a:xfrm>
-            <a:off x="1524000" y="902596"/>
-            <a:ext cx="9144000" cy="2828925"/>
-          </a:xfrm>
-          <a:prstGeom prst="rect">
-            <a:avLst/>
-          </a:prstGeom>
-          <a:noFill/>
-          <a:ln>
-            <a:noFill/>
-          </a:ln>
-          <a:extLst>
-            <a:ext uri="{909E8E84-426E-40DD-AFC4-6F175D3DCCD1}">
-              <a14:hiddenFill xmlns:a14="http://schemas.microsoft.com/office/drawing/2010/main">
-                <a:solidFill>
-                  <a:srgbClr val="FFFFFF"/>
-                </a:solidFill>
-              </a14:hiddenFill>
-            </a:ext>
-            <a:ext uri="{91240B29-F687-4F45-9708-019B960494DF}">
-              <a14:hiddenLine xmlns:a14="http://schemas.microsoft.com/office/drawing/2010/main" w="9525">
-                <a:solidFill>
-                  <a:srgbClr val="000000"/>
-                </a:solidFill>
-                <a:miter lim="800000"/>
-                <a:headEnd/>
-                <a:tailEnd/>
-              </a14:hiddenLine>
-            </a:ext>
-          </a:extLst>
-        </p:spPr>
-      </p:pic>
-      <p:pic>
-        <p:nvPicPr>
           <p:cNvPr id="2" name="Picture 10" descr="Book cover: The Theoretical Biologist's Toolbox by Marc Mangel." title="Book cover: The Theoretical Biologist's Toolbox by Marc Mangel.">
             <a:extLst>
               <a:ext uri="{FF2B5EF4-FFF2-40B4-BE49-F238E27FC236}">
@@ -9451,6 +9397,69 @@
           </a:extLst>
         </p:spPr>
       </p:pic>
+      <p:sp>
+        <p:nvSpPr>
+          <p:cNvPr id="50179" name="TextBox 50178"/>
+          <p:cNvSpPr txBox="1"/>
+          <p:nvPr/>
+        </p:nvSpPr>
+        <p:spPr>
+          <a:xfrm>
+            <a:off x="1688592" y="1067188"/>
+            <a:ext cx="8814816" cy="1289304"/>
+          </a:xfrm>
+          <a:prstGeom prst="rect">
+            <a:avLst/>
+          </a:prstGeom>
+          <a:noFill/>
+        </p:spPr>
+        <p:txBody>
+          <a:bodyPr wrap="square" anchor="t" lIns="0" rIns="0" tIns="0" bIns="0">
+            <a:spAutoFit/>
+          </a:bodyPr>
+          <a:lstStyle/>
+          <a:p>
+            <a:r>
+              <a:rPr sz="1800" b="0">
+                <a:latin typeface="Calibri"/>
+              </a:rPr>
+              <a:t>In probability theory, we are concerned with outcomes of “experiments,” broadly defined. We let S be all the possible outcomes (often called the sample space) and A, B, etc., particular outcomes that might interest us (Figure 3.1a). We then define the probability that A occurs, denoted by Pr{A}, by</a:t>
+            </a:r>
+          </a:p>
+        </p:txBody>
+      </p:sp>
+      <p:sp>
+        <p:nvSpPr>
+          <p:cNvPr id="50180" name="TextBox 50179"/>
+          <p:cNvSpPr txBox="1"/>
+          <p:nvPr/>
+        </p:nvSpPr>
+        <p:spPr>
+          <a:xfrm>
+            <a:off x="1688592" y="2521084"/>
+            <a:ext cx="8814816" cy="363474"/>
+          </a:xfrm>
+          <a:prstGeom prst="rect">
+            <a:avLst/>
+          </a:prstGeom>
+          <a:noFill/>
+        </p:spPr>
+        <p:txBody>
+          <a:bodyPr wrap="square" anchor="t" lIns="0" rIns="0" tIns="0" bIns="0">
+            <a:spAutoFit/>
+          </a:bodyPr>
+          <a:lstStyle/>
+          <a:p>
+            <a:pPr algn="ctr"/>
+            <a:r>
+              <a:rPr sz="1800" b="0">
+                <a:latin typeface="Cambria"/>
+              </a:rPr>
+              <a:t>Pr{A} = (Area of A) / (Area of S)                    (3.1)</a:t>
+            </a:r>
+          </a:p>
+        </p:txBody>
+      </p:sp>
     </p:spTree>
     <p:extLst>
       <p:ext uri="{BB962C8B-B14F-4D97-AF65-F5344CB8AC3E}">
@@ -25154,60 +25163,6 @@
           </a:extLst>
         </p:spPr>
       </p:pic>
-      <p:pic>
-        <p:nvPicPr>
-          <p:cNvPr id="67587" name="Picture 2" descr="Equation: Pr{A given B} = (Area common to A and B) divided by (Area of B); conditioning on B restricts the sample space to B." title="Equation: Pr{A given B} = (Area common to A and B) divided by (Area of B); condi"/>
-          <p:cNvPicPr>
-            <a:picLocks noChangeAspect="1"/>
-          </p:cNvPicPr>
-          <p:nvPr/>
-        </p:nvPicPr>
-        <p:blipFill>
-          <a:blip r:embed="rId4">
-            <a:extLst>
-              <a:ext uri="{28A0092B-C50C-407E-A947-70E740481C1C}">
-                <a14:useLocalDpi xmlns:a14="http://schemas.microsoft.com/office/drawing/2010/main" val="0"/>
-              </a:ext>
-            </a:extLst>
-          </a:blip>
-          <a:srcRect/>
-          <a:stretch>
-            <a:fillRect/>
-          </a:stretch>
-        </p:blipFill>
-        <p:spPr bwMode="auto">
-          <a:xfrm>
-            <a:off x="2286000" y="914401"/>
-            <a:ext cx="8382000" cy="3108325"/>
-          </a:xfrm>
-          <a:prstGeom prst="rect">
-            <a:avLst/>
-          </a:prstGeom>
-          <a:noFill/>
-          <a:ln>
-            <a:noFill/>
-          </a:ln>
-          <a:extLst>
-            <a:ext uri="{909E8E84-426E-40DD-AFC4-6F175D3DCCD1}">
-              <a14:hiddenFill xmlns:a14="http://schemas.microsoft.com/office/drawing/2010/main">
-                <a:solidFill>
-                  <a:srgbClr val="FFFFFF"/>
-                </a:solidFill>
-              </a14:hiddenFill>
-            </a:ext>
-            <a:ext uri="{91240B29-F687-4F45-9708-019B960494DF}">
-              <a14:hiddenLine xmlns:a14="http://schemas.microsoft.com/office/drawing/2010/main" w="9525">
-                <a:solidFill>
-                  <a:srgbClr val="000000"/>
-                </a:solidFill>
-                <a:miter lim="800000"/>
-                <a:headEnd/>
-                <a:tailEnd/>
-              </a14:hiddenLine>
-            </a:ext>
-          </a:extLst>
-        </p:spPr>
-      </p:pic>
       <p:sp>
         <p:nvSpPr>
           <p:cNvPr id="2" name="TextBox 1"/>
@@ -25237,6 +25192,69 @@
             <a:r>
               <a:rPr lang="en-US" dirty="0"/>
               <a:t> Toolbox</a:t>
+            </a:r>
+          </a:p>
+        </p:txBody>
+      </p:sp>
+      <p:sp>
+        <p:nvSpPr>
+          <p:cNvPr id="67587" name="TextBox 67586"/>
+          <p:cNvSpPr txBox="1"/>
+          <p:nvPr/>
+        </p:nvSpPr>
+        <p:spPr>
+          <a:xfrm>
+            <a:off x="2450592" y="1078993"/>
+            <a:ext cx="8052816" cy="1512189"/>
+          </a:xfrm>
+          <a:prstGeom prst="rect">
+            <a:avLst/>
+          </a:prstGeom>
+          <a:noFill/>
+        </p:spPr>
+        <p:txBody>
+          <a:bodyPr wrap="square" anchor="t" lIns="0" rIns="0" tIns="0" bIns="0">
+            <a:spAutoFit/>
+          </a:bodyPr>
+          <a:lstStyle/>
+          <a:p>
+            <a:r>
+              <a:rPr sz="1700" b="0">
+                <a:latin typeface="Calibri"/>
+              </a:rPr>
+              <a:t>Now suppose we are told that B has occurred. We may then ask, what is the probability that A has also occurred? The answer to this question is called the conditional probability of A given B and is denoted by Pr{A|B}. If we know that B has occurred, the collection of all possible outcomes is no longer S, but is B. Applying the definition in Eq. (3.1) to this situation (Figure 3.1a) we must have</a:t>
+            </a:r>
+          </a:p>
+        </p:txBody>
+      </p:sp>
+      <p:sp>
+        <p:nvSpPr>
+          <p:cNvPr id="67588" name="TextBox 67587"/>
+          <p:cNvSpPr txBox="1"/>
+          <p:nvPr/>
+        </p:nvSpPr>
+        <p:spPr>
+          <a:xfrm>
+            <a:off x="2450592" y="2755774"/>
+            <a:ext cx="8052816" cy="346329"/>
+          </a:xfrm>
+          <a:prstGeom prst="rect">
+            <a:avLst/>
+          </a:prstGeom>
+          <a:noFill/>
+        </p:spPr>
+        <p:txBody>
+          <a:bodyPr wrap="square" anchor="t" lIns="0" rIns="0" tIns="0" bIns="0">
+            <a:spAutoFit/>
+          </a:bodyPr>
+          <a:lstStyle/>
+          <a:p>
+            <a:pPr algn="ctr"/>
+            <a:r>
+              <a:rPr sz="1700" b="0">
+                <a:latin typeface="Cambria"/>
+              </a:rPr>
+              <a:t>Pr{A|B} = (Area common to A and B) / (Area of B)                    (3.4)</a:t>
             </a:r>
           </a:p>
         </p:txBody>
@@ -43718,35 +43736,297 @@
           <a:chExt cx="0" cy="0"/>
         </a:xfrm>
       </p:grpSpPr>
-      <p:pic>
-        <p:nvPicPr>
-          <p:cNvPr id="2" name="Picture 1" descr="Example slide: table giving a pmf for X with values 1 to 5 and probabilities 1/10, 2/10, 4/10, 2/10, 1/10. Asks to compute the variance and standard deviation." title="Example slide: table giving a pmf for X with values 1 to 5 and probabilities 1/1"/>
-          <p:cNvPicPr>
-            <a:picLocks noChangeAspect="1"/>
-          </p:cNvPicPr>
+      <p:sp>
+        <p:nvSpPr>
+          <p:cNvPr id="2" name="TextBox 1"/>
+          <p:cNvSpPr txBox="1"/>
           <p:nvPr/>
-        </p:nvPicPr>
-        <p:blipFill rotWithShape="1">
-          <a:blip r:embed="rId2">
-            <a:extLst>
-              <a:ext uri="{28A0092B-C50C-407E-A947-70E740481C1C}">
-                <a14:useLocalDpi xmlns:a14="http://schemas.microsoft.com/office/drawing/2010/main" val="0"/>
-              </a:ext>
-            </a:extLst>
-          </a:blip>
-          <a:srcRect b="37440"/>
-          <a:stretch/>
-        </p:blipFill>
+        </p:nvSpPr>
         <p:spPr>
           <a:xfrm>
-            <a:off x="668175" y="227563"/>
-            <a:ext cx="10472576" cy="4909221"/>
+            <a:off x="832767" y="392155"/>
+            <a:ext cx="10143392" cy="569214"/>
           </a:xfrm>
           <a:prstGeom prst="rect">
             <a:avLst/>
           </a:prstGeom>
+          <a:noFill/>
         </p:spPr>
-      </p:pic>
+        <p:txBody>
+          <a:bodyPr wrap="square" anchor="t" lIns="0" rIns="0" tIns="0" bIns="0">
+            <a:spAutoFit/>
+          </a:bodyPr>
+          <a:lstStyle/>
+          <a:p>
+            <a:r>
+              <a:rPr sz="3000" b="0">
+                <a:solidFill>
+                  <a:srgbClr val="3333CC"/>
+                </a:solidFill>
+                <a:latin typeface="Calibri"/>
+              </a:rPr>
+              <a:t>Computation from tables</a:t>
+            </a:r>
+          </a:p>
+        </p:txBody>
+      </p:sp>
+      <p:sp>
+        <p:nvSpPr>
+          <p:cNvPr id="3" name="TextBox 2"/>
+          <p:cNvSpPr txBox="1"/>
+          <p:nvPr/>
+        </p:nvSpPr>
+        <p:spPr>
+          <a:xfrm>
+            <a:off x="832767" y="1345417"/>
+            <a:ext cx="10143392" cy="397764"/>
+          </a:xfrm>
+          <a:prstGeom prst="rect">
+            <a:avLst/>
+          </a:prstGeom>
+          <a:noFill/>
+        </p:spPr>
+        <p:txBody>
+          <a:bodyPr wrap="square" anchor="t" lIns="0" rIns="0" tIns="0" bIns="0">
+            <a:spAutoFit/>
+          </a:bodyPr>
+          <a:lstStyle/>
+          <a:p>
+            <a:r>
+              <a:rPr sz="2000" b="1">
+                <a:latin typeface="Calibri"/>
+              </a:rPr>
+              <a:t>Example. Compute the variance and standard deviation of X.</a:t>
+            </a:r>
+          </a:p>
+        </p:txBody>
+      </p:sp>
+      <p:graphicFrame>
+        <p:nvGraphicFramePr>
+          <p:cNvPr id="4" name="Table 3"/>
+          <p:cNvGraphicFramePr>
+            <a:graphicFrameLocks noGrp="1"/>
+          </p:cNvGraphicFramePr>
+          <p:nvPr/>
+        </p:nvGraphicFramePr>
+        <p:xfrm>
+          <a:off x="832767" y="1907773"/>
+          <a:ext cx="5852160" cy="660400"/>
+        </p:xfrm>
+        <a:graphic>
+          <a:graphicData uri="http://schemas.openxmlformats.org/drawingml/2006/table">
+            <a:tbl>
+              <a:tblPr firstCol="1">
+                <a:tableStyleId>{5C22544A-7EE6-4342-B048-85BDC9FD1C3A}</a:tableStyleId>
+              </a:tblPr>
+              <a:tblGrid>
+                <a:gridCol w="975360"/>
+                <a:gridCol w="975360"/>
+                <a:gridCol w="975360"/>
+                <a:gridCol w="975360"/>
+                <a:gridCol w="975360"/>
+                <a:gridCol w="975360"/>
+              </a:tblGrid>
+              <a:tr h="330200">
+                <a:tc>
+                  <a:txBody>
+                    <a:bodyPr wrap="none" lIns="27432" rIns="27432" tIns="27432" bIns="27432"/>
+                    <a:lstStyle/>
+                    <a:p>
+                      <a:pPr algn="r"/>
+                      <a:r>
+                        <a:rPr sz="1600" b="1">
+                          <a:latin typeface="Cambria"/>
+                        </a:rPr>
+                        <a:t>values x</a:t>
+                      </a:r>
+                    </a:p>
+                  </a:txBody>
+                  <a:tcPr/>
+                </a:tc>
+                <a:tc>
+                  <a:txBody>
+                    <a:bodyPr wrap="none" lIns="27432" rIns="27432" tIns="27432" bIns="27432"/>
+                    <a:lstStyle/>
+                    <a:p>
+                      <a:pPr algn="ctr"/>
+                      <a:r>
+                        <a:rPr sz="1600" b="0">
+                          <a:latin typeface="Cambria"/>
+                        </a:rPr>
+                        <a:t>1</a:t>
+                      </a:r>
+                    </a:p>
+                  </a:txBody>
+                  <a:tcPr/>
+                </a:tc>
+                <a:tc>
+                  <a:txBody>
+                    <a:bodyPr wrap="none" lIns="27432" rIns="27432" tIns="27432" bIns="27432"/>
+                    <a:lstStyle/>
+                    <a:p>
+                      <a:pPr algn="ctr"/>
+                      <a:r>
+                        <a:rPr sz="1600" b="0">
+                          <a:latin typeface="Cambria"/>
+                        </a:rPr>
+                        <a:t>2</a:t>
+                      </a:r>
+                    </a:p>
+                  </a:txBody>
+                  <a:tcPr/>
+                </a:tc>
+                <a:tc>
+                  <a:txBody>
+                    <a:bodyPr wrap="none" lIns="27432" rIns="27432" tIns="27432" bIns="27432"/>
+                    <a:lstStyle/>
+                    <a:p>
+                      <a:pPr algn="ctr"/>
+                      <a:r>
+                        <a:rPr sz="1600" b="0">
+                          <a:latin typeface="Cambria"/>
+                        </a:rPr>
+                        <a:t>3</a:t>
+                      </a:r>
+                    </a:p>
+                  </a:txBody>
+                  <a:tcPr/>
+                </a:tc>
+                <a:tc>
+                  <a:txBody>
+                    <a:bodyPr wrap="none" lIns="27432" rIns="27432" tIns="27432" bIns="27432"/>
+                    <a:lstStyle/>
+                    <a:p>
+                      <a:pPr algn="ctr"/>
+                      <a:r>
+                        <a:rPr sz="1600" b="0">
+                          <a:latin typeface="Cambria"/>
+                        </a:rPr>
+                        <a:t>4</a:t>
+                      </a:r>
+                    </a:p>
+                  </a:txBody>
+                  <a:tcPr/>
+                </a:tc>
+                <a:tc>
+                  <a:txBody>
+                    <a:bodyPr wrap="none" lIns="27432" rIns="27432" tIns="27432" bIns="27432"/>
+                    <a:lstStyle/>
+                    <a:p>
+                      <a:pPr algn="ctr"/>
+                      <a:r>
+                        <a:rPr sz="1600" b="0">
+                          <a:latin typeface="Cambria"/>
+                        </a:rPr>
+                        <a:t>5</a:t>
+                      </a:r>
+                    </a:p>
+                  </a:txBody>
+                  <a:tcPr/>
+                </a:tc>
+              </a:tr>
+              <a:tr h="330200">
+                <a:tc>
+                  <a:txBody>
+                    <a:bodyPr wrap="none" lIns="27432" rIns="27432" tIns="27432" bIns="27432"/>
+                    <a:lstStyle/>
+                    <a:p>
+                      <a:pPr algn="r"/>
+                      <a:r>
+                        <a:rPr sz="1600" b="1">
+                          <a:latin typeface="Cambria"/>
+                        </a:rPr>
+                        <a:t>pmf p(x)</a:t>
+                      </a:r>
+                    </a:p>
+                  </a:txBody>
+                  <a:tcPr/>
+                </a:tc>
+                <a:tc>
+                  <a:txBody>
+                    <a:bodyPr wrap="none" lIns="27432" rIns="27432" tIns="27432" bIns="27432"/>
+                    <a:lstStyle/>
+                    <a:p>
+                      <a:pPr algn="ctr"/>
+                      <a:r>
+                        <a:rPr sz="1600" b="0">
+                          <a:latin typeface="Cambria"/>
+                        </a:rPr>
+                        <a:t>1/10</a:t>
+                      </a:r>
+                    </a:p>
+                  </a:txBody>
+                  <a:tcPr/>
+                </a:tc>
+                <a:tc>
+                  <a:txBody>
+                    <a:bodyPr wrap="none" lIns="27432" rIns="27432" tIns="27432" bIns="27432"/>
+                    <a:lstStyle/>
+                    <a:p>
+                      <a:pPr algn="ctr"/>
+                      <a:r>
+                        <a:rPr sz="1600" b="0">
+                          <a:latin typeface="Cambria"/>
+                        </a:rPr>
+                        <a:t>2/10</a:t>
+                      </a:r>
+                    </a:p>
+                  </a:txBody>
+                  <a:tcPr/>
+                </a:tc>
+                <a:tc>
+                  <a:txBody>
+                    <a:bodyPr wrap="none" lIns="27432" rIns="27432" tIns="27432" bIns="27432"/>
+                    <a:lstStyle/>
+                    <a:p>
+                      <a:pPr algn="ctr"/>
+                      <a:r>
+                        <a:rPr sz="1600" b="0">
+                          <a:latin typeface="Cambria"/>
+                        </a:rPr>
+                        <a:t>4/10</a:t>
+                      </a:r>
+                    </a:p>
+                  </a:txBody>
+                  <a:tcPr/>
+                </a:tc>
+                <a:tc>
+                  <a:txBody>
+                    <a:bodyPr wrap="none" lIns="27432" rIns="27432" tIns="27432" bIns="27432"/>
+                    <a:lstStyle/>
+                    <a:p>
+                      <a:pPr algn="ctr"/>
+                      <a:r>
+                        <a:rPr sz="1600" b="0">
+                          <a:latin typeface="Cambria"/>
+                        </a:rPr>
+                        <a:t>2/10</a:t>
+                      </a:r>
+                    </a:p>
+                  </a:txBody>
+                  <a:tcPr/>
+                </a:tc>
+                <a:tc>
+                  <a:txBody>
+                    <a:bodyPr wrap="none" lIns="27432" rIns="27432" tIns="27432" bIns="27432"/>
+                    <a:lstStyle/>
+                    <a:p>
+                      <a:pPr algn="ctr"/>
+                      <a:r>
+                        <a:rPr sz="1600" b="0">
+                          <a:latin typeface="Cambria"/>
+                        </a:rPr>
+                        <a:t>1/10</a:t>
+                      </a:r>
+                    </a:p>
+                  </a:txBody>
+                  <a:tcPr/>
+                </a:tc>
+              </a:tr>
+            </a:tbl>
+          </a:graphicData>
+        </a:graphic>
+      </p:graphicFrame>
     </p:spTree>
     <p:extLst>
       <p:ext uri="{BB962C8B-B14F-4D97-AF65-F5344CB8AC3E}">
@@ -43777,35 +44057,582 @@
           <a:chExt cx="0" cy="0"/>
         </a:xfrm>
       </p:grpSpPr>
-      <p:pic>
-        <p:nvPicPr>
-          <p:cNvPr id="2" name="Picture 1" descr="Worked solution: mean mu = 3; a row for (X - mu)^2 is added (4,1,0,1,4); variance E[(X-mu)^2] = 1.2 and standard deviation = square root of 1.2." title="Worked solution: mean mu = 3; a row for (X - mu)^2 is added (4,1,0,1,4); varianc"/>
-          <p:cNvPicPr>
-            <a:picLocks noChangeAspect="1"/>
-          </p:cNvPicPr>
+      <p:sp>
+        <p:nvSpPr>
+          <p:cNvPr id="2" name="TextBox 1"/>
+          <p:cNvSpPr txBox="1"/>
           <p:nvPr/>
-        </p:nvPicPr>
-        <p:blipFill rotWithShape="1">
-          <a:blip r:embed="rId2">
-            <a:extLst>
-              <a:ext uri="{28A0092B-C50C-407E-A947-70E740481C1C}">
-                <a14:useLocalDpi xmlns:a14="http://schemas.microsoft.com/office/drawing/2010/main" val="0"/>
-              </a:ext>
-            </a:extLst>
-          </a:blip>
-          <a:srcRect b="9073"/>
-          <a:stretch/>
-        </p:blipFill>
+        </p:nvSpPr>
         <p:spPr>
           <a:xfrm>
-            <a:off x="1399591" y="0"/>
-            <a:ext cx="9927772" cy="6764093"/>
+            <a:off x="1564182" y="164592"/>
+            <a:ext cx="9598588" cy="500634"/>
           </a:xfrm>
           <a:prstGeom prst="rect">
             <a:avLst/>
           </a:prstGeom>
+          <a:noFill/>
         </p:spPr>
-      </p:pic>
+        <p:txBody>
+          <a:bodyPr wrap="square" anchor="t" lIns="0" rIns="0" tIns="0" bIns="0">
+            <a:spAutoFit/>
+          </a:bodyPr>
+          <a:lstStyle/>
+          <a:p>
+            <a:r>
+              <a:rPr sz="2600" b="0">
+                <a:solidFill>
+                  <a:srgbClr val="3333CC"/>
+                </a:solidFill>
+                <a:latin typeface="Calibri"/>
+              </a:rPr>
+              <a:t>Computation from tables</a:t>
+            </a:r>
+          </a:p>
+        </p:txBody>
+      </p:sp>
+      <p:sp>
+        <p:nvSpPr>
+          <p:cNvPr id="3" name="TextBox 2"/>
+          <p:cNvSpPr txBox="1"/>
+          <p:nvPr/>
+        </p:nvSpPr>
+        <p:spPr>
+          <a:xfrm>
+            <a:off x="1564182" y="884682"/>
+            <a:ext cx="9598588" cy="346329"/>
+          </a:xfrm>
+          <a:prstGeom prst="rect">
+            <a:avLst/>
+          </a:prstGeom>
+          <a:noFill/>
+        </p:spPr>
+        <p:txBody>
+          <a:bodyPr wrap="square" anchor="t" lIns="0" rIns="0" tIns="0" bIns="0">
+            <a:spAutoFit/>
+          </a:bodyPr>
+          <a:lstStyle/>
+          <a:p>
+            <a:r>
+              <a:rPr sz="1700" b="0">
+                <a:latin typeface="Calibri"/>
+              </a:rPr>
+              <a:t>From the table we compute the mean:</a:t>
+            </a:r>
+          </a:p>
+        </p:txBody>
+      </p:sp>
+      <p:sp>
+        <p:nvSpPr>
+          <p:cNvPr id="4" name="TextBox 3"/>
+          <p:cNvSpPr txBox="1"/>
+          <p:nvPr/>
+        </p:nvSpPr>
+        <p:spPr>
+          <a:xfrm>
+            <a:off x="1564182" y="1322451"/>
+            <a:ext cx="9598588" cy="346329"/>
+          </a:xfrm>
+          <a:prstGeom prst="rect">
+            <a:avLst/>
+          </a:prstGeom>
+          <a:noFill/>
+        </p:spPr>
+        <p:txBody>
+          <a:bodyPr wrap="square" anchor="t" lIns="0" rIns="0" tIns="0" bIns="0">
+            <a:spAutoFit/>
+          </a:bodyPr>
+          <a:lstStyle/>
+          <a:p>
+            <a:pPr algn="ctr"/>
+            <a:r>
+              <a:rPr sz="1700" b="0">
+                <a:latin typeface="Cambria"/>
+              </a:rPr>
+              <a:t>μ = 1/10 + 4/10 + 12/10 + 8/10 + 5/10 = 3.</a:t>
+            </a:r>
+          </a:p>
+        </p:txBody>
+      </p:sp>
+      <p:sp>
+        <p:nvSpPr>
+          <p:cNvPr id="5" name="TextBox 4"/>
+          <p:cNvSpPr txBox="1"/>
+          <p:nvPr/>
+        </p:nvSpPr>
+        <p:spPr>
+          <a:xfrm>
+            <a:off x="1564182" y="1851660"/>
+            <a:ext cx="9598588" cy="346329"/>
+          </a:xfrm>
+          <a:prstGeom prst="rect">
+            <a:avLst/>
+          </a:prstGeom>
+          <a:noFill/>
+        </p:spPr>
+        <p:txBody>
+          <a:bodyPr wrap="square" anchor="t" lIns="0" rIns="0" tIns="0" bIns="0">
+            <a:spAutoFit/>
+          </a:bodyPr>
+          <a:lstStyle/>
+          <a:p>
+            <a:r>
+              <a:rPr sz="1700" b="0">
+                <a:latin typeface="Calibri"/>
+              </a:rPr>
+              <a:t>Then we add a line to the table for (X − μ)</a:t>
+            </a:r>
+            <a:r>
+              <a:rPr sz="1700" b="0" baseline="30000">
+                <a:latin typeface="Calibri"/>
+              </a:rPr>
+              <a:t>2</a:t>
+            </a:r>
+            <a:r>
+              <a:rPr sz="1700" b="0">
+                <a:latin typeface="Calibri"/>
+              </a:rPr>
+              <a:t>.</a:t>
+            </a:r>
+          </a:p>
+        </p:txBody>
+      </p:sp>
+      <p:graphicFrame>
+        <p:nvGraphicFramePr>
+          <p:cNvPr id="6" name="Table 5"/>
+          <p:cNvGraphicFramePr>
+            <a:graphicFrameLocks noGrp="1"/>
+          </p:cNvGraphicFramePr>
+          <p:nvPr/>
+        </p:nvGraphicFramePr>
+        <p:xfrm>
+          <a:off x="1564182" y="2307717"/>
+          <a:ext cx="5394960" cy="914400"/>
+        </p:xfrm>
+        <a:graphic>
+          <a:graphicData uri="http://schemas.openxmlformats.org/drawingml/2006/table">
+            <a:tbl>
+              <a:tblPr firstCol="1">
+                <a:tableStyleId>{5C22544A-7EE6-4342-B048-85BDC9FD1C3A}</a:tableStyleId>
+              </a:tblPr>
+              <a:tblGrid>
+                <a:gridCol w="899160"/>
+                <a:gridCol w="899160"/>
+                <a:gridCol w="899160"/>
+                <a:gridCol w="899160"/>
+                <a:gridCol w="899160"/>
+                <a:gridCol w="899160"/>
+              </a:tblGrid>
+              <a:tr h="304800">
+                <a:tc>
+                  <a:txBody>
+                    <a:bodyPr wrap="none" lIns="27432" rIns="27432" tIns="27432" bIns="27432"/>
+                    <a:lstStyle/>
+                    <a:p>
+                      <a:pPr algn="r"/>
+                      <a:r>
+                        <a:rPr sz="1400" b="1">
+                          <a:latin typeface="Cambria"/>
+                        </a:rPr>
+                        <a:t>values X</a:t>
+                      </a:r>
+                    </a:p>
+                  </a:txBody>
+                  <a:tcPr/>
+                </a:tc>
+                <a:tc>
+                  <a:txBody>
+                    <a:bodyPr wrap="none" lIns="27432" rIns="27432" tIns="27432" bIns="27432"/>
+                    <a:lstStyle/>
+                    <a:p>
+                      <a:pPr algn="ctr"/>
+                      <a:r>
+                        <a:rPr sz="1400" b="0">
+                          <a:latin typeface="Cambria"/>
+                        </a:rPr>
+                        <a:t>1</a:t>
+                      </a:r>
+                    </a:p>
+                  </a:txBody>
+                  <a:tcPr/>
+                </a:tc>
+                <a:tc>
+                  <a:txBody>
+                    <a:bodyPr wrap="none" lIns="27432" rIns="27432" tIns="27432" bIns="27432"/>
+                    <a:lstStyle/>
+                    <a:p>
+                      <a:pPr algn="ctr"/>
+                      <a:r>
+                        <a:rPr sz="1400" b="0">
+                          <a:latin typeface="Cambria"/>
+                        </a:rPr>
+                        <a:t>2</a:t>
+                      </a:r>
+                    </a:p>
+                  </a:txBody>
+                  <a:tcPr/>
+                </a:tc>
+                <a:tc>
+                  <a:txBody>
+                    <a:bodyPr wrap="none" lIns="27432" rIns="27432" tIns="27432" bIns="27432"/>
+                    <a:lstStyle/>
+                    <a:p>
+                      <a:pPr algn="ctr"/>
+                      <a:r>
+                        <a:rPr sz="1400" b="0">
+                          <a:latin typeface="Cambria"/>
+                        </a:rPr>
+                        <a:t>3</a:t>
+                      </a:r>
+                    </a:p>
+                  </a:txBody>
+                  <a:tcPr/>
+                </a:tc>
+                <a:tc>
+                  <a:txBody>
+                    <a:bodyPr wrap="none" lIns="27432" rIns="27432" tIns="27432" bIns="27432"/>
+                    <a:lstStyle/>
+                    <a:p>
+                      <a:pPr algn="ctr"/>
+                      <a:r>
+                        <a:rPr sz="1400" b="0">
+                          <a:latin typeface="Cambria"/>
+                        </a:rPr>
+                        <a:t>4</a:t>
+                      </a:r>
+                    </a:p>
+                  </a:txBody>
+                  <a:tcPr/>
+                </a:tc>
+                <a:tc>
+                  <a:txBody>
+                    <a:bodyPr wrap="none" lIns="27432" rIns="27432" tIns="27432" bIns="27432"/>
+                    <a:lstStyle/>
+                    <a:p>
+                      <a:pPr algn="ctr"/>
+                      <a:r>
+                        <a:rPr sz="1400" b="0">
+                          <a:latin typeface="Cambria"/>
+                        </a:rPr>
+                        <a:t>5</a:t>
+                      </a:r>
+                    </a:p>
+                  </a:txBody>
+                  <a:tcPr/>
+                </a:tc>
+              </a:tr>
+              <a:tr h="304800">
+                <a:tc>
+                  <a:txBody>
+                    <a:bodyPr wrap="none" lIns="27432" rIns="27432" tIns="27432" bIns="27432"/>
+                    <a:lstStyle/>
+                    <a:p>
+                      <a:pPr algn="r"/>
+                      <a:r>
+                        <a:rPr sz="1400" b="1">
+                          <a:latin typeface="Cambria"/>
+                        </a:rPr>
+                        <a:t>pmf p(x)</a:t>
+                      </a:r>
+                    </a:p>
+                  </a:txBody>
+                  <a:tcPr/>
+                </a:tc>
+                <a:tc>
+                  <a:txBody>
+                    <a:bodyPr wrap="none" lIns="27432" rIns="27432" tIns="27432" bIns="27432"/>
+                    <a:lstStyle/>
+                    <a:p>
+                      <a:pPr algn="ctr"/>
+                      <a:r>
+                        <a:rPr sz="1400" b="0">
+                          <a:latin typeface="Cambria"/>
+                        </a:rPr>
+                        <a:t>1/10</a:t>
+                      </a:r>
+                    </a:p>
+                  </a:txBody>
+                  <a:tcPr/>
+                </a:tc>
+                <a:tc>
+                  <a:txBody>
+                    <a:bodyPr wrap="none" lIns="27432" rIns="27432" tIns="27432" bIns="27432"/>
+                    <a:lstStyle/>
+                    <a:p>
+                      <a:pPr algn="ctr"/>
+                      <a:r>
+                        <a:rPr sz="1400" b="0">
+                          <a:latin typeface="Cambria"/>
+                        </a:rPr>
+                        <a:t>2/10</a:t>
+                      </a:r>
+                    </a:p>
+                  </a:txBody>
+                  <a:tcPr/>
+                </a:tc>
+                <a:tc>
+                  <a:txBody>
+                    <a:bodyPr wrap="none" lIns="27432" rIns="27432" tIns="27432" bIns="27432"/>
+                    <a:lstStyle/>
+                    <a:p>
+                      <a:pPr algn="ctr"/>
+                      <a:r>
+                        <a:rPr sz="1400" b="0">
+                          <a:latin typeface="Cambria"/>
+                        </a:rPr>
+                        <a:t>4/10</a:t>
+                      </a:r>
+                    </a:p>
+                  </a:txBody>
+                  <a:tcPr/>
+                </a:tc>
+                <a:tc>
+                  <a:txBody>
+                    <a:bodyPr wrap="none" lIns="27432" rIns="27432" tIns="27432" bIns="27432"/>
+                    <a:lstStyle/>
+                    <a:p>
+                      <a:pPr algn="ctr"/>
+                      <a:r>
+                        <a:rPr sz="1400" b="0">
+                          <a:latin typeface="Cambria"/>
+                        </a:rPr>
+                        <a:t>2/10</a:t>
+                      </a:r>
+                    </a:p>
+                  </a:txBody>
+                  <a:tcPr/>
+                </a:tc>
+                <a:tc>
+                  <a:txBody>
+                    <a:bodyPr wrap="none" lIns="27432" rIns="27432" tIns="27432" bIns="27432"/>
+                    <a:lstStyle/>
+                    <a:p>
+                      <a:pPr algn="ctr"/>
+                      <a:r>
+                        <a:rPr sz="1400" b="0">
+                          <a:latin typeface="Cambria"/>
+                        </a:rPr>
+                        <a:t>1/10</a:t>
+                      </a:r>
+                    </a:p>
+                  </a:txBody>
+                  <a:tcPr/>
+                </a:tc>
+              </a:tr>
+              <a:tr h="304800">
+                <a:tc>
+                  <a:txBody>
+                    <a:bodyPr wrap="none" lIns="27432" rIns="27432" tIns="27432" bIns="27432"/>
+                    <a:lstStyle/>
+                    <a:p>
+                      <a:pPr algn="r"/>
+                      <a:r>
+                        <a:rPr sz="1400" b="1">
+                          <a:latin typeface="Cambria"/>
+                        </a:rPr>
+                        <a:t>(X − μ)</a:t>
+                      </a:r>
+                      <a:r>
+                        <a:rPr sz="1400" b="1" baseline="30000">
+                          <a:latin typeface="Cambria"/>
+                        </a:rPr>
+                        <a:t>2</a:t>
+                      </a:r>
+                    </a:p>
+                  </a:txBody>
+                  <a:tcPr/>
+                </a:tc>
+                <a:tc>
+                  <a:txBody>
+                    <a:bodyPr wrap="none" lIns="27432" rIns="27432" tIns="27432" bIns="27432"/>
+                    <a:lstStyle/>
+                    <a:p>
+                      <a:pPr algn="ctr"/>
+                      <a:r>
+                        <a:rPr sz="1400" b="0">
+                          <a:latin typeface="Cambria"/>
+                        </a:rPr>
+                        <a:t>4</a:t>
+                      </a:r>
+                    </a:p>
+                  </a:txBody>
+                  <a:tcPr/>
+                </a:tc>
+                <a:tc>
+                  <a:txBody>
+                    <a:bodyPr wrap="none" lIns="27432" rIns="27432" tIns="27432" bIns="27432"/>
+                    <a:lstStyle/>
+                    <a:p>
+                      <a:pPr algn="ctr"/>
+                      <a:r>
+                        <a:rPr sz="1400" b="0">
+                          <a:latin typeface="Cambria"/>
+                        </a:rPr>
+                        <a:t>1</a:t>
+                      </a:r>
+                    </a:p>
+                  </a:txBody>
+                  <a:tcPr/>
+                </a:tc>
+                <a:tc>
+                  <a:txBody>
+                    <a:bodyPr wrap="none" lIns="27432" rIns="27432" tIns="27432" bIns="27432"/>
+                    <a:lstStyle/>
+                    <a:p>
+                      <a:pPr algn="ctr"/>
+                      <a:r>
+                        <a:rPr sz="1400" b="0">
+                          <a:latin typeface="Cambria"/>
+                        </a:rPr>
+                        <a:t>0</a:t>
+                      </a:r>
+                    </a:p>
+                  </a:txBody>
+                  <a:tcPr/>
+                </a:tc>
+                <a:tc>
+                  <a:txBody>
+                    <a:bodyPr wrap="none" lIns="27432" rIns="27432" tIns="27432" bIns="27432"/>
+                    <a:lstStyle/>
+                    <a:p>
+                      <a:pPr algn="ctr"/>
+                      <a:r>
+                        <a:rPr sz="1400" b="0">
+                          <a:latin typeface="Cambria"/>
+                        </a:rPr>
+                        <a:t>1</a:t>
+                      </a:r>
+                    </a:p>
+                  </a:txBody>
+                  <a:tcPr/>
+                </a:tc>
+                <a:tc>
+                  <a:txBody>
+                    <a:bodyPr wrap="none" lIns="27432" rIns="27432" tIns="27432" bIns="27432"/>
+                    <a:lstStyle/>
+                    <a:p>
+                      <a:pPr algn="ctr"/>
+                      <a:r>
+                        <a:rPr sz="1400" b="0">
+                          <a:latin typeface="Cambria"/>
+                        </a:rPr>
+                        <a:t>4</a:t>
+                      </a:r>
+                    </a:p>
+                  </a:txBody>
+                  <a:tcPr/>
+                </a:tc>
+              </a:tr>
+            </a:tbl>
+          </a:graphicData>
+        </a:graphic>
+      </p:graphicFrame>
+      <p:sp>
+        <p:nvSpPr>
+          <p:cNvPr id="7" name="TextBox 6"/>
+          <p:cNvSpPr txBox="1"/>
+          <p:nvPr/>
+        </p:nvSpPr>
+        <p:spPr>
+          <a:xfrm>
+            <a:off x="1564182" y="3386709"/>
+            <a:ext cx="9598588" cy="346329"/>
+          </a:xfrm>
+          <a:prstGeom prst="rect">
+            <a:avLst/>
+          </a:prstGeom>
+          <a:noFill/>
+        </p:spPr>
+        <p:txBody>
+          <a:bodyPr wrap="square" anchor="t" lIns="0" rIns="0" tIns="0" bIns="0">
+            <a:spAutoFit/>
+          </a:bodyPr>
+          <a:lstStyle/>
+          <a:p>
+            <a:r>
+              <a:rPr sz="1700" b="0">
+                <a:latin typeface="Calibri"/>
+              </a:rPr>
+              <a:t>Using the table we compute variance E((X − μ)</a:t>
+            </a:r>
+            <a:r>
+              <a:rPr sz="1700" b="0" baseline="30000">
+                <a:latin typeface="Calibri"/>
+              </a:rPr>
+              <a:t>2</a:t>
+            </a:r>
+            <a:r>
+              <a:rPr sz="1700" b="0">
+                <a:latin typeface="Calibri"/>
+              </a:rPr>
+              <a:t>):</a:t>
+            </a:r>
+          </a:p>
+        </p:txBody>
+      </p:sp>
+      <p:sp>
+        <p:nvSpPr>
+          <p:cNvPr id="8" name="TextBox 7"/>
+          <p:cNvSpPr txBox="1"/>
+          <p:nvPr/>
+        </p:nvSpPr>
+        <p:spPr>
+          <a:xfrm>
+            <a:off x="1564182" y="3842766"/>
+            <a:ext cx="9598588" cy="346329"/>
+          </a:xfrm>
+          <a:prstGeom prst="rect">
+            <a:avLst/>
+          </a:prstGeom>
+          <a:noFill/>
+        </p:spPr>
+        <p:txBody>
+          <a:bodyPr wrap="square" anchor="t" lIns="0" rIns="0" tIns="0" bIns="0">
+            <a:spAutoFit/>
+          </a:bodyPr>
+          <a:lstStyle/>
+          <a:p>
+            <a:pPr algn="ctr"/>
+            <a:r>
+              <a:rPr sz="1700" b="0">
+                <a:latin typeface="Cambria"/>
+              </a:rPr>
+              <a:t>1/10 · 4 + 2/10 · 1 + 4/10 · 0 + 2/10 · 1 + 1/10 · 4 = 1.2</a:t>
+            </a:r>
+          </a:p>
+        </p:txBody>
+      </p:sp>
+      <p:sp>
+        <p:nvSpPr>
+          <p:cNvPr id="9" name="TextBox 8"/>
+          <p:cNvSpPr txBox="1"/>
+          <p:nvPr/>
+        </p:nvSpPr>
+        <p:spPr>
+          <a:xfrm>
+            <a:off x="1564182" y="4371975"/>
+            <a:ext cx="9598588" cy="346329"/>
+          </a:xfrm>
+          <a:prstGeom prst="rect">
+            <a:avLst/>
+          </a:prstGeom>
+          <a:noFill/>
+        </p:spPr>
+        <p:txBody>
+          <a:bodyPr wrap="square" anchor="t" lIns="0" rIns="0" tIns="0" bIns="0">
+            <a:spAutoFit/>
+          </a:bodyPr>
+          <a:lstStyle/>
+          <a:p>
+            <a:r>
+              <a:rPr sz="1700" b="0">
+                <a:latin typeface="Calibri"/>
+              </a:rPr>
+              <a:t>The standard deviation is then σ = √1.2.</a:t>
+            </a:r>
+          </a:p>
+        </p:txBody>
+      </p:sp>
     </p:spTree>
     <p:extLst>
       <p:ext uri="{BB962C8B-B14F-4D97-AF65-F5344CB8AC3E}">

--- a/Day1_Probability/FW536_Day1_Morning_intro to probability_accessible.pptx
+++ b/Day1_Probability/FW536_Day1_Morning_intro to probability_accessible.pptx
@@ -59,8 +59,8 @@
     <p:sldId id="329" r:id="rId50"/>
     <p:sldId id="312" r:id="rId51"/>
     <p:sldId id="330" r:id="rId52"/>
-    <p:sldId id="331" r:id="rId53"/>
-    <p:sldId id="332" r:id="rId54"/>
+    <p:sldId id="342" r:id="rId53"/>
+    <p:sldId id="331" r:id="rId54"/>
     <p:sldId id="333" r:id="rId55"/>
     <p:sldId id="334" r:id="rId56"/>
     <p:sldId id="335" r:id="rId57"/>
@@ -252,7 +252,7 @@
           <a:p>
             <a:fld id="{078FFA9F-E4FE-2949-B991-E9E1D16A3A2F}" type="datetimeFigureOut">
               <a:rPr lang="en-US" smtClean="0"/>
-              <a:t>9/19/25</a:t>
+              <a:t>7/16/26</a:t>
             </a:fld>
             <a:endParaRPr lang="en-US"/>
           </a:p>
@@ -574,7 +574,7 @@
               </a14:hiddenEffects>
             </a:ext>
             <a:ext uri="{FAA26D3D-D897-4be2-8F04-BA451C77F1D7}">
-              <ma14:placeholderFlag xmlns="" xmlns:ma14="http://schemas.microsoft.com/office/mac/drawingml/2011/main" val="1"/>
+              <ma14:placeholderFlag xmlns:ma14="http://schemas.microsoft.com/office/mac/drawingml/2011/main" xmlns="" val="1"/>
             </a:ext>
           </a:extLst>
         </p:spPr>
@@ -659,7 +659,7 @@
               </a14:hiddenEffects>
             </a:ext>
             <a:ext uri="{FAA26D3D-D897-4be2-8F04-BA451C77F1D7}">
-              <ma14:placeholderFlag xmlns="" xmlns:ma14="http://schemas.microsoft.com/office/mac/drawingml/2011/main" val="1"/>
+              <ma14:placeholderFlag xmlns:ma14="http://schemas.microsoft.com/office/mac/drawingml/2011/main" xmlns="" val="1"/>
             </a:ext>
           </a:extLst>
         </p:spPr>
@@ -744,7 +744,7 @@
               </a14:hiddenEffects>
             </a:ext>
             <a:ext uri="{FAA26D3D-D897-4be2-8F04-BA451C77F1D7}">
-              <ma14:placeholderFlag xmlns="" xmlns:ma14="http://schemas.microsoft.com/office/mac/drawingml/2011/main" val="1"/>
+              <ma14:placeholderFlag xmlns:ma14="http://schemas.microsoft.com/office/mac/drawingml/2011/main" xmlns="" val="1"/>
             </a:ext>
           </a:extLst>
         </p:spPr>
@@ -829,7 +829,7 @@
               </a14:hiddenEffects>
             </a:ext>
             <a:ext uri="{FAA26D3D-D897-4be2-8F04-BA451C77F1D7}">
-              <ma14:placeholderFlag xmlns="" xmlns:ma14="http://schemas.microsoft.com/office/mac/drawingml/2011/main" val="1"/>
+              <ma14:placeholderFlag xmlns:ma14="http://schemas.microsoft.com/office/mac/drawingml/2011/main" xmlns="" val="1"/>
             </a:ext>
           </a:extLst>
         </p:spPr>
@@ -914,7 +914,7 @@
               </a14:hiddenEffects>
             </a:ext>
             <a:ext uri="{FAA26D3D-D897-4be2-8F04-BA451C77F1D7}">
-              <ma14:placeholderFlag xmlns="" xmlns:ma14="http://schemas.microsoft.com/office/mac/drawingml/2011/main" val="1"/>
+              <ma14:placeholderFlag xmlns:ma14="http://schemas.microsoft.com/office/mac/drawingml/2011/main" xmlns="" val="1"/>
             </a:ext>
           </a:extLst>
         </p:spPr>
@@ -999,7 +999,7 @@
               </a14:hiddenEffects>
             </a:ext>
             <a:ext uri="{FAA26D3D-D897-4be2-8F04-BA451C77F1D7}">
-              <ma14:placeholderFlag xmlns="" xmlns:ma14="http://schemas.microsoft.com/office/mac/drawingml/2011/main" val="1"/>
+              <ma14:placeholderFlag xmlns:ma14="http://schemas.microsoft.com/office/mac/drawingml/2011/main" xmlns="" val="1"/>
             </a:ext>
           </a:extLst>
         </p:spPr>
@@ -1084,7 +1084,7 @@
               </a14:hiddenEffects>
             </a:ext>
             <a:ext uri="{FAA26D3D-D897-4be2-8F04-BA451C77F1D7}">
-              <ma14:placeholderFlag xmlns="" xmlns:ma14="http://schemas.microsoft.com/office/mac/drawingml/2011/main" val="1"/>
+              <ma14:placeholderFlag xmlns:ma14="http://schemas.microsoft.com/office/mac/drawingml/2011/main" xmlns="" val="1"/>
             </a:ext>
           </a:extLst>
         </p:spPr>
@@ -1169,7 +1169,7 @@
               </a14:hiddenEffects>
             </a:ext>
             <a:ext uri="{FAA26D3D-D897-4be2-8F04-BA451C77F1D7}">
-              <ma14:placeholderFlag xmlns="" xmlns:ma14="http://schemas.microsoft.com/office/mac/drawingml/2011/main" val="1"/>
+              <ma14:placeholderFlag xmlns:ma14="http://schemas.microsoft.com/office/mac/drawingml/2011/main" xmlns="" val="1"/>
             </a:ext>
           </a:extLst>
         </p:spPr>
@@ -1254,7 +1254,7 @@
               </a14:hiddenEffects>
             </a:ext>
             <a:ext uri="{FAA26D3D-D897-4be2-8F04-BA451C77F1D7}">
-              <ma14:placeholderFlag xmlns="" xmlns:ma14="http://schemas.microsoft.com/office/mac/drawingml/2011/main" val="1"/>
+              <ma14:placeholderFlag xmlns:ma14="http://schemas.microsoft.com/office/mac/drawingml/2011/main" xmlns="" val="1"/>
             </a:ext>
           </a:extLst>
         </p:spPr>
@@ -1339,7 +1339,7 @@
               </a14:hiddenEffects>
             </a:ext>
             <a:ext uri="{FAA26D3D-D897-4be2-8F04-BA451C77F1D7}">
-              <ma14:placeholderFlag xmlns="" xmlns:ma14="http://schemas.microsoft.com/office/mac/drawingml/2011/main" val="1"/>
+              <ma14:placeholderFlag xmlns:ma14="http://schemas.microsoft.com/office/mac/drawingml/2011/main" xmlns="" val="1"/>
             </a:ext>
           </a:extLst>
         </p:spPr>
@@ -1424,7 +1424,7 @@
               </a14:hiddenEffects>
             </a:ext>
             <a:ext uri="{FAA26D3D-D897-4be2-8F04-BA451C77F1D7}">
-              <ma14:placeholderFlag xmlns="" xmlns:ma14="http://schemas.microsoft.com/office/mac/drawingml/2011/main" val="1"/>
+              <ma14:placeholderFlag xmlns:ma14="http://schemas.microsoft.com/office/mac/drawingml/2011/main" xmlns="" val="1"/>
             </a:ext>
           </a:extLst>
         </p:spPr>
@@ -1509,7 +1509,7 @@
               </a14:hiddenEffects>
             </a:ext>
             <a:ext uri="{FAA26D3D-D897-4be2-8F04-BA451C77F1D7}">
-              <ma14:placeholderFlag xmlns="" xmlns:ma14="http://schemas.microsoft.com/office/mac/drawingml/2011/main" val="1"/>
+              <ma14:placeholderFlag xmlns:ma14="http://schemas.microsoft.com/office/mac/drawingml/2011/main" xmlns="" val="1"/>
             </a:ext>
           </a:extLst>
         </p:spPr>
@@ -1594,7 +1594,7 @@
               </a14:hiddenEffects>
             </a:ext>
             <a:ext uri="{FAA26D3D-D897-4be2-8F04-BA451C77F1D7}">
-              <ma14:placeholderFlag xmlns="" xmlns:ma14="http://schemas.microsoft.com/office/mac/drawingml/2011/main" val="1"/>
+              <ma14:placeholderFlag xmlns:ma14="http://schemas.microsoft.com/office/mac/drawingml/2011/main" xmlns="" val="1"/>
             </a:ext>
           </a:extLst>
         </p:spPr>
@@ -1679,7 +1679,7 @@
               </a14:hiddenEffects>
             </a:ext>
             <a:ext uri="{FAA26D3D-D897-4be2-8F04-BA451C77F1D7}">
-              <ma14:placeholderFlag xmlns="" xmlns:ma14="http://schemas.microsoft.com/office/mac/drawingml/2011/main" val="1"/>
+              <ma14:placeholderFlag xmlns:ma14="http://schemas.microsoft.com/office/mac/drawingml/2011/main" xmlns="" val="1"/>
             </a:ext>
           </a:extLst>
         </p:spPr>
@@ -1764,7 +1764,7 @@
               </a14:hiddenEffects>
             </a:ext>
             <a:ext uri="{FAA26D3D-D897-4be2-8F04-BA451C77F1D7}">
-              <ma14:placeholderFlag xmlns="" xmlns:ma14="http://schemas.microsoft.com/office/mac/drawingml/2011/main" val="1"/>
+              <ma14:placeholderFlag xmlns:ma14="http://schemas.microsoft.com/office/mac/drawingml/2011/main" xmlns="" val="1"/>
             </a:ext>
           </a:extLst>
         </p:spPr>
@@ -1849,7 +1849,7 @@
               </a14:hiddenEffects>
             </a:ext>
             <a:ext uri="{FAA26D3D-D897-4be2-8F04-BA451C77F1D7}">
-              <ma14:placeholderFlag xmlns="" xmlns:ma14="http://schemas.microsoft.com/office/mac/drawingml/2011/main" val="1"/>
+              <ma14:placeholderFlag xmlns:ma14="http://schemas.microsoft.com/office/mac/drawingml/2011/main" xmlns="" val="1"/>
             </a:ext>
           </a:extLst>
         </p:spPr>
@@ -1934,7 +1934,7 @@
               </a14:hiddenEffects>
             </a:ext>
             <a:ext uri="{FAA26D3D-D897-4be2-8F04-BA451C77F1D7}">
-              <ma14:placeholderFlag xmlns="" xmlns:ma14="http://schemas.microsoft.com/office/mac/drawingml/2011/main" val="1"/>
+              <ma14:placeholderFlag xmlns:ma14="http://schemas.microsoft.com/office/mac/drawingml/2011/main" xmlns="" val="1"/>
             </a:ext>
           </a:extLst>
         </p:spPr>
@@ -2019,7 +2019,7 @@
               </a14:hiddenEffects>
             </a:ext>
             <a:ext uri="{FAA26D3D-D897-4be2-8F04-BA451C77F1D7}">
-              <ma14:placeholderFlag xmlns="" xmlns:ma14="http://schemas.microsoft.com/office/mac/drawingml/2011/main" val="1"/>
+              <ma14:placeholderFlag xmlns:ma14="http://schemas.microsoft.com/office/mac/drawingml/2011/main" xmlns="" val="1"/>
             </a:ext>
           </a:extLst>
         </p:spPr>
@@ -2104,7 +2104,7 @@
               </a14:hiddenEffects>
             </a:ext>
             <a:ext uri="{FAA26D3D-D897-4be2-8F04-BA451C77F1D7}">
-              <ma14:placeholderFlag xmlns="" xmlns:ma14="http://schemas.microsoft.com/office/mac/drawingml/2011/main" val="1"/>
+              <ma14:placeholderFlag xmlns:ma14="http://schemas.microsoft.com/office/mac/drawingml/2011/main" xmlns="" val="1"/>
             </a:ext>
           </a:extLst>
         </p:spPr>
@@ -2390,7 +2390,7 @@
               </a14:hiddenEffects>
             </a:ext>
             <a:ext uri="{FAA26D3D-D897-4be2-8F04-BA451C77F1D7}">
-              <ma14:placeholderFlag xmlns="" xmlns:ma14="http://schemas.microsoft.com/office/mac/drawingml/2011/main" val="1"/>
+              <ma14:placeholderFlag xmlns:ma14="http://schemas.microsoft.com/office/mac/drawingml/2011/main" xmlns="" val="1"/>
             </a:ext>
           </a:extLst>
         </p:spPr>
@@ -3078,7 +3078,7 @@
               </a14:hiddenEffects>
             </a:ext>
             <a:ext uri="{FAA26D3D-D897-4be2-8F04-BA451C77F1D7}">
-              <ma14:placeholderFlag xmlns:ma14="http://schemas.microsoft.com/office/mac/drawingml/2011/main" xmlns="" val="1"/>
+              <ma14:placeholderFlag xmlns="" xmlns:ma14="http://schemas.microsoft.com/office/mac/drawingml/2011/main" val="1"/>
             </a:ext>
           </a:extLst>
         </p:spPr>
@@ -3354,7 +3354,7 @@
               </a14:hiddenEffects>
             </a:ext>
             <a:ext uri="{FAA26D3D-D897-4be2-8F04-BA451C77F1D7}">
-              <ma14:placeholderFlag xmlns:ma14="http://schemas.microsoft.com/office/mac/drawingml/2011/main" xmlns="" val="1"/>
+              <ma14:placeholderFlag xmlns="" xmlns:ma14="http://schemas.microsoft.com/office/mac/drawingml/2011/main" val="1"/>
             </a:ext>
           </a:extLst>
         </p:spPr>
@@ -3439,7 +3439,7 @@
               </a14:hiddenEffects>
             </a:ext>
             <a:ext uri="{FAA26D3D-D897-4be2-8F04-BA451C77F1D7}">
-              <ma14:placeholderFlag xmlns="" xmlns:ma14="http://schemas.microsoft.com/office/mac/drawingml/2011/main" val="1"/>
+              <ma14:placeholderFlag xmlns:ma14="http://schemas.microsoft.com/office/mac/drawingml/2011/main" xmlns="" val="1"/>
             </a:ext>
           </a:extLst>
         </p:spPr>
@@ -3524,7 +3524,7 @@
               </a14:hiddenEffects>
             </a:ext>
             <a:ext uri="{FAA26D3D-D897-4be2-8F04-BA451C77F1D7}">
-              <ma14:placeholderFlag xmlns="" xmlns:ma14="http://schemas.microsoft.com/office/mac/drawingml/2011/main" val="1"/>
+              <ma14:placeholderFlag xmlns:ma14="http://schemas.microsoft.com/office/mac/drawingml/2011/main" xmlns="" val="1"/>
             </a:ext>
           </a:extLst>
         </p:spPr>
@@ -3683,7 +3683,7 @@
           <a:p>
             <a:fld id="{FC959C97-01B5-694B-9820-37B576367CF4}" type="datetimeFigureOut">
               <a:rPr lang="en-US" smtClean="0"/>
-              <a:t>9/19/25</a:t>
+              <a:t>7/16/26</a:t>
             </a:fld>
             <a:endParaRPr lang="en-US"/>
           </a:p>
@@ -3851,7 +3851,7 @@
           <a:p>
             <a:fld id="{FC959C97-01B5-694B-9820-37B576367CF4}" type="datetimeFigureOut">
               <a:rPr lang="en-US" smtClean="0"/>
-              <a:t>9/19/25</a:t>
+              <a:t>7/16/26</a:t>
             </a:fld>
             <a:endParaRPr lang="en-US"/>
           </a:p>
@@ -4029,7 +4029,7 @@
           <a:p>
             <a:fld id="{FC959C97-01B5-694B-9820-37B576367CF4}" type="datetimeFigureOut">
               <a:rPr lang="en-US" smtClean="0"/>
-              <a:t>9/19/25</a:t>
+              <a:t>7/16/26</a:t>
             </a:fld>
             <a:endParaRPr lang="en-US"/>
           </a:p>
@@ -4954,7 +4954,7 @@
           <a:p>
             <a:fld id="{FC959C97-01B5-694B-9820-37B576367CF4}" type="datetimeFigureOut">
               <a:rPr lang="en-US" smtClean="0"/>
-              <a:t>9/19/25</a:t>
+              <a:t>7/16/26</a:t>
             </a:fld>
             <a:endParaRPr lang="en-US"/>
           </a:p>
@@ -5199,7 +5199,7 @@
           <a:p>
             <a:fld id="{FC959C97-01B5-694B-9820-37B576367CF4}" type="datetimeFigureOut">
               <a:rPr lang="en-US" smtClean="0"/>
-              <a:t>9/19/25</a:t>
+              <a:t>7/16/26</a:t>
             </a:fld>
             <a:endParaRPr lang="en-US"/>
           </a:p>
@@ -5428,7 +5428,7 @@
           <a:p>
             <a:fld id="{FC959C97-01B5-694B-9820-37B576367CF4}" type="datetimeFigureOut">
               <a:rPr lang="en-US" smtClean="0"/>
-              <a:t>9/19/25</a:t>
+              <a:t>7/16/26</a:t>
             </a:fld>
             <a:endParaRPr lang="en-US"/>
           </a:p>
@@ -5792,7 +5792,7 @@
           <a:p>
             <a:fld id="{FC959C97-01B5-694B-9820-37B576367CF4}" type="datetimeFigureOut">
               <a:rPr lang="en-US" smtClean="0"/>
-              <a:t>9/19/25</a:t>
+              <a:t>7/16/26</a:t>
             </a:fld>
             <a:endParaRPr lang="en-US"/>
           </a:p>
@@ -5909,7 +5909,7 @@
           <a:p>
             <a:fld id="{FC959C97-01B5-694B-9820-37B576367CF4}" type="datetimeFigureOut">
               <a:rPr lang="en-US" smtClean="0"/>
-              <a:t>9/19/25</a:t>
+              <a:t>7/16/26</a:t>
             </a:fld>
             <a:endParaRPr lang="en-US"/>
           </a:p>
@@ -6004,7 +6004,7 @@
           <a:p>
             <a:fld id="{FC959C97-01B5-694B-9820-37B576367CF4}" type="datetimeFigureOut">
               <a:rPr lang="en-US" smtClean="0"/>
-              <a:t>9/19/25</a:t>
+              <a:t>7/16/26</a:t>
             </a:fld>
             <a:endParaRPr lang="en-US"/>
           </a:p>
@@ -6279,7 +6279,7 @@
           <a:p>
             <a:fld id="{FC959C97-01B5-694B-9820-37B576367CF4}" type="datetimeFigureOut">
               <a:rPr lang="en-US" smtClean="0"/>
-              <a:t>9/19/25</a:t>
+              <a:t>7/16/26</a:t>
             </a:fld>
             <a:endParaRPr lang="en-US"/>
           </a:p>
@@ -6531,7 +6531,7 @@
           <a:p>
             <a:fld id="{FC959C97-01B5-694B-9820-37B576367CF4}" type="datetimeFigureOut">
               <a:rPr lang="en-US" smtClean="0"/>
-              <a:t>9/19/25</a:t>
+              <a:t>7/16/26</a:t>
             </a:fld>
             <a:endParaRPr lang="en-US"/>
           </a:p>
@@ -6742,7 +6742,7 @@
           <a:p>
             <a:fld id="{FC959C97-01B5-694B-9820-37B576367CF4}" type="datetimeFigureOut">
               <a:rPr lang="en-US" smtClean="0"/>
-              <a:t>9/19/25</a:t>
+              <a:t>7/16/26</a:t>
             </a:fld>
             <a:endParaRPr lang="en-US"/>
           </a:p>
@@ -9365,7 +9365,7 @@
           <p:nvPr/>
         </p:nvPicPr>
         <p:blipFill>
-          <a:blip r:embed="rId5">
+          <a:blip r:embed="rId4">
             <a:extLst>
               <a:ext uri="{28A0092B-C50C-407E-A947-70E740481C1C}">
                 <a14:useLocalDpi xmlns:a14="http://schemas.microsoft.com/office/drawing/2010/main" val="0"/>
@@ -9414,16 +9414,28 @@
           <a:noFill/>
         </p:spPr>
         <p:txBody>
-          <a:bodyPr wrap="square" anchor="t" lIns="0" rIns="0" tIns="0" bIns="0">
+          <a:bodyPr wrap="square" lIns="0" tIns="0" rIns="0" bIns="0" anchor="t">
             <a:spAutoFit/>
           </a:bodyPr>
           <a:lstStyle/>
           <a:p>
             <a:r>
-              <a:rPr sz="1800" b="0">
+              <a:rPr sz="1800" b="0" dirty="0">
                 <a:latin typeface="Calibri"/>
               </a:rPr>
-              <a:t>In probability theory, we are concerned with outcomes of “experiments,” broadly defined. We let S be all the possible outcomes (often called the sample space) and A, B, etc., particular outcomes that might interest us (Figure 3.1a). We then define the probability that A occurs, denoted by Pr{A}, by</a:t>
+              <a:t>In probability theory, we are concerned with outcomes of “experiments,” broadly defined. We let S be all the possible outcomes (often called the sample space) and A, B, etc., particular outcomes that might interest us (Figure 3.1a). We then define the probability that A occurs, denoted by </a:t>
+            </a:r>
+            <a:r>
+              <a:rPr sz="1800" b="0" dirty="0" err="1">
+                <a:latin typeface="Calibri"/>
+              </a:rPr>
+              <a:t>Pr</a:t>
+            </a:r>
+            <a:r>
+              <a:rPr sz="1800" b="0" dirty="0">
+                <a:latin typeface="Calibri"/>
+              </a:rPr>
+              <a:t>{A}, by</a:t>
             </a:r>
           </a:p>
         </p:txBody>
@@ -9445,17 +9457,23 @@
           <a:noFill/>
         </p:spPr>
         <p:txBody>
-          <a:bodyPr wrap="square" anchor="t" lIns="0" rIns="0" tIns="0" bIns="0">
+          <a:bodyPr wrap="square" lIns="0" tIns="0" rIns="0" bIns="0" anchor="t">
             <a:spAutoFit/>
           </a:bodyPr>
           <a:lstStyle/>
           <a:p>
             <a:pPr algn="ctr"/>
             <a:r>
-              <a:rPr sz="1800" b="0">
+              <a:rPr sz="1800" b="0" dirty="0" err="1">
                 <a:latin typeface="Cambria"/>
               </a:rPr>
-              <a:t>Pr{A} = (Area of A) / (Area of S)                    (3.1)</a:t>
+              <a:t>Pr</a:t>
+            </a:r>
+            <a:r>
+              <a:rPr sz="1800" b="0" dirty="0">
+                <a:latin typeface="Cambria"/>
+              </a:rPr>
+              <a:t>{A} = (Area of A) / (Area of S)                    (3.1)</a:t>
             </a:r>
           </a:p>
         </p:txBody>
@@ -10636,7 +10654,7 @@
           <a:noFill/>
         </p:spPr>
         <p:txBody>
-          <a:bodyPr wrap="square" anchor="ctr" lIns="0" rIns="0" tIns="0" bIns="0">
+          <a:bodyPr wrap="square" lIns="0" tIns="0" rIns="0" bIns="0" anchor="ctr">
             <a:spAutoFit/>
           </a:bodyPr>
           <a:lstStyle/>
@@ -10667,7 +10685,7 @@
           <a:noFill/>
         </p:spPr>
         <p:txBody>
-          <a:bodyPr wrap="square" anchor="ctr" lIns="0" rIns="0" tIns="0" bIns="0">
+          <a:bodyPr wrap="square" lIns="0" tIns="0" rIns="0" bIns="0" anchor="ctr">
             <a:spAutoFit/>
           </a:bodyPr>
           <a:lstStyle/>
@@ -25213,7 +25231,7 @@
           <a:noFill/>
         </p:spPr>
         <p:txBody>
-          <a:bodyPr wrap="square" anchor="t" lIns="0" rIns="0" tIns="0" bIns="0">
+          <a:bodyPr wrap="square" lIns="0" tIns="0" rIns="0" bIns="0" anchor="t">
             <a:spAutoFit/>
           </a:bodyPr>
           <a:lstStyle/>
@@ -25244,7 +25262,7 @@
           <a:noFill/>
         </p:spPr>
         <p:txBody>
-          <a:bodyPr wrap="square" anchor="t" lIns="0" rIns="0" tIns="0" bIns="0">
+          <a:bodyPr wrap="square" lIns="0" tIns="0" rIns="0" bIns="0" anchor="t">
             <a:spAutoFit/>
           </a:bodyPr>
           <a:lstStyle/>
@@ -25393,7 +25411,7 @@
           <a:noFill/>
         </p:spPr>
         <p:txBody>
-          <a:bodyPr wrap="square" anchor="ctr" lIns="0" rIns="0" tIns="0" bIns="0">
+          <a:bodyPr wrap="square" lIns="0" tIns="0" rIns="0" bIns="0" anchor="ctr">
             <a:spAutoFit/>
           </a:bodyPr>
           <a:lstStyle/>
@@ -25594,7 +25612,7 @@
           <a:noFill/>
         </p:spPr>
         <p:txBody>
-          <a:bodyPr wrap="square" anchor="ctr" lIns="0" rIns="0" tIns="0" bIns="0">
+          <a:bodyPr wrap="square" lIns="0" tIns="0" rIns="0" bIns="0" anchor="ctr">
             <a:spAutoFit/>
           </a:bodyPr>
           <a:lstStyle/>
@@ -25625,7 +25643,7 @@
           <a:noFill/>
         </p:spPr>
         <p:txBody>
-          <a:bodyPr wrap="square" anchor="ctr" lIns="0" rIns="0" tIns="0" bIns="0">
+          <a:bodyPr wrap="square" lIns="0" tIns="0" rIns="0" bIns="0" anchor="ctr">
             <a:spAutoFit/>
           </a:bodyPr>
           <a:lstStyle/>
@@ -25649,112 +25667,6 @@
   <p:clrMapOvr>
     <a:masterClrMapping/>
   </p:clrMapOvr>
-  <p:timing>
-    <p:tnLst>
-      <p:par>
-        <p:cTn id="1" dur="indefinite" restart="never" nodeType="tmRoot">
-          <p:childTnLst>
-            <p:seq concurrent="1" nextAc="seek">
-              <p:cTn id="2" dur="indefinite" nodeType="mainSeq">
-                <p:childTnLst>
-                  <p:par>
-                    <p:cTn id="3" fill="hold" nodeType="clickPar">
-                      <p:stCondLst>
-                        <p:cond delay="indefinite"/>
-                      </p:stCondLst>
-                      <p:childTnLst>
-                        <p:par>
-                          <p:cTn id="4" fill="hold" nodeType="withGroup">
-                            <p:stCondLst>
-                              <p:cond delay="0"/>
-                            </p:stCondLst>
-                            <p:childTnLst>
-                              <p:par>
-                                <p:cTn id="5" presetID="1" presetClass="entr" presetSubtype="0" fill="hold" nodeType="clickEffect">
-                                  <p:stCondLst>
-                                    <p:cond delay="0"/>
-                                  </p:stCondLst>
-                                  <p:childTnLst>
-                                    <p:set>
-                                      <p:cBhvr>
-                                        <p:cTn id="6" dur="1" fill="hold">
-                                          <p:stCondLst>
-                                            <p:cond delay="0"/>
-                                          </p:stCondLst>
-                                        </p:cTn>
-                                        <p:tgtEl>
-                                          <p:spTgt spid="6147">
-                                            <p:txEl>
-                                              <p:pRg st="4" end="4"/>
-                                            </p:txEl>
-                                          </p:spTgt>
-                                        </p:tgtEl>
-                                        <p:attrNameLst>
-                                          <p:attrName>style.visibility</p:attrName>
-                                        </p:attrNameLst>
-                                      </p:cBhvr>
-                                      <p:to>
-                                        <p:strVal val="visible"/>
-                                      </p:to>
-                                    </p:set>
-                                  </p:childTnLst>
-                                </p:cTn>
-                              </p:par>
-                              <p:par>
-                                <p:cTn id="7" presetID="1" presetClass="entr" presetSubtype="0" fill="hold" nodeType="withEffect">
-                                  <p:stCondLst>
-                                    <p:cond delay="0"/>
-                                  </p:stCondLst>
-                                  <p:childTnLst>
-                                    <p:set>
-                                      <p:cBhvr>
-                                        <p:cTn id="8" dur="1" fill="hold">
-                                          <p:stCondLst>
-                                            <p:cond delay="0"/>
-                                          </p:stCondLst>
-                                        </p:cTn>
-                                        <p:tgtEl>
-                                          <p:spTgt spid="6149"/>
-                                        </p:tgtEl>
-                                        <p:attrNameLst>
-                                          <p:attrName>style.visibility</p:attrName>
-                                        </p:attrNameLst>
-                                      </p:cBhvr>
-                                      <p:to>
-                                        <p:strVal val="visible"/>
-                                      </p:to>
-                                    </p:set>
-                                  </p:childTnLst>
-                                </p:cTn>
-                              </p:par>
-                            </p:childTnLst>
-                          </p:cTn>
-                        </p:par>
-                      </p:childTnLst>
-                    </p:cTn>
-                  </p:par>
-                </p:childTnLst>
-              </p:cTn>
-              <p:prevCondLst>
-                <p:cond evt="onPrev" delay="0">
-                  <p:tgtEl>
-                    <p:sldTgt/>
-                  </p:tgtEl>
-                </p:cond>
-              </p:prevCondLst>
-              <p:nextCondLst>
-                <p:cond evt="onNext" delay="0">
-                  <p:tgtEl>
-                    <p:sldTgt/>
-                  </p:tgtEl>
-                </p:cond>
-              </p:nextCondLst>
-            </p:seq>
-          </p:childTnLst>
-        </p:cTn>
-      </p:par>
-    </p:tnLst>
-  </p:timing>
 </p:sld>
 </file>
 
@@ -25823,7 +25735,7 @@
           <p:nvPr/>
         </p:nvPicPr>
         <p:blipFill>
-          <a:blip r:embed="rId4">
+          <a:blip r:embed="rId3">
             <a:extLst>
               <a:ext uri="{28A0092B-C50C-407E-A947-70E740481C1C}">
                 <a14:useLocalDpi xmlns:a14="http://schemas.microsoft.com/office/drawing/2010/main" val="0"/>
@@ -26035,16 +25947,22 @@
           <a:noFill/>
         </p:spPr>
         <p:txBody>
-          <a:bodyPr wrap="square" anchor="ctr" lIns="0" rIns="0" tIns="0" bIns="0">
+          <a:bodyPr wrap="square" lIns="0" tIns="0" rIns="0" bIns="0" anchor="ctr">
             <a:spAutoFit/>
           </a:bodyPr>
           <a:lstStyle/>
           <a:p>
             <a:r>
-              <a:rPr sz="2200" b="0">
+              <a:rPr sz="2200" b="0" dirty="0" err="1">
                 <a:latin typeface="Cambria"/>
               </a:rPr>
-              <a:t>Pr{A, B} = (Area common to A and B) / (Area of S)</a:t>
+              <a:t>Pr</a:t>
+            </a:r>
+            <a:r>
+              <a:rPr sz="2200" b="0" dirty="0">
+                <a:latin typeface="Cambria"/>
+              </a:rPr>
+              <a:t>{A, B} = (Area common to A and B) / (Area of S)</a:t>
             </a:r>
           </a:p>
         </p:txBody>
@@ -26066,7 +25984,7 @@
           <a:noFill/>
         </p:spPr>
         <p:txBody>
-          <a:bodyPr wrap="square" anchor="ctr" lIns="0" rIns="0" tIns="0" bIns="0">
+          <a:bodyPr wrap="square" lIns="0" tIns="0" rIns="0" bIns="0" anchor="ctr">
             <a:spAutoFit/>
           </a:bodyPr>
           <a:lstStyle/>
@@ -27591,7 +27509,7 @@
         </p:nvSpPr>
         <p:spPr bwMode="auto">
           <a:xfrm>
-            <a:off x="4916489" y="4986338"/>
+            <a:off x="4916488" y="5117860"/>
             <a:ext cx="2338387" cy="431800"/>
           </a:xfrm>
           <a:prstGeom prst="rect">
@@ -27929,8 +27847,8 @@
         </p:nvSpPr>
         <p:spPr>
           <a:xfrm>
-            <a:off x="3019425" y="2857501"/>
-            <a:ext cx="6224588" cy="411163"/>
+            <a:off x="3019425" y="2878416"/>
+            <a:ext cx="6224588" cy="369332"/>
           </a:xfrm>
           <a:prstGeom prst="rect">
             <a:avLst/>
@@ -27938,13 +27856,13 @@
           <a:noFill/>
         </p:spPr>
         <p:txBody>
-          <a:bodyPr wrap="square" anchor="ctr" lIns="0" rIns="0" tIns="0" bIns="0">
+          <a:bodyPr wrap="square" lIns="0" tIns="0" rIns="0" bIns="0" anchor="ctr">
             <a:spAutoFit/>
           </a:bodyPr>
           <a:lstStyle/>
           <a:p>
             <a:r>
-              <a:rPr sz="1800">
+              <a:rPr sz="2400" dirty="0">
                 <a:latin typeface="Cambria"/>
               </a:rPr>
               <a:t>P(A or B) = P(A ∪ B) = P(A) + P(B) − P(A and B)</a:t>
@@ -27960,8 +27878,8 @@
         </p:nvSpPr>
         <p:spPr>
           <a:xfrm>
-            <a:off x="4695825" y="4551363"/>
-            <a:ext cx="3235569" cy="393700"/>
+            <a:off x="4695825" y="4563547"/>
+            <a:ext cx="3235569" cy="369332"/>
           </a:xfrm>
           <a:prstGeom prst="rect">
             <a:avLst/>
@@ -27969,13 +27887,13 @@
           <a:noFill/>
         </p:spPr>
         <p:txBody>
-          <a:bodyPr wrap="square" anchor="ctr" lIns="0" rIns="0" tIns="0" bIns="0">
+          <a:bodyPr wrap="square" lIns="0" tIns="0" rIns="0" bIns="0" anchor="ctr">
             <a:spAutoFit/>
           </a:bodyPr>
           <a:lstStyle/>
           <a:p>
             <a:r>
-              <a:rPr sz="1900">
+              <a:rPr sz="2400" dirty="0">
                 <a:latin typeface="Cambria"/>
               </a:rPr>
               <a:t>P(A or B) = P(A) + P(B)</a:t>
@@ -28110,7 +28028,7 @@
           <p:nvPr/>
         </p:nvPicPr>
         <p:blipFill>
-          <a:blip r:embed="rId5">
+          <a:blip r:embed="rId3">
             <a:extLst>
               <a:ext uri="{28A0092B-C50C-407E-A947-70E740481C1C}">
                 <a14:useLocalDpi xmlns:a14="http://schemas.microsoft.com/office/drawing/2010/main" val="0"/>
@@ -28444,7 +28362,7 @@
           <a:noFill/>
         </p:spPr>
         <p:txBody>
-          <a:bodyPr wrap="square" anchor="ctr" lIns="0" rIns="0" tIns="0" bIns="0">
+          <a:bodyPr wrap="square" lIns="0" tIns="0" rIns="0" bIns="0" anchor="ctr">
             <a:spAutoFit/>
           </a:bodyPr>
           <a:lstStyle/>
@@ -36105,7 +36023,7 @@
           <a:noFill/>
         </p:spPr>
         <p:txBody>
-          <a:bodyPr wrap="square" anchor="ctr" lIns="0" rIns="0" tIns="0" bIns="0">
+          <a:bodyPr wrap="square" lIns="0" tIns="0" rIns="0" bIns="0" anchor="ctr">
             <a:spAutoFit/>
           </a:bodyPr>
           <a:lstStyle/>
@@ -36255,8 +36173,8 @@
         </p:nvSpPr>
         <p:spPr>
           <a:xfrm>
-            <a:off x="2514600" y="1676400"/>
-            <a:ext cx="6991350" cy="2819400"/>
+            <a:off x="2514600" y="2839879"/>
+            <a:ext cx="6991350" cy="492443"/>
           </a:xfrm>
           <a:prstGeom prst="rect">
             <a:avLst/>
@@ -36264,13 +36182,13 @@
           <a:noFill/>
         </p:spPr>
         <p:txBody>
-          <a:bodyPr wrap="square" anchor="ctr" lIns="0" rIns="0" tIns="0" bIns="0">
+          <a:bodyPr wrap="square" lIns="0" tIns="0" rIns="0" bIns="0" anchor="ctr">
             <a:spAutoFit/>
           </a:bodyPr>
           <a:lstStyle/>
           <a:p>
             <a:r>
-              <a:rPr sz="2600" b="0">
+              <a:rPr sz="3200" b="0">
                 <a:latin typeface="Cambria"/>
               </a:rPr>
               <a:t>P(A | B) = ( P(B | A) · P(A) ) / P(B)</a:t>
@@ -36761,7 +36679,7 @@
               </a14:hiddenEffects>
             </a:ext>
             <a:ext uri="{FAA26D3D-D897-4be2-8F04-BA451C77F1D7}">
-              <ma14:placeholderFlag xmlns:ma14="http://schemas.microsoft.com/office/mac/drawingml/2011/main" xmlns="" val="1"/>
+              <ma14:placeholderFlag xmlns="" xmlns:ma14="http://schemas.microsoft.com/office/mac/drawingml/2011/main" val="1"/>
             </a:ext>
           </a:extLst>
         </p:spPr>
@@ -36902,7 +36820,7 @@
               <a:defRPr/>
             </a:pPr>
             <a:r>
-              <a:rPr lang="en-US" altLang="en-US" sz="3200" kern="0" dirty="0">
+              <a:rPr lang="en-US" altLang="en-US" sz="3200" kern="0" dirty="0" err="1">
                 <a:solidFill>
                   <a:schemeClr val="tx1"/>
                 </a:solidFill>
@@ -36910,7 +36828,18 @@
                 <a:ea typeface="Arial" charset="0"/>
                 <a:cs typeface="Arial" charset="0"/>
               </a:rPr>
-              <a:t>Participation and group work (100 points)</a:t>
+              <a:t>Precourse</a:t>
+            </a:r>
+            <a:r>
+              <a:rPr lang="en-US" altLang="en-US" sz="3200" kern="0" dirty="0">
+                <a:solidFill>
+                  <a:schemeClr val="tx1"/>
+                </a:solidFill>
+                <a:latin typeface="Arial" charset="0"/>
+                <a:ea typeface="Arial" charset="0"/>
+                <a:cs typeface="Arial" charset="0"/>
+              </a:rPr>
+              <a:t> exam (50 points)</a:t>
             </a:r>
           </a:p>
           <a:p>
@@ -36925,7 +36854,7 @@
                 <a:latin typeface="Arial" charset="0"/>
                 <a:cs typeface="Arial" charset="0"/>
               </a:rPr>
-              <a:t>Labs (200 points)</a:t>
+              <a:t>Labs (180 points)</a:t>
             </a:r>
             <a:endParaRPr lang="en-AU" altLang="en-US" sz="3200" kern="0" dirty="0">
               <a:solidFill>
@@ -38214,7 +38143,7 @@
         </p:nvSpPr>
         <p:spPr bwMode="auto">
           <a:xfrm>
-            <a:off x="7426099" y="5211763"/>
+            <a:off x="7043511" y="5027097"/>
             <a:ext cx="2209800" cy="647700"/>
           </a:xfrm>
           <a:prstGeom prst="rect">
@@ -38434,188 +38363,6 @@
       </p:sp>
       <p:sp>
         <p:nvSpPr>
-          <p:cNvPr id="9" name="Oval 8"/>
-          <p:cNvSpPr/>
-          <p:nvPr/>
-        </p:nvSpPr>
-        <p:spPr bwMode="auto">
-          <a:xfrm>
-            <a:off x="4543426" y="4945063"/>
-            <a:ext cx="685800" cy="457200"/>
-          </a:xfrm>
-          <a:prstGeom prst="ellipse">
-            <a:avLst/>
-          </a:prstGeom>
-          <a:noFill/>
-          <a:ln w="57150" cap="flat" cmpd="sng" algn="ctr">
-            <a:solidFill>
-              <a:schemeClr val="accent1">
-                <a:lumMod val="60000"/>
-                <a:lumOff val="40000"/>
-              </a:schemeClr>
-            </a:solidFill>
-            <a:prstDash val="solid"/>
-            <a:round/>
-            <a:headEnd type="none" w="med" len="med"/>
-            <a:tailEnd type="triangle" w="med" len="med"/>
-          </a:ln>
-          <a:effectLst/>
-          <a:extLst>
-            <a:ext uri="{AF507438-7753-43E0-B8FC-AC1667EBCBE1}">
-              <a14:hiddenEffects xmlns:a14="http://schemas.microsoft.com/office/drawing/2010/main">
-                <a:effectLst>
-                  <a:outerShdw dist="35921" dir="2700000" algn="ctr" rotWithShape="0">
-                    <a:schemeClr val="bg2"/>
-                  </a:outerShdw>
-                </a:effectLst>
-              </a14:hiddenEffects>
-            </a:ext>
-          </a:extLst>
-        </p:spPr>
-        <p:txBody>
-          <a:bodyPr wrap="none"/>
-          <a:lstStyle/>
-          <a:p>
-            <a:pPr algn="ctr" eaLnBrk="1" hangingPunct="1">
-              <a:defRPr/>
-            </a:pPr>
-            <a:endParaRPr lang="en-US" sz="3200">
-              <a:latin typeface="Tahoma" pitchFamily="34" charset="0"/>
-            </a:endParaRPr>
-          </a:p>
-        </p:txBody>
-      </p:sp>
-      <p:sp>
-        <p:nvSpPr>
-          <p:cNvPr id="10" name="Oval 9"/>
-          <p:cNvSpPr/>
-          <p:nvPr/>
-        </p:nvSpPr>
-        <p:spPr bwMode="auto">
-          <a:xfrm>
-            <a:off x="4543426" y="5859463"/>
-            <a:ext cx="685800" cy="457200"/>
-          </a:xfrm>
-          <a:prstGeom prst="ellipse">
-            <a:avLst/>
-          </a:prstGeom>
-          <a:noFill/>
-          <a:ln w="57150" cap="flat" cmpd="sng" algn="ctr">
-            <a:solidFill>
-              <a:schemeClr val="accent1">
-                <a:lumMod val="60000"/>
-                <a:lumOff val="40000"/>
-              </a:schemeClr>
-            </a:solidFill>
-            <a:prstDash val="solid"/>
-            <a:round/>
-            <a:headEnd type="none" w="med" len="med"/>
-            <a:tailEnd type="triangle" w="med" len="med"/>
-          </a:ln>
-          <a:effectLst/>
-          <a:extLst>
-            <a:ext uri="{AF507438-7753-43E0-B8FC-AC1667EBCBE1}">
-              <a14:hiddenEffects xmlns:a14="http://schemas.microsoft.com/office/drawing/2010/main">
-                <a:effectLst>
-                  <a:outerShdw dist="35921" dir="2700000" algn="ctr" rotWithShape="0">
-                    <a:schemeClr val="bg2"/>
-                  </a:outerShdw>
-                </a:effectLst>
-              </a14:hiddenEffects>
-            </a:ext>
-          </a:extLst>
-        </p:spPr>
-        <p:txBody>
-          <a:bodyPr wrap="none"/>
-          <a:lstStyle/>
-          <a:p>
-            <a:pPr algn="ctr" eaLnBrk="1" hangingPunct="1">
-              <a:defRPr/>
-            </a:pPr>
-            <a:endParaRPr lang="en-US" sz="3200">
-              <a:latin typeface="Tahoma" pitchFamily="34" charset="0"/>
-            </a:endParaRPr>
-          </a:p>
-        </p:txBody>
-      </p:sp>
-      <p:sp>
-        <p:nvSpPr>
-          <p:cNvPr id="11" name="TextBox 10"/>
-          <p:cNvSpPr txBox="1"/>
-          <p:nvPr/>
-        </p:nvSpPr>
-        <p:spPr>
-          <a:xfrm>
-            <a:off x="2096855" y="5021263"/>
-            <a:ext cx="2359492" cy="369332"/>
-          </a:xfrm>
-          <a:prstGeom prst="rect">
-            <a:avLst/>
-          </a:prstGeom>
-          <a:noFill/>
-        </p:spPr>
-        <p:txBody>
-          <a:bodyPr wrap="none">
-            <a:spAutoFit/>
-          </a:bodyPr>
-          <a:lstStyle/>
-          <a:p>
-            <a:pPr algn="ctr" eaLnBrk="1" hangingPunct="1">
-              <a:defRPr/>
-            </a:pPr>
-            <a:r>
-              <a:rPr lang="en-US" dirty="0">
-                <a:solidFill>
-                  <a:schemeClr val="accent1">
-                    <a:lumMod val="75000"/>
-                  </a:schemeClr>
-                </a:solidFill>
-              </a:rPr>
-              <a:t>Upper summation limit</a:t>
-            </a:r>
-          </a:p>
-        </p:txBody>
-      </p:sp>
-      <p:sp>
-        <p:nvSpPr>
-          <p:cNvPr id="12" name="TextBox 11"/>
-          <p:cNvSpPr txBox="1"/>
-          <p:nvPr/>
-        </p:nvSpPr>
-        <p:spPr>
-          <a:xfrm>
-            <a:off x="2176751" y="5935663"/>
-            <a:ext cx="2350515" cy="369332"/>
-          </a:xfrm>
-          <a:prstGeom prst="rect">
-            <a:avLst/>
-          </a:prstGeom>
-          <a:noFill/>
-        </p:spPr>
-        <p:txBody>
-          <a:bodyPr wrap="none">
-            <a:spAutoFit/>
-          </a:bodyPr>
-          <a:lstStyle/>
-          <a:p>
-            <a:pPr algn="ctr" eaLnBrk="1" hangingPunct="1">
-              <a:defRPr/>
-            </a:pPr>
-            <a:r>
-              <a:rPr lang="en-US" dirty="0">
-                <a:solidFill>
-                  <a:schemeClr val="accent1">
-                    <a:lumMod val="75000"/>
-                  </a:schemeClr>
-                </a:solidFill>
-              </a:rPr>
-              <a:t>Lower summation limit</a:t>
-            </a:r>
-          </a:p>
-        </p:txBody>
-      </p:sp>
-      <p:sp>
-        <p:nvSpPr>
           <p:cNvPr id="122888" name="TextBox 122887"/>
           <p:cNvSpPr txBox="1"/>
           <p:nvPr/>
@@ -38631,7 +38378,7 @@
           <a:noFill/>
         </p:spPr>
         <p:txBody>
-          <a:bodyPr wrap="square" anchor="ctr" lIns="0" rIns="0" tIns="0" bIns="0">
+          <a:bodyPr wrap="square" lIns="0" tIns="0" rIns="0" bIns="0" anchor="ctr">
             <a:spAutoFit/>
           </a:bodyPr>
           <a:lstStyle/>
@@ -38674,7 +38421,7 @@
           <a:noFill/>
         </p:spPr>
         <p:txBody>
-          <a:bodyPr wrap="square" anchor="ctr" lIns="0" rIns="0" tIns="0" bIns="0">
+          <a:bodyPr wrap="square" lIns="0" tIns="0" rIns="0" bIns="0" anchor="ctr">
             <a:spAutoFit/>
           </a:bodyPr>
           <a:lstStyle/>
@@ -38708,8 +38455,8 @@
         </p:nvSpPr>
         <p:spPr>
           <a:xfrm>
-            <a:off x="4543426" y="4945064"/>
-            <a:ext cx="2286000" cy="1317625"/>
+            <a:off x="3374232" y="5166281"/>
+            <a:ext cx="2286000" cy="369332"/>
           </a:xfrm>
           <a:prstGeom prst="rect">
             <a:avLst/>
@@ -38717,43 +38464,49 @@
           <a:noFill/>
         </p:spPr>
         <p:txBody>
-          <a:bodyPr wrap="square" anchor="ctr" lIns="0" rIns="0" tIns="0" bIns="0">
+          <a:bodyPr wrap="square" lIns="0" tIns="0" rIns="0" bIns="0" anchor="ctr">
             <a:spAutoFit/>
           </a:bodyPr>
           <a:lstStyle/>
           <a:p>
             <a:r>
-              <a:rPr sz="2100">
+              <a:rPr sz="2400" dirty="0" err="1">
                 <a:latin typeface="Cambria"/>
               </a:rPr>
               <a:t>Σ</a:t>
             </a:r>
             <a:r>
-              <a:rPr sz="2100" baseline="-25000">
+              <a:rPr sz="2400" baseline="-25000" dirty="0" err="1">
                 <a:latin typeface="Cambria"/>
               </a:rPr>
-              <a:t>i=1</a:t>
-            </a:r>
-            <a:r>
-              <a:rPr sz="2100" baseline="30000">
+              <a:t>i</a:t>
+            </a:r>
+            <a:r>
+              <a:rPr sz="2400" baseline="-25000" dirty="0">
+                <a:latin typeface="Cambria"/>
+              </a:rPr>
+              <a:t>=1</a:t>
+            </a:r>
+            <a:r>
+              <a:rPr sz="2400" baseline="30000" dirty="0">
                 <a:latin typeface="Cambria"/>
               </a:rPr>
               <a:t>N</a:t>
             </a:r>
             <a:r>
-              <a:rPr sz="2100">
+              <a:rPr sz="2400" dirty="0">
                 <a:latin typeface="Cambria"/>
               </a:rPr>
               <a:t> P(x</a:t>
             </a:r>
             <a:r>
-              <a:rPr sz="2100" baseline="-25000">
+              <a:rPr sz="2400" baseline="-25000" dirty="0">
                 <a:latin typeface="Cambria"/>
               </a:rPr>
               <a:t>i</a:t>
             </a:r>
             <a:r>
-              <a:rPr sz="2100">
+              <a:rPr sz="2400" dirty="0">
                 <a:latin typeface="Cambria"/>
               </a:rPr>
               <a:t>) = 1</a:t>
@@ -38771,168 +38524,6 @@
   <p:clrMapOvr>
     <a:masterClrMapping/>
   </p:clrMapOvr>
-  <p:timing>
-    <p:tnLst>
-      <p:par>
-        <p:cTn id="1" dur="indefinite" restart="never" nodeType="tmRoot">
-          <p:childTnLst>
-            <p:seq concurrent="1" nextAc="seek">
-              <p:cTn id="2" dur="indefinite" nodeType="mainSeq">
-                <p:childTnLst>
-                  <p:par>
-                    <p:cTn id="3" fill="hold" nodeType="clickPar">
-                      <p:stCondLst>
-                        <p:cond delay="indefinite"/>
-                      </p:stCondLst>
-                      <p:childTnLst>
-                        <p:par>
-                          <p:cTn id="4" fill="hold" nodeType="withGroup">
-                            <p:stCondLst>
-                              <p:cond delay="0"/>
-                            </p:stCondLst>
-                            <p:childTnLst>
-                              <p:par>
-                                <p:cTn id="5" presetID="1" presetClass="entr" presetSubtype="0" fill="hold" grpId="0" nodeType="clickEffect">
-                                  <p:stCondLst>
-                                    <p:cond delay="0"/>
-                                  </p:stCondLst>
-                                  <p:childTnLst>
-                                    <p:set>
-                                      <p:cBhvr>
-                                        <p:cTn id="6" dur="1" fill="hold">
-                                          <p:stCondLst>
-                                            <p:cond delay="0"/>
-                                          </p:stCondLst>
-                                        </p:cTn>
-                                        <p:tgtEl>
-                                          <p:spTgt spid="12"/>
-                                        </p:tgtEl>
-                                        <p:attrNameLst>
-                                          <p:attrName>style.visibility</p:attrName>
-                                        </p:attrNameLst>
-                                      </p:cBhvr>
-                                      <p:to>
-                                        <p:strVal val="visible"/>
-                                      </p:to>
-                                    </p:set>
-                                  </p:childTnLst>
-                                </p:cTn>
-                              </p:par>
-                              <p:par>
-                                <p:cTn id="7" presetID="1" presetClass="entr" presetSubtype="0" fill="hold" grpId="0" nodeType="withEffect">
-                                  <p:stCondLst>
-                                    <p:cond delay="0"/>
-                                  </p:stCondLst>
-                                  <p:childTnLst>
-                                    <p:set>
-                                      <p:cBhvr>
-                                        <p:cTn id="8" dur="1" fill="hold">
-                                          <p:stCondLst>
-                                            <p:cond delay="0"/>
-                                          </p:stCondLst>
-                                        </p:cTn>
-                                        <p:tgtEl>
-                                          <p:spTgt spid="10"/>
-                                        </p:tgtEl>
-                                        <p:attrNameLst>
-                                          <p:attrName>style.visibility</p:attrName>
-                                        </p:attrNameLst>
-                                      </p:cBhvr>
-                                      <p:to>
-                                        <p:strVal val="visible"/>
-                                      </p:to>
-                                    </p:set>
-                                  </p:childTnLst>
-                                </p:cTn>
-                              </p:par>
-                              <p:par>
-                                <p:cTn id="9" presetID="1" presetClass="entr" presetSubtype="0" fill="hold" grpId="0" nodeType="withEffect">
-                                  <p:stCondLst>
-                                    <p:cond delay="0"/>
-                                  </p:stCondLst>
-                                  <p:childTnLst>
-                                    <p:set>
-                                      <p:cBhvr>
-                                        <p:cTn id="10" dur="1" fill="hold">
-                                          <p:stCondLst>
-                                            <p:cond delay="0"/>
-                                          </p:stCondLst>
-                                        </p:cTn>
-                                        <p:tgtEl>
-                                          <p:spTgt spid="9"/>
-                                        </p:tgtEl>
-                                        <p:attrNameLst>
-                                          <p:attrName>style.visibility</p:attrName>
-                                        </p:attrNameLst>
-                                      </p:cBhvr>
-                                      <p:to>
-                                        <p:strVal val="visible"/>
-                                      </p:to>
-                                    </p:set>
-                                  </p:childTnLst>
-                                </p:cTn>
-                              </p:par>
-                              <p:par>
-                                <p:cTn id="11" presetID="1" presetClass="entr" presetSubtype="0" fill="hold" grpId="0" nodeType="withEffect">
-                                  <p:stCondLst>
-                                    <p:cond delay="0"/>
-                                  </p:stCondLst>
-                                  <p:childTnLst>
-                                    <p:set>
-                                      <p:cBhvr>
-                                        <p:cTn id="12" dur="1" fill="hold">
-                                          <p:stCondLst>
-                                            <p:cond delay="0"/>
-                                          </p:stCondLst>
-                                        </p:cTn>
-                                        <p:tgtEl>
-                                          <p:spTgt spid="11"/>
-                                        </p:tgtEl>
-                                        <p:attrNameLst>
-                                          <p:attrName>style.visibility</p:attrName>
-                                        </p:attrNameLst>
-                                      </p:cBhvr>
-                                      <p:to>
-                                        <p:strVal val="visible"/>
-                                      </p:to>
-                                    </p:set>
-                                  </p:childTnLst>
-                                </p:cTn>
-                              </p:par>
-                            </p:childTnLst>
-                          </p:cTn>
-                        </p:par>
-                      </p:childTnLst>
-                    </p:cTn>
-                  </p:par>
-                </p:childTnLst>
-              </p:cTn>
-              <p:prevCondLst>
-                <p:cond evt="onPrev" delay="0">
-                  <p:tgtEl>
-                    <p:sldTgt/>
-                  </p:tgtEl>
-                </p:cond>
-              </p:prevCondLst>
-              <p:nextCondLst>
-                <p:cond evt="onNext" delay="0">
-                  <p:tgtEl>
-                    <p:sldTgt/>
-                  </p:tgtEl>
-                </p:cond>
-              </p:nextCondLst>
-            </p:seq>
-          </p:childTnLst>
-        </p:cTn>
-      </p:par>
-    </p:tnLst>
-    <p:bldLst>
-      <p:bldP spid="9" grpId="0" animBg="1"/>
-      <p:bldP spid="10" grpId="0" animBg="1"/>
-      <p:bldP spid="11" grpId="0"/>
-      <p:bldP spid="12" grpId="0"/>
-    </p:bldLst>
-  </p:timing>
 </p:sld>
 </file>
 
@@ -39062,8 +38653,8 @@
         </p:nvSpPr>
         <p:spPr>
           <a:xfrm>
-            <a:off x="2293257" y="2841168"/>
-            <a:ext cx="7455876" cy="965200"/>
+            <a:off x="2293257" y="3139102"/>
+            <a:ext cx="7455876" cy="369332"/>
           </a:xfrm>
           <a:prstGeom prst="rect">
             <a:avLst/>
@@ -39071,61 +38662,73 @@
           <a:noFill/>
         </p:spPr>
         <p:txBody>
-          <a:bodyPr wrap="square" anchor="ctr" lIns="0" rIns="0" tIns="0" bIns="0">
+          <a:bodyPr wrap="square" lIns="0" tIns="0" rIns="0" bIns="0" anchor="ctr">
             <a:spAutoFit/>
           </a:bodyPr>
           <a:lstStyle/>
           <a:p>
             <a:r>
-              <a:rPr sz="1900" b="0">
+              <a:rPr sz="2400" b="0" dirty="0">
                 <a:latin typeface="Cambria"/>
               </a:rPr>
               <a:t>F(x) = P(X ≤ x) = ∑</a:t>
             </a:r>
             <a:r>
-              <a:rPr sz="1900" b="0" baseline="-25000">
+              <a:rPr sz="2400" b="0" baseline="-25000" dirty="0" err="1">
                 <a:latin typeface="Cambria"/>
               </a:rPr>
-              <a:t>x_i ≤ x</a:t>
-            </a:r>
-            <a:r>
-              <a:rPr sz="1900" b="0">
+              <a:t>x_i</a:t>
+            </a:r>
+            <a:r>
+              <a:rPr sz="2400" b="0" baseline="-25000" dirty="0">
+                <a:latin typeface="Cambria"/>
+              </a:rPr>
+              <a:t> ≤ x</a:t>
+            </a:r>
+            <a:r>
+              <a:rPr sz="2400" b="0" dirty="0">
                 <a:latin typeface="Cambria"/>
               </a:rPr>
               <a:t> P(X = x</a:t>
             </a:r>
             <a:r>
-              <a:rPr sz="1900" b="0" baseline="-25000">
+              <a:rPr sz="2400" b="0" baseline="-25000" dirty="0">
                 <a:latin typeface="Cambria"/>
               </a:rPr>
               <a:t>i</a:t>
             </a:r>
             <a:r>
-              <a:rPr sz="1900" b="0">
+              <a:rPr sz="2400" b="0" dirty="0">
                 <a:latin typeface="Cambria"/>
               </a:rPr>
               <a:t>) = ∑</a:t>
             </a:r>
             <a:r>
-              <a:rPr sz="1900" b="0" baseline="-25000">
+              <a:rPr sz="2400" b="0" baseline="-25000" dirty="0" err="1">
                 <a:latin typeface="Cambria"/>
               </a:rPr>
-              <a:t>x_i ≤ x</a:t>
-            </a:r>
-            <a:r>
-              <a:rPr sz="1900" b="0">
+              <a:t>x_i</a:t>
+            </a:r>
+            <a:r>
+              <a:rPr sz="2400" b="0" baseline="-25000" dirty="0">
+                <a:latin typeface="Cambria"/>
+              </a:rPr>
+              <a:t> ≤ x</a:t>
+            </a:r>
+            <a:r>
+              <a:rPr sz="2400" b="0" dirty="0">
                 <a:latin typeface="Cambria"/>
               </a:rPr>
               <a:t> p(x</a:t>
             </a:r>
             <a:r>
-              <a:rPr sz="1900" b="0" baseline="-25000">
+              <a:rPr sz="2400" b="0" baseline="-25000" dirty="0">
                 <a:latin typeface="Cambria"/>
               </a:rPr>
               <a:t>i</a:t>
             </a:r>
             <a:r>
-              <a:rPr sz="1900" b="0">
+              <a:rPr sz="2400" b="0" dirty="0">
                 <a:latin typeface="Cambria"/>
               </a:rPr>
               <a:t>)</a:t>
@@ -39326,8 +38929,8 @@
         </p:nvSpPr>
         <p:spPr>
           <a:xfrm>
-            <a:off x="2235200" y="2576514"/>
-            <a:ext cx="7455876" cy="965200"/>
+            <a:off x="2235200" y="2874448"/>
+            <a:ext cx="7455876" cy="369332"/>
           </a:xfrm>
           <a:prstGeom prst="rect">
             <a:avLst/>
@@ -39335,61 +38938,61 @@
           <a:noFill/>
         </p:spPr>
         <p:txBody>
-          <a:bodyPr wrap="square" anchor="ctr" lIns="0" rIns="0" tIns="0" bIns="0">
+          <a:bodyPr wrap="square" lIns="0" tIns="0" rIns="0" bIns="0" anchor="ctr">
             <a:spAutoFit/>
           </a:bodyPr>
           <a:lstStyle/>
           <a:p>
             <a:r>
-              <a:rPr sz="1900" b="0">
+              <a:rPr sz="2400" b="0">
                 <a:latin typeface="Cambria"/>
               </a:rPr>
               <a:t>F(x) = P(X ≤ x) = ∑</a:t>
             </a:r>
             <a:r>
-              <a:rPr sz="1900" b="0" baseline="-25000">
+              <a:rPr sz="2400" b="0" baseline="-25000">
                 <a:latin typeface="Cambria"/>
               </a:rPr>
               <a:t>x_i ≤ x</a:t>
             </a:r>
             <a:r>
-              <a:rPr sz="1900" b="0">
+              <a:rPr sz="2400" b="0">
                 <a:latin typeface="Cambria"/>
               </a:rPr>
               <a:t> P(X = x</a:t>
             </a:r>
             <a:r>
-              <a:rPr sz="1900" b="0" baseline="-25000">
+              <a:rPr sz="2400" b="0" baseline="-25000">
                 <a:latin typeface="Cambria"/>
               </a:rPr>
               <a:t>i</a:t>
             </a:r>
             <a:r>
-              <a:rPr sz="1900" b="0">
+              <a:rPr sz="2400" b="0">
                 <a:latin typeface="Cambria"/>
               </a:rPr>
               <a:t>) = ∑</a:t>
             </a:r>
             <a:r>
-              <a:rPr sz="1900" b="0" baseline="-25000">
+              <a:rPr sz="2400" b="0" baseline="-25000">
                 <a:latin typeface="Cambria"/>
               </a:rPr>
               <a:t>x_i ≤ x</a:t>
             </a:r>
             <a:r>
-              <a:rPr sz="1900" b="0">
+              <a:rPr sz="2400" b="0">
                 <a:latin typeface="Cambria"/>
               </a:rPr>
               <a:t> p(x</a:t>
             </a:r>
             <a:r>
-              <a:rPr sz="1900" b="0" baseline="-25000">
+              <a:rPr sz="2400" b="0" baseline="-25000">
                 <a:latin typeface="Cambria"/>
               </a:rPr>
               <a:t>i</a:t>
             </a:r>
             <a:r>
-              <a:rPr sz="1900" b="0">
+              <a:rPr sz="2400" b="0">
                 <a:latin typeface="Cambria"/>
               </a:rPr>
               <a:t>)</a:t>
@@ -39414,7 +39017,7 @@
           <a:noFill/>
         </p:spPr>
         <p:txBody>
-          <a:bodyPr wrap="square" anchor="ctr" lIns="0" rIns="0" tIns="0" bIns="0">
+          <a:bodyPr wrap="square" lIns="0" tIns="0" rIns="0" bIns="0" anchor="ctr">
             <a:spAutoFit/>
           </a:bodyPr>
           <a:lstStyle/>
@@ -39824,1374 +39427,6 @@
       </p:sp>
       <p:sp>
         <p:nvSpPr>
-          <p:cNvPr id="7" name="Rectangle 6"/>
-          <p:cNvSpPr>
-            <a:spLocks noChangeArrowheads="1"/>
-          </p:cNvSpPr>
-          <p:nvPr/>
-        </p:nvSpPr>
-        <p:spPr bwMode="auto">
-          <a:xfrm>
-            <a:off x="9144000" y="2819400"/>
-            <a:ext cx="457200" cy="381000"/>
-          </a:xfrm>
-          <a:prstGeom prst="rect">
-            <a:avLst/>
-          </a:prstGeom>
-          <a:noFill/>
-          <a:ln w="57150">
-            <a:solidFill>
-              <a:srgbClr val="D32128"/>
-            </a:solidFill>
-            <a:round/>
-            <a:headEnd/>
-            <a:tailEnd type="triangle" w="med" len="med"/>
-          </a:ln>
-          <a:effectLst/>
-          <a:extLst>
-            <a:ext uri="{909E8E84-426E-40DD-AFC4-6F175D3DCCD1}">
-              <a14:hiddenFill xmlns:a14="http://schemas.microsoft.com/office/drawing/2010/main">
-                <a:solidFill>
-                  <a:srgbClr val="FFFFFF"/>
-                </a:solidFill>
-              </a14:hiddenFill>
-            </a:ext>
-            <a:ext uri="{AF507438-7753-43E0-B8FC-AC1667EBCBE1}">
-              <a14:hiddenEffects xmlns:a14="http://schemas.microsoft.com/office/drawing/2010/main">
-                <a:effectLst>
-                  <a:outerShdw dist="35921" dir="2700000" algn="ctr" rotWithShape="0">
-                    <a:schemeClr val="bg2"/>
-                  </a:outerShdw>
-                </a:effectLst>
-              </a14:hiddenEffects>
-            </a:ext>
-          </a:extLst>
-        </p:spPr>
-        <p:txBody>
-          <a:bodyPr wrap="none"/>
-          <a:lstStyle>
-            <a:lvl1pPr>
-              <a:spcBef>
-                <a:spcPct val="20000"/>
-              </a:spcBef>
-              <a:buClr>
-                <a:schemeClr val="folHlink"/>
-              </a:buClr>
-              <a:buSzPct val="60000"/>
-              <a:buFont typeface="Wingdings" charset="2"/>
-              <a:buChar char="n"/>
-              <a:defRPr sz="3200">
-                <a:solidFill>
-                  <a:schemeClr val="tx1"/>
-                </a:solidFill>
-                <a:latin typeface="Tahoma" charset="0"/>
-              </a:defRPr>
-            </a:lvl1pPr>
-            <a:lvl2pPr marL="742950" indent="-285750">
-              <a:spcBef>
-                <a:spcPct val="20000"/>
-              </a:spcBef>
-              <a:buClr>
-                <a:schemeClr val="hlink"/>
-              </a:buClr>
-              <a:buSzPct val="55000"/>
-              <a:buFont typeface="Wingdings" charset="2"/>
-              <a:buChar char="n"/>
-              <a:defRPr sz="2800">
-                <a:solidFill>
-                  <a:schemeClr val="tx1"/>
-                </a:solidFill>
-                <a:latin typeface="Tahoma" charset="0"/>
-              </a:defRPr>
-            </a:lvl2pPr>
-            <a:lvl3pPr marL="1143000" indent="-228600">
-              <a:spcBef>
-                <a:spcPct val="20000"/>
-              </a:spcBef>
-              <a:buClr>
-                <a:schemeClr val="folHlink"/>
-              </a:buClr>
-              <a:buSzPct val="50000"/>
-              <a:buFont typeface="Wingdings" charset="2"/>
-              <a:buChar char="n"/>
-              <a:defRPr sz="2400">
-                <a:solidFill>
-                  <a:schemeClr val="tx1"/>
-                </a:solidFill>
-                <a:latin typeface="Tahoma" charset="0"/>
-              </a:defRPr>
-            </a:lvl3pPr>
-            <a:lvl4pPr marL="1600200" indent="-228600">
-              <a:spcBef>
-                <a:spcPct val="20000"/>
-              </a:spcBef>
-              <a:buClr>
-                <a:schemeClr val="accent2"/>
-              </a:buClr>
-              <a:buSzPct val="55000"/>
-              <a:buFont typeface="Wingdings" charset="2"/>
-              <a:buChar char="n"/>
-              <a:defRPr sz="2000">
-                <a:solidFill>
-                  <a:schemeClr val="tx1"/>
-                </a:solidFill>
-                <a:latin typeface="Tahoma" charset="0"/>
-              </a:defRPr>
-            </a:lvl4pPr>
-            <a:lvl5pPr marL="2057400" indent="-228600">
-              <a:spcBef>
-                <a:spcPct val="20000"/>
-              </a:spcBef>
-              <a:buClr>
-                <a:schemeClr val="accent1"/>
-              </a:buClr>
-              <a:buSzPct val="50000"/>
-              <a:buFont typeface="Wingdings" charset="2"/>
-              <a:buChar char="n"/>
-              <a:defRPr sz="2000">
-                <a:solidFill>
-                  <a:schemeClr val="tx1"/>
-                </a:solidFill>
-                <a:latin typeface="Tahoma" charset="0"/>
-              </a:defRPr>
-            </a:lvl5pPr>
-            <a:lvl6pPr marL="2514600" indent="-228600" eaLnBrk="0" fontAlgn="base" hangingPunct="0">
-              <a:spcBef>
-                <a:spcPct val="20000"/>
-              </a:spcBef>
-              <a:spcAft>
-                <a:spcPct val="0"/>
-              </a:spcAft>
-              <a:buClr>
-                <a:schemeClr val="accent1"/>
-              </a:buClr>
-              <a:buSzPct val="50000"/>
-              <a:buFont typeface="Wingdings" charset="2"/>
-              <a:buChar char="n"/>
-              <a:defRPr sz="2000">
-                <a:solidFill>
-                  <a:schemeClr val="tx1"/>
-                </a:solidFill>
-                <a:latin typeface="Tahoma" charset="0"/>
-              </a:defRPr>
-            </a:lvl6pPr>
-            <a:lvl7pPr marL="2971800" indent="-228600" eaLnBrk="0" fontAlgn="base" hangingPunct="0">
-              <a:spcBef>
-                <a:spcPct val="20000"/>
-              </a:spcBef>
-              <a:spcAft>
-                <a:spcPct val="0"/>
-              </a:spcAft>
-              <a:buClr>
-                <a:schemeClr val="accent1"/>
-              </a:buClr>
-              <a:buSzPct val="50000"/>
-              <a:buFont typeface="Wingdings" charset="2"/>
-              <a:buChar char="n"/>
-              <a:defRPr sz="2000">
-                <a:solidFill>
-                  <a:schemeClr val="tx1"/>
-                </a:solidFill>
-                <a:latin typeface="Tahoma" charset="0"/>
-              </a:defRPr>
-            </a:lvl7pPr>
-            <a:lvl8pPr marL="3429000" indent="-228600" eaLnBrk="0" fontAlgn="base" hangingPunct="0">
-              <a:spcBef>
-                <a:spcPct val="20000"/>
-              </a:spcBef>
-              <a:spcAft>
-                <a:spcPct val="0"/>
-              </a:spcAft>
-              <a:buClr>
-                <a:schemeClr val="accent1"/>
-              </a:buClr>
-              <a:buSzPct val="50000"/>
-              <a:buFont typeface="Wingdings" charset="2"/>
-              <a:buChar char="n"/>
-              <a:defRPr sz="2000">
-                <a:solidFill>
-                  <a:schemeClr val="tx1"/>
-                </a:solidFill>
-                <a:latin typeface="Tahoma" charset="0"/>
-              </a:defRPr>
-            </a:lvl8pPr>
-            <a:lvl9pPr marL="3886200" indent="-228600" eaLnBrk="0" fontAlgn="base" hangingPunct="0">
-              <a:spcBef>
-                <a:spcPct val="20000"/>
-              </a:spcBef>
-              <a:spcAft>
-                <a:spcPct val="0"/>
-              </a:spcAft>
-              <a:buClr>
-                <a:schemeClr val="accent1"/>
-              </a:buClr>
-              <a:buSzPct val="50000"/>
-              <a:buFont typeface="Wingdings" charset="2"/>
-              <a:buChar char="n"/>
-              <a:defRPr sz="2000">
-                <a:solidFill>
-                  <a:schemeClr val="tx1"/>
-                </a:solidFill>
-                <a:latin typeface="Tahoma" charset="0"/>
-              </a:defRPr>
-            </a:lvl9pPr>
-          </a:lstStyle>
-          <a:p>
-            <a:pPr algn="ctr" eaLnBrk="1" hangingPunct="1">
-              <a:spcBef>
-                <a:spcPct val="0"/>
-              </a:spcBef>
-              <a:buClrTx/>
-              <a:buSzTx/>
-              <a:buFontTx/>
-              <a:buNone/>
-            </a:pPr>
-            <a:endParaRPr lang="en-US" altLang="en-US"/>
-          </a:p>
-        </p:txBody>
-      </p:sp>
-      <p:sp>
-        <p:nvSpPr>
-          <p:cNvPr id="8" name="Rectangle 7"/>
-          <p:cNvSpPr>
-            <a:spLocks noChangeArrowheads="1"/>
-          </p:cNvSpPr>
-          <p:nvPr/>
-        </p:nvSpPr>
-        <p:spPr bwMode="auto">
-          <a:xfrm>
-            <a:off x="6172200" y="3352800"/>
-            <a:ext cx="457200" cy="381000"/>
-          </a:xfrm>
-          <a:prstGeom prst="rect">
-            <a:avLst/>
-          </a:prstGeom>
-          <a:noFill/>
-          <a:ln w="57150">
-            <a:solidFill>
-              <a:srgbClr val="D32128"/>
-            </a:solidFill>
-            <a:round/>
-            <a:headEnd/>
-            <a:tailEnd type="triangle" w="med" len="med"/>
-          </a:ln>
-          <a:effectLst/>
-          <a:extLst>
-            <a:ext uri="{909E8E84-426E-40DD-AFC4-6F175D3DCCD1}">
-              <a14:hiddenFill xmlns:a14="http://schemas.microsoft.com/office/drawing/2010/main">
-                <a:solidFill>
-                  <a:srgbClr val="FFFFFF"/>
-                </a:solidFill>
-              </a14:hiddenFill>
-            </a:ext>
-            <a:ext uri="{AF507438-7753-43E0-B8FC-AC1667EBCBE1}">
-              <a14:hiddenEffects xmlns:a14="http://schemas.microsoft.com/office/drawing/2010/main">
-                <a:effectLst>
-                  <a:outerShdw dist="35921" dir="2700000" algn="ctr" rotWithShape="0">
-                    <a:schemeClr val="bg2"/>
-                  </a:outerShdw>
-                </a:effectLst>
-              </a14:hiddenEffects>
-            </a:ext>
-          </a:extLst>
-        </p:spPr>
-        <p:txBody>
-          <a:bodyPr wrap="none"/>
-          <a:lstStyle>
-            <a:lvl1pPr>
-              <a:spcBef>
-                <a:spcPct val="20000"/>
-              </a:spcBef>
-              <a:buClr>
-                <a:schemeClr val="folHlink"/>
-              </a:buClr>
-              <a:buSzPct val="60000"/>
-              <a:buFont typeface="Wingdings" charset="2"/>
-              <a:buChar char="n"/>
-              <a:defRPr sz="3200">
-                <a:solidFill>
-                  <a:schemeClr val="tx1"/>
-                </a:solidFill>
-                <a:latin typeface="Tahoma" charset="0"/>
-              </a:defRPr>
-            </a:lvl1pPr>
-            <a:lvl2pPr marL="742950" indent="-285750">
-              <a:spcBef>
-                <a:spcPct val="20000"/>
-              </a:spcBef>
-              <a:buClr>
-                <a:schemeClr val="hlink"/>
-              </a:buClr>
-              <a:buSzPct val="55000"/>
-              <a:buFont typeface="Wingdings" charset="2"/>
-              <a:buChar char="n"/>
-              <a:defRPr sz="2800">
-                <a:solidFill>
-                  <a:schemeClr val="tx1"/>
-                </a:solidFill>
-                <a:latin typeface="Tahoma" charset="0"/>
-              </a:defRPr>
-            </a:lvl2pPr>
-            <a:lvl3pPr marL="1143000" indent="-228600">
-              <a:spcBef>
-                <a:spcPct val="20000"/>
-              </a:spcBef>
-              <a:buClr>
-                <a:schemeClr val="folHlink"/>
-              </a:buClr>
-              <a:buSzPct val="50000"/>
-              <a:buFont typeface="Wingdings" charset="2"/>
-              <a:buChar char="n"/>
-              <a:defRPr sz="2400">
-                <a:solidFill>
-                  <a:schemeClr val="tx1"/>
-                </a:solidFill>
-                <a:latin typeface="Tahoma" charset="0"/>
-              </a:defRPr>
-            </a:lvl3pPr>
-            <a:lvl4pPr marL="1600200" indent="-228600">
-              <a:spcBef>
-                <a:spcPct val="20000"/>
-              </a:spcBef>
-              <a:buClr>
-                <a:schemeClr val="accent2"/>
-              </a:buClr>
-              <a:buSzPct val="55000"/>
-              <a:buFont typeface="Wingdings" charset="2"/>
-              <a:buChar char="n"/>
-              <a:defRPr sz="2000">
-                <a:solidFill>
-                  <a:schemeClr val="tx1"/>
-                </a:solidFill>
-                <a:latin typeface="Tahoma" charset="0"/>
-              </a:defRPr>
-            </a:lvl4pPr>
-            <a:lvl5pPr marL="2057400" indent="-228600">
-              <a:spcBef>
-                <a:spcPct val="20000"/>
-              </a:spcBef>
-              <a:buClr>
-                <a:schemeClr val="accent1"/>
-              </a:buClr>
-              <a:buSzPct val="50000"/>
-              <a:buFont typeface="Wingdings" charset="2"/>
-              <a:buChar char="n"/>
-              <a:defRPr sz="2000">
-                <a:solidFill>
-                  <a:schemeClr val="tx1"/>
-                </a:solidFill>
-                <a:latin typeface="Tahoma" charset="0"/>
-              </a:defRPr>
-            </a:lvl5pPr>
-            <a:lvl6pPr marL="2514600" indent="-228600" eaLnBrk="0" fontAlgn="base" hangingPunct="0">
-              <a:spcBef>
-                <a:spcPct val="20000"/>
-              </a:spcBef>
-              <a:spcAft>
-                <a:spcPct val="0"/>
-              </a:spcAft>
-              <a:buClr>
-                <a:schemeClr val="accent1"/>
-              </a:buClr>
-              <a:buSzPct val="50000"/>
-              <a:buFont typeface="Wingdings" charset="2"/>
-              <a:buChar char="n"/>
-              <a:defRPr sz="2000">
-                <a:solidFill>
-                  <a:schemeClr val="tx1"/>
-                </a:solidFill>
-                <a:latin typeface="Tahoma" charset="0"/>
-              </a:defRPr>
-            </a:lvl6pPr>
-            <a:lvl7pPr marL="2971800" indent="-228600" eaLnBrk="0" fontAlgn="base" hangingPunct="0">
-              <a:spcBef>
-                <a:spcPct val="20000"/>
-              </a:spcBef>
-              <a:spcAft>
-                <a:spcPct val="0"/>
-              </a:spcAft>
-              <a:buClr>
-                <a:schemeClr val="accent1"/>
-              </a:buClr>
-              <a:buSzPct val="50000"/>
-              <a:buFont typeface="Wingdings" charset="2"/>
-              <a:buChar char="n"/>
-              <a:defRPr sz="2000">
-                <a:solidFill>
-                  <a:schemeClr val="tx1"/>
-                </a:solidFill>
-                <a:latin typeface="Tahoma" charset="0"/>
-              </a:defRPr>
-            </a:lvl7pPr>
-            <a:lvl8pPr marL="3429000" indent="-228600" eaLnBrk="0" fontAlgn="base" hangingPunct="0">
-              <a:spcBef>
-                <a:spcPct val="20000"/>
-              </a:spcBef>
-              <a:spcAft>
-                <a:spcPct val="0"/>
-              </a:spcAft>
-              <a:buClr>
-                <a:schemeClr val="accent1"/>
-              </a:buClr>
-              <a:buSzPct val="50000"/>
-              <a:buFont typeface="Wingdings" charset="2"/>
-              <a:buChar char="n"/>
-              <a:defRPr sz="2000">
-                <a:solidFill>
-                  <a:schemeClr val="tx1"/>
-                </a:solidFill>
-                <a:latin typeface="Tahoma" charset="0"/>
-              </a:defRPr>
-            </a:lvl8pPr>
-            <a:lvl9pPr marL="3886200" indent="-228600" eaLnBrk="0" fontAlgn="base" hangingPunct="0">
-              <a:spcBef>
-                <a:spcPct val="20000"/>
-              </a:spcBef>
-              <a:spcAft>
-                <a:spcPct val="0"/>
-              </a:spcAft>
-              <a:buClr>
-                <a:schemeClr val="accent1"/>
-              </a:buClr>
-              <a:buSzPct val="50000"/>
-              <a:buFont typeface="Wingdings" charset="2"/>
-              <a:buChar char="n"/>
-              <a:defRPr sz="2000">
-                <a:solidFill>
-                  <a:schemeClr val="tx1"/>
-                </a:solidFill>
-                <a:latin typeface="Tahoma" charset="0"/>
-              </a:defRPr>
-            </a:lvl9pPr>
-          </a:lstStyle>
-          <a:p>
-            <a:pPr algn="ctr" eaLnBrk="1" hangingPunct="1">
-              <a:spcBef>
-                <a:spcPct val="0"/>
-              </a:spcBef>
-              <a:buClrTx/>
-              <a:buSzTx/>
-              <a:buFontTx/>
-              <a:buNone/>
-            </a:pPr>
-            <a:endParaRPr lang="en-US" altLang="en-US"/>
-          </a:p>
-        </p:txBody>
-      </p:sp>
-      <p:sp>
-        <p:nvSpPr>
-          <p:cNvPr id="9" name="Rectangle 8"/>
-          <p:cNvSpPr>
-            <a:spLocks noChangeArrowheads="1"/>
-          </p:cNvSpPr>
-          <p:nvPr/>
-        </p:nvSpPr>
-        <p:spPr bwMode="auto">
-          <a:xfrm>
-            <a:off x="7772400" y="3429000"/>
-            <a:ext cx="1752600" cy="533400"/>
-          </a:xfrm>
-          <a:prstGeom prst="rect">
-            <a:avLst/>
-          </a:prstGeom>
-          <a:noFill/>
-          <a:ln w="57150">
-            <a:solidFill>
-              <a:srgbClr val="D32128"/>
-            </a:solidFill>
-            <a:round/>
-            <a:headEnd/>
-            <a:tailEnd type="triangle" w="med" len="med"/>
-          </a:ln>
-          <a:effectLst/>
-          <a:extLst>
-            <a:ext uri="{909E8E84-426E-40DD-AFC4-6F175D3DCCD1}">
-              <a14:hiddenFill xmlns:a14="http://schemas.microsoft.com/office/drawing/2010/main">
-                <a:solidFill>
-                  <a:srgbClr val="FFFFFF"/>
-                </a:solidFill>
-              </a14:hiddenFill>
-            </a:ext>
-            <a:ext uri="{AF507438-7753-43E0-B8FC-AC1667EBCBE1}">
-              <a14:hiddenEffects xmlns:a14="http://schemas.microsoft.com/office/drawing/2010/main">
-                <a:effectLst>
-                  <a:outerShdw dist="35921" dir="2700000" algn="ctr" rotWithShape="0">
-                    <a:schemeClr val="bg2"/>
-                  </a:outerShdw>
-                </a:effectLst>
-              </a14:hiddenEffects>
-            </a:ext>
-          </a:extLst>
-        </p:spPr>
-        <p:txBody>
-          <a:bodyPr wrap="none"/>
-          <a:lstStyle>
-            <a:lvl1pPr>
-              <a:spcBef>
-                <a:spcPct val="20000"/>
-              </a:spcBef>
-              <a:buClr>
-                <a:schemeClr val="folHlink"/>
-              </a:buClr>
-              <a:buSzPct val="60000"/>
-              <a:buFont typeface="Wingdings" charset="2"/>
-              <a:buChar char="n"/>
-              <a:defRPr sz="3200">
-                <a:solidFill>
-                  <a:schemeClr val="tx1"/>
-                </a:solidFill>
-                <a:latin typeface="Tahoma" charset="0"/>
-              </a:defRPr>
-            </a:lvl1pPr>
-            <a:lvl2pPr marL="742950" indent="-285750">
-              <a:spcBef>
-                <a:spcPct val="20000"/>
-              </a:spcBef>
-              <a:buClr>
-                <a:schemeClr val="hlink"/>
-              </a:buClr>
-              <a:buSzPct val="55000"/>
-              <a:buFont typeface="Wingdings" charset="2"/>
-              <a:buChar char="n"/>
-              <a:defRPr sz="2800">
-                <a:solidFill>
-                  <a:schemeClr val="tx1"/>
-                </a:solidFill>
-                <a:latin typeface="Tahoma" charset="0"/>
-              </a:defRPr>
-            </a:lvl2pPr>
-            <a:lvl3pPr marL="1143000" indent="-228600">
-              <a:spcBef>
-                <a:spcPct val="20000"/>
-              </a:spcBef>
-              <a:buClr>
-                <a:schemeClr val="folHlink"/>
-              </a:buClr>
-              <a:buSzPct val="50000"/>
-              <a:buFont typeface="Wingdings" charset="2"/>
-              <a:buChar char="n"/>
-              <a:defRPr sz="2400">
-                <a:solidFill>
-                  <a:schemeClr val="tx1"/>
-                </a:solidFill>
-                <a:latin typeface="Tahoma" charset="0"/>
-              </a:defRPr>
-            </a:lvl3pPr>
-            <a:lvl4pPr marL="1600200" indent="-228600">
-              <a:spcBef>
-                <a:spcPct val="20000"/>
-              </a:spcBef>
-              <a:buClr>
-                <a:schemeClr val="accent2"/>
-              </a:buClr>
-              <a:buSzPct val="55000"/>
-              <a:buFont typeface="Wingdings" charset="2"/>
-              <a:buChar char="n"/>
-              <a:defRPr sz="2000">
-                <a:solidFill>
-                  <a:schemeClr val="tx1"/>
-                </a:solidFill>
-                <a:latin typeface="Tahoma" charset="0"/>
-              </a:defRPr>
-            </a:lvl4pPr>
-            <a:lvl5pPr marL="2057400" indent="-228600">
-              <a:spcBef>
-                <a:spcPct val="20000"/>
-              </a:spcBef>
-              <a:buClr>
-                <a:schemeClr val="accent1"/>
-              </a:buClr>
-              <a:buSzPct val="50000"/>
-              <a:buFont typeface="Wingdings" charset="2"/>
-              <a:buChar char="n"/>
-              <a:defRPr sz="2000">
-                <a:solidFill>
-                  <a:schemeClr val="tx1"/>
-                </a:solidFill>
-                <a:latin typeface="Tahoma" charset="0"/>
-              </a:defRPr>
-            </a:lvl5pPr>
-            <a:lvl6pPr marL="2514600" indent="-228600" eaLnBrk="0" fontAlgn="base" hangingPunct="0">
-              <a:spcBef>
-                <a:spcPct val="20000"/>
-              </a:spcBef>
-              <a:spcAft>
-                <a:spcPct val="0"/>
-              </a:spcAft>
-              <a:buClr>
-                <a:schemeClr val="accent1"/>
-              </a:buClr>
-              <a:buSzPct val="50000"/>
-              <a:buFont typeface="Wingdings" charset="2"/>
-              <a:buChar char="n"/>
-              <a:defRPr sz="2000">
-                <a:solidFill>
-                  <a:schemeClr val="tx1"/>
-                </a:solidFill>
-                <a:latin typeface="Tahoma" charset="0"/>
-              </a:defRPr>
-            </a:lvl6pPr>
-            <a:lvl7pPr marL="2971800" indent="-228600" eaLnBrk="0" fontAlgn="base" hangingPunct="0">
-              <a:spcBef>
-                <a:spcPct val="20000"/>
-              </a:spcBef>
-              <a:spcAft>
-                <a:spcPct val="0"/>
-              </a:spcAft>
-              <a:buClr>
-                <a:schemeClr val="accent1"/>
-              </a:buClr>
-              <a:buSzPct val="50000"/>
-              <a:buFont typeface="Wingdings" charset="2"/>
-              <a:buChar char="n"/>
-              <a:defRPr sz="2000">
-                <a:solidFill>
-                  <a:schemeClr val="tx1"/>
-                </a:solidFill>
-                <a:latin typeface="Tahoma" charset="0"/>
-              </a:defRPr>
-            </a:lvl7pPr>
-            <a:lvl8pPr marL="3429000" indent="-228600" eaLnBrk="0" fontAlgn="base" hangingPunct="0">
-              <a:spcBef>
-                <a:spcPct val="20000"/>
-              </a:spcBef>
-              <a:spcAft>
-                <a:spcPct val="0"/>
-              </a:spcAft>
-              <a:buClr>
-                <a:schemeClr val="accent1"/>
-              </a:buClr>
-              <a:buSzPct val="50000"/>
-              <a:buFont typeface="Wingdings" charset="2"/>
-              <a:buChar char="n"/>
-              <a:defRPr sz="2000">
-                <a:solidFill>
-                  <a:schemeClr val="tx1"/>
-                </a:solidFill>
-                <a:latin typeface="Tahoma" charset="0"/>
-              </a:defRPr>
-            </a:lvl8pPr>
-            <a:lvl9pPr marL="3886200" indent="-228600" eaLnBrk="0" fontAlgn="base" hangingPunct="0">
-              <a:spcBef>
-                <a:spcPct val="20000"/>
-              </a:spcBef>
-              <a:spcAft>
-                <a:spcPct val="0"/>
-              </a:spcAft>
-              <a:buClr>
-                <a:schemeClr val="accent1"/>
-              </a:buClr>
-              <a:buSzPct val="50000"/>
-              <a:buFont typeface="Wingdings" charset="2"/>
-              <a:buChar char="n"/>
-              <a:defRPr sz="2000">
-                <a:solidFill>
-                  <a:schemeClr val="tx1"/>
-                </a:solidFill>
-                <a:latin typeface="Tahoma" charset="0"/>
-              </a:defRPr>
-            </a:lvl9pPr>
-          </a:lstStyle>
-          <a:p>
-            <a:pPr algn="ctr" eaLnBrk="1" hangingPunct="1">
-              <a:spcBef>
-                <a:spcPct val="0"/>
-              </a:spcBef>
-              <a:buClrTx/>
-              <a:buSzTx/>
-              <a:buFontTx/>
-              <a:buNone/>
-            </a:pPr>
-            <a:endParaRPr lang="en-US" altLang="en-US"/>
-          </a:p>
-        </p:txBody>
-      </p:sp>
-      <p:sp>
-        <p:nvSpPr>
-          <p:cNvPr id="10" name="Rectangle 9"/>
-          <p:cNvSpPr>
-            <a:spLocks noChangeArrowheads="1"/>
-          </p:cNvSpPr>
-          <p:nvPr/>
-        </p:nvSpPr>
-        <p:spPr bwMode="auto">
-          <a:xfrm>
-            <a:off x="6553200" y="3352800"/>
-            <a:ext cx="914400" cy="381000"/>
-          </a:xfrm>
-          <a:prstGeom prst="rect">
-            <a:avLst/>
-          </a:prstGeom>
-          <a:noFill/>
-          <a:ln w="57150">
-            <a:solidFill>
-              <a:srgbClr val="D32128"/>
-            </a:solidFill>
-            <a:round/>
-            <a:headEnd/>
-            <a:tailEnd type="triangle" w="med" len="med"/>
-          </a:ln>
-          <a:effectLst/>
-          <a:extLst>
-            <a:ext uri="{909E8E84-426E-40DD-AFC4-6F175D3DCCD1}">
-              <a14:hiddenFill xmlns:a14="http://schemas.microsoft.com/office/drawing/2010/main">
-                <a:solidFill>
-                  <a:srgbClr val="FFFFFF"/>
-                </a:solidFill>
-              </a14:hiddenFill>
-            </a:ext>
-            <a:ext uri="{AF507438-7753-43E0-B8FC-AC1667EBCBE1}">
-              <a14:hiddenEffects xmlns:a14="http://schemas.microsoft.com/office/drawing/2010/main">
-                <a:effectLst>
-                  <a:outerShdw dist="35921" dir="2700000" algn="ctr" rotWithShape="0">
-                    <a:schemeClr val="bg2"/>
-                  </a:outerShdw>
-                </a:effectLst>
-              </a14:hiddenEffects>
-            </a:ext>
-          </a:extLst>
-        </p:spPr>
-        <p:txBody>
-          <a:bodyPr wrap="none"/>
-          <a:lstStyle>
-            <a:lvl1pPr>
-              <a:spcBef>
-                <a:spcPct val="20000"/>
-              </a:spcBef>
-              <a:buClr>
-                <a:schemeClr val="folHlink"/>
-              </a:buClr>
-              <a:buSzPct val="60000"/>
-              <a:buFont typeface="Wingdings" charset="2"/>
-              <a:buChar char="n"/>
-              <a:defRPr sz="3200">
-                <a:solidFill>
-                  <a:schemeClr val="tx1"/>
-                </a:solidFill>
-                <a:latin typeface="Tahoma" charset="0"/>
-              </a:defRPr>
-            </a:lvl1pPr>
-            <a:lvl2pPr marL="742950" indent="-285750">
-              <a:spcBef>
-                <a:spcPct val="20000"/>
-              </a:spcBef>
-              <a:buClr>
-                <a:schemeClr val="hlink"/>
-              </a:buClr>
-              <a:buSzPct val="55000"/>
-              <a:buFont typeface="Wingdings" charset="2"/>
-              <a:buChar char="n"/>
-              <a:defRPr sz="2800">
-                <a:solidFill>
-                  <a:schemeClr val="tx1"/>
-                </a:solidFill>
-                <a:latin typeface="Tahoma" charset="0"/>
-              </a:defRPr>
-            </a:lvl2pPr>
-            <a:lvl3pPr marL="1143000" indent="-228600">
-              <a:spcBef>
-                <a:spcPct val="20000"/>
-              </a:spcBef>
-              <a:buClr>
-                <a:schemeClr val="folHlink"/>
-              </a:buClr>
-              <a:buSzPct val="50000"/>
-              <a:buFont typeface="Wingdings" charset="2"/>
-              <a:buChar char="n"/>
-              <a:defRPr sz="2400">
-                <a:solidFill>
-                  <a:schemeClr val="tx1"/>
-                </a:solidFill>
-                <a:latin typeface="Tahoma" charset="0"/>
-              </a:defRPr>
-            </a:lvl3pPr>
-            <a:lvl4pPr marL="1600200" indent="-228600">
-              <a:spcBef>
-                <a:spcPct val="20000"/>
-              </a:spcBef>
-              <a:buClr>
-                <a:schemeClr val="accent2"/>
-              </a:buClr>
-              <a:buSzPct val="55000"/>
-              <a:buFont typeface="Wingdings" charset="2"/>
-              <a:buChar char="n"/>
-              <a:defRPr sz="2000">
-                <a:solidFill>
-                  <a:schemeClr val="tx1"/>
-                </a:solidFill>
-                <a:latin typeface="Tahoma" charset="0"/>
-              </a:defRPr>
-            </a:lvl4pPr>
-            <a:lvl5pPr marL="2057400" indent="-228600">
-              <a:spcBef>
-                <a:spcPct val="20000"/>
-              </a:spcBef>
-              <a:buClr>
-                <a:schemeClr val="accent1"/>
-              </a:buClr>
-              <a:buSzPct val="50000"/>
-              <a:buFont typeface="Wingdings" charset="2"/>
-              <a:buChar char="n"/>
-              <a:defRPr sz="2000">
-                <a:solidFill>
-                  <a:schemeClr val="tx1"/>
-                </a:solidFill>
-                <a:latin typeface="Tahoma" charset="0"/>
-              </a:defRPr>
-            </a:lvl5pPr>
-            <a:lvl6pPr marL="2514600" indent="-228600" eaLnBrk="0" fontAlgn="base" hangingPunct="0">
-              <a:spcBef>
-                <a:spcPct val="20000"/>
-              </a:spcBef>
-              <a:spcAft>
-                <a:spcPct val="0"/>
-              </a:spcAft>
-              <a:buClr>
-                <a:schemeClr val="accent1"/>
-              </a:buClr>
-              <a:buSzPct val="50000"/>
-              <a:buFont typeface="Wingdings" charset="2"/>
-              <a:buChar char="n"/>
-              <a:defRPr sz="2000">
-                <a:solidFill>
-                  <a:schemeClr val="tx1"/>
-                </a:solidFill>
-                <a:latin typeface="Tahoma" charset="0"/>
-              </a:defRPr>
-            </a:lvl6pPr>
-            <a:lvl7pPr marL="2971800" indent="-228600" eaLnBrk="0" fontAlgn="base" hangingPunct="0">
-              <a:spcBef>
-                <a:spcPct val="20000"/>
-              </a:spcBef>
-              <a:spcAft>
-                <a:spcPct val="0"/>
-              </a:spcAft>
-              <a:buClr>
-                <a:schemeClr val="accent1"/>
-              </a:buClr>
-              <a:buSzPct val="50000"/>
-              <a:buFont typeface="Wingdings" charset="2"/>
-              <a:buChar char="n"/>
-              <a:defRPr sz="2000">
-                <a:solidFill>
-                  <a:schemeClr val="tx1"/>
-                </a:solidFill>
-                <a:latin typeface="Tahoma" charset="0"/>
-              </a:defRPr>
-            </a:lvl7pPr>
-            <a:lvl8pPr marL="3429000" indent="-228600" eaLnBrk="0" fontAlgn="base" hangingPunct="0">
-              <a:spcBef>
-                <a:spcPct val="20000"/>
-              </a:spcBef>
-              <a:spcAft>
-                <a:spcPct val="0"/>
-              </a:spcAft>
-              <a:buClr>
-                <a:schemeClr val="accent1"/>
-              </a:buClr>
-              <a:buSzPct val="50000"/>
-              <a:buFont typeface="Wingdings" charset="2"/>
-              <a:buChar char="n"/>
-              <a:defRPr sz="2000">
-                <a:solidFill>
-                  <a:schemeClr val="tx1"/>
-                </a:solidFill>
-                <a:latin typeface="Tahoma" charset="0"/>
-              </a:defRPr>
-            </a:lvl8pPr>
-            <a:lvl9pPr marL="3886200" indent="-228600" eaLnBrk="0" fontAlgn="base" hangingPunct="0">
-              <a:spcBef>
-                <a:spcPct val="20000"/>
-              </a:spcBef>
-              <a:spcAft>
-                <a:spcPct val="0"/>
-              </a:spcAft>
-              <a:buClr>
-                <a:schemeClr val="accent1"/>
-              </a:buClr>
-              <a:buSzPct val="50000"/>
-              <a:buFont typeface="Wingdings" charset="2"/>
-              <a:buChar char="n"/>
-              <a:defRPr sz="2000">
-                <a:solidFill>
-                  <a:schemeClr val="tx1"/>
-                </a:solidFill>
-                <a:latin typeface="Tahoma" charset="0"/>
-              </a:defRPr>
-            </a:lvl9pPr>
-          </a:lstStyle>
-          <a:p>
-            <a:pPr algn="ctr" eaLnBrk="1" hangingPunct="1">
-              <a:spcBef>
-                <a:spcPct val="0"/>
-              </a:spcBef>
-              <a:buClrTx/>
-              <a:buSzTx/>
-              <a:buFontTx/>
-              <a:buNone/>
-            </a:pPr>
-            <a:endParaRPr lang="en-US" altLang="en-US"/>
-          </a:p>
-        </p:txBody>
-      </p:sp>
-      <p:sp>
-        <p:nvSpPr>
-          <p:cNvPr id="11" name="Rectangle 10"/>
-          <p:cNvSpPr>
-            <a:spLocks noChangeArrowheads="1"/>
-          </p:cNvSpPr>
-          <p:nvPr/>
-        </p:nvSpPr>
-        <p:spPr bwMode="auto">
-          <a:xfrm>
-            <a:off x="7696200" y="3962400"/>
-            <a:ext cx="2209800" cy="381000"/>
-          </a:xfrm>
-          <a:prstGeom prst="rect">
-            <a:avLst/>
-          </a:prstGeom>
-          <a:noFill/>
-          <a:ln w="57150">
-            <a:solidFill>
-              <a:srgbClr val="D32128"/>
-            </a:solidFill>
-            <a:round/>
-            <a:headEnd/>
-            <a:tailEnd type="triangle" w="med" len="med"/>
-          </a:ln>
-          <a:effectLst/>
-          <a:extLst>
-            <a:ext uri="{909E8E84-426E-40DD-AFC4-6F175D3DCCD1}">
-              <a14:hiddenFill xmlns:a14="http://schemas.microsoft.com/office/drawing/2010/main">
-                <a:solidFill>
-                  <a:srgbClr val="FFFFFF"/>
-                </a:solidFill>
-              </a14:hiddenFill>
-            </a:ext>
-            <a:ext uri="{AF507438-7753-43E0-B8FC-AC1667EBCBE1}">
-              <a14:hiddenEffects xmlns:a14="http://schemas.microsoft.com/office/drawing/2010/main">
-                <a:effectLst>
-                  <a:outerShdw dist="35921" dir="2700000" algn="ctr" rotWithShape="0">
-                    <a:schemeClr val="bg2"/>
-                  </a:outerShdw>
-                </a:effectLst>
-              </a14:hiddenEffects>
-            </a:ext>
-          </a:extLst>
-        </p:spPr>
-        <p:txBody>
-          <a:bodyPr wrap="none"/>
-          <a:lstStyle>
-            <a:lvl1pPr>
-              <a:spcBef>
-                <a:spcPct val="20000"/>
-              </a:spcBef>
-              <a:buClr>
-                <a:schemeClr val="folHlink"/>
-              </a:buClr>
-              <a:buSzPct val="60000"/>
-              <a:buFont typeface="Wingdings" charset="2"/>
-              <a:buChar char="n"/>
-              <a:defRPr sz="3200">
-                <a:solidFill>
-                  <a:schemeClr val="tx1"/>
-                </a:solidFill>
-                <a:latin typeface="Tahoma" charset="0"/>
-              </a:defRPr>
-            </a:lvl1pPr>
-            <a:lvl2pPr marL="742950" indent="-285750">
-              <a:spcBef>
-                <a:spcPct val="20000"/>
-              </a:spcBef>
-              <a:buClr>
-                <a:schemeClr val="hlink"/>
-              </a:buClr>
-              <a:buSzPct val="55000"/>
-              <a:buFont typeface="Wingdings" charset="2"/>
-              <a:buChar char="n"/>
-              <a:defRPr sz="2800">
-                <a:solidFill>
-                  <a:schemeClr val="tx1"/>
-                </a:solidFill>
-                <a:latin typeface="Tahoma" charset="0"/>
-              </a:defRPr>
-            </a:lvl2pPr>
-            <a:lvl3pPr marL="1143000" indent="-228600">
-              <a:spcBef>
-                <a:spcPct val="20000"/>
-              </a:spcBef>
-              <a:buClr>
-                <a:schemeClr val="folHlink"/>
-              </a:buClr>
-              <a:buSzPct val="50000"/>
-              <a:buFont typeface="Wingdings" charset="2"/>
-              <a:buChar char="n"/>
-              <a:defRPr sz="2400">
-                <a:solidFill>
-                  <a:schemeClr val="tx1"/>
-                </a:solidFill>
-                <a:latin typeface="Tahoma" charset="0"/>
-              </a:defRPr>
-            </a:lvl3pPr>
-            <a:lvl4pPr marL="1600200" indent="-228600">
-              <a:spcBef>
-                <a:spcPct val="20000"/>
-              </a:spcBef>
-              <a:buClr>
-                <a:schemeClr val="accent2"/>
-              </a:buClr>
-              <a:buSzPct val="55000"/>
-              <a:buFont typeface="Wingdings" charset="2"/>
-              <a:buChar char="n"/>
-              <a:defRPr sz="2000">
-                <a:solidFill>
-                  <a:schemeClr val="tx1"/>
-                </a:solidFill>
-                <a:latin typeface="Tahoma" charset="0"/>
-              </a:defRPr>
-            </a:lvl4pPr>
-            <a:lvl5pPr marL="2057400" indent="-228600">
-              <a:spcBef>
-                <a:spcPct val="20000"/>
-              </a:spcBef>
-              <a:buClr>
-                <a:schemeClr val="accent1"/>
-              </a:buClr>
-              <a:buSzPct val="50000"/>
-              <a:buFont typeface="Wingdings" charset="2"/>
-              <a:buChar char="n"/>
-              <a:defRPr sz="2000">
-                <a:solidFill>
-                  <a:schemeClr val="tx1"/>
-                </a:solidFill>
-                <a:latin typeface="Tahoma" charset="0"/>
-              </a:defRPr>
-            </a:lvl5pPr>
-            <a:lvl6pPr marL="2514600" indent="-228600" eaLnBrk="0" fontAlgn="base" hangingPunct="0">
-              <a:spcBef>
-                <a:spcPct val="20000"/>
-              </a:spcBef>
-              <a:spcAft>
-                <a:spcPct val="0"/>
-              </a:spcAft>
-              <a:buClr>
-                <a:schemeClr val="accent1"/>
-              </a:buClr>
-              <a:buSzPct val="50000"/>
-              <a:buFont typeface="Wingdings" charset="2"/>
-              <a:buChar char="n"/>
-              <a:defRPr sz="2000">
-                <a:solidFill>
-                  <a:schemeClr val="tx1"/>
-                </a:solidFill>
-                <a:latin typeface="Tahoma" charset="0"/>
-              </a:defRPr>
-            </a:lvl6pPr>
-            <a:lvl7pPr marL="2971800" indent="-228600" eaLnBrk="0" fontAlgn="base" hangingPunct="0">
-              <a:spcBef>
-                <a:spcPct val="20000"/>
-              </a:spcBef>
-              <a:spcAft>
-                <a:spcPct val="0"/>
-              </a:spcAft>
-              <a:buClr>
-                <a:schemeClr val="accent1"/>
-              </a:buClr>
-              <a:buSzPct val="50000"/>
-              <a:buFont typeface="Wingdings" charset="2"/>
-              <a:buChar char="n"/>
-              <a:defRPr sz="2000">
-                <a:solidFill>
-                  <a:schemeClr val="tx1"/>
-                </a:solidFill>
-                <a:latin typeface="Tahoma" charset="0"/>
-              </a:defRPr>
-            </a:lvl7pPr>
-            <a:lvl8pPr marL="3429000" indent="-228600" eaLnBrk="0" fontAlgn="base" hangingPunct="0">
-              <a:spcBef>
-                <a:spcPct val="20000"/>
-              </a:spcBef>
-              <a:spcAft>
-                <a:spcPct val="0"/>
-              </a:spcAft>
-              <a:buClr>
-                <a:schemeClr val="accent1"/>
-              </a:buClr>
-              <a:buSzPct val="50000"/>
-              <a:buFont typeface="Wingdings" charset="2"/>
-              <a:buChar char="n"/>
-              <a:defRPr sz="2000">
-                <a:solidFill>
-                  <a:schemeClr val="tx1"/>
-                </a:solidFill>
-                <a:latin typeface="Tahoma" charset="0"/>
-              </a:defRPr>
-            </a:lvl8pPr>
-            <a:lvl9pPr marL="3886200" indent="-228600" eaLnBrk="0" fontAlgn="base" hangingPunct="0">
-              <a:spcBef>
-                <a:spcPct val="20000"/>
-              </a:spcBef>
-              <a:spcAft>
-                <a:spcPct val="0"/>
-              </a:spcAft>
-              <a:buClr>
-                <a:schemeClr val="accent1"/>
-              </a:buClr>
-              <a:buSzPct val="50000"/>
-              <a:buFont typeface="Wingdings" charset="2"/>
-              <a:buChar char="n"/>
-              <a:defRPr sz="2000">
-                <a:solidFill>
-                  <a:schemeClr val="tx1"/>
-                </a:solidFill>
-                <a:latin typeface="Tahoma" charset="0"/>
-              </a:defRPr>
-            </a:lvl9pPr>
-          </a:lstStyle>
-          <a:p>
-            <a:pPr algn="ctr" eaLnBrk="1" hangingPunct="1">
-              <a:spcBef>
-                <a:spcPct val="0"/>
-              </a:spcBef>
-              <a:buClrTx/>
-              <a:buSzTx/>
-              <a:buFontTx/>
-              <a:buNone/>
-            </a:pPr>
-            <a:endParaRPr lang="en-US" altLang="en-US"/>
-          </a:p>
-        </p:txBody>
-      </p:sp>
-      <p:sp>
-        <p:nvSpPr>
-          <p:cNvPr id="12" name="Rectangle 11"/>
-          <p:cNvSpPr>
-            <a:spLocks noChangeArrowheads="1"/>
-          </p:cNvSpPr>
-          <p:nvPr/>
-        </p:nvSpPr>
-        <p:spPr bwMode="auto">
-          <a:xfrm>
-            <a:off x="5715000" y="2971800"/>
-            <a:ext cx="609600" cy="1143000"/>
-          </a:xfrm>
-          <a:prstGeom prst="rect">
-            <a:avLst/>
-          </a:prstGeom>
-          <a:noFill/>
-          <a:ln w="57150">
-            <a:solidFill>
-              <a:srgbClr val="D32128"/>
-            </a:solidFill>
-            <a:round/>
-            <a:headEnd/>
-            <a:tailEnd type="triangle" w="med" len="med"/>
-          </a:ln>
-          <a:effectLst/>
-          <a:extLst>
-            <a:ext uri="{909E8E84-426E-40DD-AFC4-6F175D3DCCD1}">
-              <a14:hiddenFill xmlns:a14="http://schemas.microsoft.com/office/drawing/2010/main">
-                <a:solidFill>
-                  <a:srgbClr val="FFFFFF"/>
-                </a:solidFill>
-              </a14:hiddenFill>
-            </a:ext>
-            <a:ext uri="{AF507438-7753-43E0-B8FC-AC1667EBCBE1}">
-              <a14:hiddenEffects xmlns:a14="http://schemas.microsoft.com/office/drawing/2010/main">
-                <a:effectLst>
-                  <a:outerShdw dist="35921" dir="2700000" algn="ctr" rotWithShape="0">
-                    <a:schemeClr val="bg2"/>
-                  </a:outerShdw>
-                </a:effectLst>
-              </a14:hiddenEffects>
-            </a:ext>
-          </a:extLst>
-        </p:spPr>
-        <p:txBody>
-          <a:bodyPr wrap="none"/>
-          <a:lstStyle>
-            <a:lvl1pPr>
-              <a:spcBef>
-                <a:spcPct val="20000"/>
-              </a:spcBef>
-              <a:buClr>
-                <a:schemeClr val="folHlink"/>
-              </a:buClr>
-              <a:buSzPct val="60000"/>
-              <a:buFont typeface="Wingdings" charset="2"/>
-              <a:buChar char="n"/>
-              <a:defRPr sz="3200">
-                <a:solidFill>
-                  <a:schemeClr val="tx1"/>
-                </a:solidFill>
-                <a:latin typeface="Tahoma" charset="0"/>
-              </a:defRPr>
-            </a:lvl1pPr>
-            <a:lvl2pPr marL="742950" indent="-285750">
-              <a:spcBef>
-                <a:spcPct val="20000"/>
-              </a:spcBef>
-              <a:buClr>
-                <a:schemeClr val="hlink"/>
-              </a:buClr>
-              <a:buSzPct val="55000"/>
-              <a:buFont typeface="Wingdings" charset="2"/>
-              <a:buChar char="n"/>
-              <a:defRPr sz="2800">
-                <a:solidFill>
-                  <a:schemeClr val="tx1"/>
-                </a:solidFill>
-                <a:latin typeface="Tahoma" charset="0"/>
-              </a:defRPr>
-            </a:lvl2pPr>
-            <a:lvl3pPr marL="1143000" indent="-228600">
-              <a:spcBef>
-                <a:spcPct val="20000"/>
-              </a:spcBef>
-              <a:buClr>
-                <a:schemeClr val="folHlink"/>
-              </a:buClr>
-              <a:buSzPct val="50000"/>
-              <a:buFont typeface="Wingdings" charset="2"/>
-              <a:buChar char="n"/>
-              <a:defRPr sz="2400">
-                <a:solidFill>
-                  <a:schemeClr val="tx1"/>
-                </a:solidFill>
-                <a:latin typeface="Tahoma" charset="0"/>
-              </a:defRPr>
-            </a:lvl3pPr>
-            <a:lvl4pPr marL="1600200" indent="-228600">
-              <a:spcBef>
-                <a:spcPct val="20000"/>
-              </a:spcBef>
-              <a:buClr>
-                <a:schemeClr val="accent2"/>
-              </a:buClr>
-              <a:buSzPct val="55000"/>
-              <a:buFont typeface="Wingdings" charset="2"/>
-              <a:buChar char="n"/>
-              <a:defRPr sz="2000">
-                <a:solidFill>
-                  <a:schemeClr val="tx1"/>
-                </a:solidFill>
-                <a:latin typeface="Tahoma" charset="0"/>
-              </a:defRPr>
-            </a:lvl4pPr>
-            <a:lvl5pPr marL="2057400" indent="-228600">
-              <a:spcBef>
-                <a:spcPct val="20000"/>
-              </a:spcBef>
-              <a:buClr>
-                <a:schemeClr val="accent1"/>
-              </a:buClr>
-              <a:buSzPct val="50000"/>
-              <a:buFont typeface="Wingdings" charset="2"/>
-              <a:buChar char="n"/>
-              <a:defRPr sz="2000">
-                <a:solidFill>
-                  <a:schemeClr val="tx1"/>
-                </a:solidFill>
-                <a:latin typeface="Tahoma" charset="0"/>
-              </a:defRPr>
-            </a:lvl5pPr>
-            <a:lvl6pPr marL="2514600" indent="-228600" eaLnBrk="0" fontAlgn="base" hangingPunct="0">
-              <a:spcBef>
-                <a:spcPct val="20000"/>
-              </a:spcBef>
-              <a:spcAft>
-                <a:spcPct val="0"/>
-              </a:spcAft>
-              <a:buClr>
-                <a:schemeClr val="accent1"/>
-              </a:buClr>
-              <a:buSzPct val="50000"/>
-              <a:buFont typeface="Wingdings" charset="2"/>
-              <a:buChar char="n"/>
-              <a:defRPr sz="2000">
-                <a:solidFill>
-                  <a:schemeClr val="tx1"/>
-                </a:solidFill>
-                <a:latin typeface="Tahoma" charset="0"/>
-              </a:defRPr>
-            </a:lvl6pPr>
-            <a:lvl7pPr marL="2971800" indent="-228600" eaLnBrk="0" fontAlgn="base" hangingPunct="0">
-              <a:spcBef>
-                <a:spcPct val="20000"/>
-              </a:spcBef>
-              <a:spcAft>
-                <a:spcPct val="0"/>
-              </a:spcAft>
-              <a:buClr>
-                <a:schemeClr val="accent1"/>
-              </a:buClr>
-              <a:buSzPct val="50000"/>
-              <a:buFont typeface="Wingdings" charset="2"/>
-              <a:buChar char="n"/>
-              <a:defRPr sz="2000">
-                <a:solidFill>
-                  <a:schemeClr val="tx1"/>
-                </a:solidFill>
-                <a:latin typeface="Tahoma" charset="0"/>
-              </a:defRPr>
-            </a:lvl7pPr>
-            <a:lvl8pPr marL="3429000" indent="-228600" eaLnBrk="0" fontAlgn="base" hangingPunct="0">
-              <a:spcBef>
-                <a:spcPct val="20000"/>
-              </a:spcBef>
-              <a:spcAft>
-                <a:spcPct val="0"/>
-              </a:spcAft>
-              <a:buClr>
-                <a:schemeClr val="accent1"/>
-              </a:buClr>
-              <a:buSzPct val="50000"/>
-              <a:buFont typeface="Wingdings" charset="2"/>
-              <a:buChar char="n"/>
-              <a:defRPr sz="2000">
-                <a:solidFill>
-                  <a:schemeClr val="tx1"/>
-                </a:solidFill>
-                <a:latin typeface="Tahoma" charset="0"/>
-              </a:defRPr>
-            </a:lvl8pPr>
-            <a:lvl9pPr marL="3886200" indent="-228600" eaLnBrk="0" fontAlgn="base" hangingPunct="0">
-              <a:spcBef>
-                <a:spcPct val="20000"/>
-              </a:spcBef>
-              <a:spcAft>
-                <a:spcPct val="0"/>
-              </a:spcAft>
-              <a:buClr>
-                <a:schemeClr val="accent1"/>
-              </a:buClr>
-              <a:buSzPct val="50000"/>
-              <a:buFont typeface="Wingdings" charset="2"/>
-              <a:buChar char="n"/>
-              <a:defRPr sz="2000">
-                <a:solidFill>
-                  <a:schemeClr val="tx1"/>
-                </a:solidFill>
-                <a:latin typeface="Tahoma" charset="0"/>
-              </a:defRPr>
-            </a:lvl9pPr>
-          </a:lstStyle>
-          <a:p>
-            <a:pPr algn="ctr" eaLnBrk="1" hangingPunct="1">
-              <a:spcBef>
-                <a:spcPct val="0"/>
-              </a:spcBef>
-              <a:buClrTx/>
-              <a:buSzTx/>
-              <a:buFontTx/>
-              <a:buNone/>
-            </a:pPr>
-            <a:endParaRPr lang="en-US" altLang="en-US"/>
-          </a:p>
-        </p:txBody>
-      </p:sp>
-      <p:sp>
-        <p:nvSpPr>
           <p:cNvPr id="129036" name="TextBox 12"/>
           <p:cNvSpPr txBox="1">
             <a:spLocks noChangeArrowheads="1"/>
@@ -41200,7 +39435,7 @@
         </p:nvSpPr>
         <p:spPr bwMode="auto">
           <a:xfrm>
-            <a:off x="3802063" y="4725988"/>
+            <a:off x="3440556" y="4752976"/>
             <a:ext cx="4506912" cy="461962"/>
           </a:xfrm>
           <a:prstGeom prst="rect">
@@ -41412,7 +39647,7 @@
               <a:buNone/>
             </a:pPr>
             <a:r>
-              <a:rPr lang="en-US" altLang="en-US" sz="2400"/>
+              <a:rPr lang="en-US" altLang="en-US" sz="2400" dirty="0"/>
               <a:t>This is just a weighted average!</a:t>
             </a:r>
           </a:p>
@@ -41426,8 +39661,8 @@
         </p:nvSpPr>
         <p:spPr>
           <a:xfrm>
-            <a:off x="5105400" y="2971800"/>
-            <a:ext cx="2362200" cy="1085850"/>
+            <a:off x="4444409" y="3330059"/>
+            <a:ext cx="2184991" cy="369332"/>
           </a:xfrm>
           <a:prstGeom prst="rect">
             <a:avLst/>
@@ -41435,55 +39670,73 @@
           <a:noFill/>
         </p:spPr>
         <p:txBody>
-          <a:bodyPr wrap="square" anchor="ctr" lIns="0" rIns="0" tIns="0" bIns="0">
+          <a:bodyPr wrap="square" lIns="0" tIns="0" rIns="0" bIns="0" anchor="ctr">
             <a:spAutoFit/>
           </a:bodyPr>
           <a:lstStyle/>
           <a:p>
             <a:r>
-              <a:rPr sz="1800">
+              <a:rPr sz="2400" dirty="0" err="1">
                 <a:latin typeface="Cambria"/>
               </a:rPr>
-              <a:t>μ = Σ</a:t>
-            </a:r>
-            <a:r>
-              <a:rPr sz="1800" baseline="-25000">
+              <a:t>μ</a:t>
+            </a:r>
+            <a:r>
+              <a:rPr sz="2400" dirty="0">
                 <a:latin typeface="Cambria"/>
               </a:rPr>
-              <a:t>i=1</a:t>
-            </a:r>
-            <a:r>
-              <a:rPr sz="1800" baseline="30000">
+              <a:t> = </a:t>
+            </a:r>
+            <a:r>
+              <a:rPr sz="2400" dirty="0" err="1">
+                <a:latin typeface="Cambria"/>
+              </a:rPr>
+              <a:t>Σ</a:t>
+            </a:r>
+            <a:r>
+              <a:rPr sz="2400" baseline="-25000" dirty="0" err="1">
+                <a:latin typeface="Cambria"/>
+              </a:rPr>
+              <a:t>i</a:t>
+            </a:r>
+            <a:r>
+              <a:rPr sz="2400" baseline="-25000" dirty="0">
+                <a:latin typeface="Cambria"/>
+              </a:rPr>
+              <a:t>=1</a:t>
+            </a:r>
+            <a:r>
+              <a:rPr sz="2400" baseline="30000" dirty="0">
                 <a:latin typeface="Cambria"/>
               </a:rPr>
               <a:t>N</a:t>
             </a:r>
             <a:r>
-              <a:rPr sz="1800">
+              <a:rPr sz="2400" dirty="0">
                 <a:latin typeface="Cambria"/>
               </a:rPr>
               <a:t> x</a:t>
             </a:r>
             <a:r>
-              <a:rPr sz="1800" baseline="-25000">
+              <a:rPr sz="2400" baseline="-25000" dirty="0">
                 <a:latin typeface="Cambria"/>
               </a:rPr>
               <a:t>i</a:t>
             </a:r>
             <a:r>
-              <a:rPr sz="1800">
+              <a:rPr sz="2400" dirty="0">
                 <a:latin typeface="Cambria"/>
               </a:rPr>
               <a:t> P(x</a:t>
             </a:r>
             <a:r>
-              <a:rPr sz="1800" baseline="-25000">
+              <a:rPr sz="2400" baseline="-25000" dirty="0">
                 <a:latin typeface="Cambria"/>
               </a:rPr>
               <a:t>i</a:t>
             </a:r>
             <a:r>
-              <a:rPr sz="1800">
+              <a:rPr sz="2400" dirty="0">
                 <a:latin typeface="Cambria"/>
               </a:rPr>
               <a:t>)</a:t>
@@ -41501,372 +39754,6 @@
   <p:clrMapOvr>
     <a:masterClrMapping/>
   </p:clrMapOvr>
-  <p:timing>
-    <p:tnLst>
-      <p:par>
-        <p:cTn id="1" dur="indefinite" restart="never" nodeType="tmRoot">
-          <p:childTnLst>
-            <p:seq concurrent="1" nextAc="seek">
-              <p:cTn id="2" dur="indefinite" nodeType="mainSeq">
-                <p:childTnLst>
-                  <p:par>
-                    <p:cTn id="3" fill="hold" nodeType="clickPar">
-                      <p:stCondLst>
-                        <p:cond delay="indefinite"/>
-                      </p:stCondLst>
-                      <p:childTnLst>
-                        <p:par>
-                          <p:cTn id="4" fill="hold" nodeType="withGroup">
-                            <p:stCondLst>
-                              <p:cond delay="0"/>
-                            </p:stCondLst>
-                            <p:childTnLst>
-                              <p:par>
-                                <p:cTn id="5" presetID="1" presetClass="entr" presetSubtype="0" fill="hold" grpId="0" nodeType="clickEffect">
-                                  <p:stCondLst>
-                                    <p:cond delay="0"/>
-                                  </p:stCondLst>
-                                  <p:childTnLst>
-                                    <p:set>
-                                      <p:cBhvr>
-                                        <p:cTn id="6" dur="1" fill="hold">
-                                          <p:stCondLst>
-                                            <p:cond delay="0"/>
-                                          </p:stCondLst>
-                                        </p:cTn>
-                                        <p:tgtEl>
-                                          <p:spTgt spid="8"/>
-                                        </p:tgtEl>
-                                        <p:attrNameLst>
-                                          <p:attrName>style.visibility</p:attrName>
-                                        </p:attrNameLst>
-                                      </p:cBhvr>
-                                      <p:to>
-                                        <p:strVal val="visible"/>
-                                      </p:to>
-                                    </p:set>
-                                  </p:childTnLst>
-                                </p:cTn>
-                              </p:par>
-                              <p:par>
-                                <p:cTn id="7" presetID="1" presetClass="entr" presetSubtype="0" fill="hold" grpId="0" nodeType="withEffect">
-                                  <p:stCondLst>
-                                    <p:cond delay="0"/>
-                                  </p:stCondLst>
-                                  <p:childTnLst>
-                                    <p:set>
-                                      <p:cBhvr>
-                                        <p:cTn id="8" dur="1" fill="hold">
-                                          <p:stCondLst>
-                                            <p:cond delay="0"/>
-                                          </p:stCondLst>
-                                        </p:cTn>
-                                        <p:tgtEl>
-                                          <p:spTgt spid="7"/>
-                                        </p:tgtEl>
-                                        <p:attrNameLst>
-                                          <p:attrName>style.visibility</p:attrName>
-                                        </p:attrNameLst>
-                                      </p:cBhvr>
-                                      <p:to>
-                                        <p:strVal val="visible"/>
-                                      </p:to>
-                                    </p:set>
-                                  </p:childTnLst>
-                                </p:cTn>
-                              </p:par>
-                            </p:childTnLst>
-                          </p:cTn>
-                        </p:par>
-                      </p:childTnLst>
-                    </p:cTn>
-                  </p:par>
-                  <p:par>
-                    <p:cTn id="9" fill="hold" nodeType="clickPar">
-                      <p:stCondLst>
-                        <p:cond delay="indefinite"/>
-                      </p:stCondLst>
-                      <p:childTnLst>
-                        <p:par>
-                          <p:cTn id="10" fill="hold" nodeType="withGroup">
-                            <p:stCondLst>
-                              <p:cond delay="0"/>
-                            </p:stCondLst>
-                            <p:childTnLst>
-                              <p:par>
-                                <p:cTn id="11" presetID="1" presetClass="exit" presetSubtype="0" fill="hold" grpId="1" nodeType="clickEffect">
-                                  <p:stCondLst>
-                                    <p:cond delay="0"/>
-                                  </p:stCondLst>
-                                  <p:childTnLst>
-                                    <p:set>
-                                      <p:cBhvr>
-                                        <p:cTn id="12" dur="1" fill="hold">
-                                          <p:stCondLst>
-                                            <p:cond delay="0"/>
-                                          </p:stCondLst>
-                                        </p:cTn>
-                                        <p:tgtEl>
-                                          <p:spTgt spid="8"/>
-                                        </p:tgtEl>
-                                        <p:attrNameLst>
-                                          <p:attrName>style.visibility</p:attrName>
-                                        </p:attrNameLst>
-                                      </p:cBhvr>
-                                      <p:to>
-                                        <p:strVal val="hidden"/>
-                                      </p:to>
-                                    </p:set>
-                                  </p:childTnLst>
-                                </p:cTn>
-                              </p:par>
-                              <p:par>
-                                <p:cTn id="13" presetID="1" presetClass="exit" presetSubtype="0" fill="hold" grpId="1" nodeType="withEffect">
-                                  <p:stCondLst>
-                                    <p:cond delay="0"/>
-                                  </p:stCondLst>
-                                  <p:childTnLst>
-                                    <p:set>
-                                      <p:cBhvr>
-                                        <p:cTn id="14" dur="1" fill="hold">
-                                          <p:stCondLst>
-                                            <p:cond delay="0"/>
-                                          </p:stCondLst>
-                                        </p:cTn>
-                                        <p:tgtEl>
-                                          <p:spTgt spid="7"/>
-                                        </p:tgtEl>
-                                        <p:attrNameLst>
-                                          <p:attrName>style.visibility</p:attrName>
-                                        </p:attrNameLst>
-                                      </p:cBhvr>
-                                      <p:to>
-                                        <p:strVal val="hidden"/>
-                                      </p:to>
-                                    </p:set>
-                                  </p:childTnLst>
-                                </p:cTn>
-                              </p:par>
-                              <p:par>
-                                <p:cTn id="15" presetID="1" presetClass="entr" presetSubtype="0" fill="hold" grpId="0" nodeType="withEffect">
-                                  <p:stCondLst>
-                                    <p:cond delay="0"/>
-                                  </p:stCondLst>
-                                  <p:childTnLst>
-                                    <p:set>
-                                      <p:cBhvr>
-                                        <p:cTn id="16" dur="1" fill="hold">
-                                          <p:stCondLst>
-                                            <p:cond delay="0"/>
-                                          </p:stCondLst>
-                                        </p:cTn>
-                                        <p:tgtEl>
-                                          <p:spTgt spid="10"/>
-                                        </p:tgtEl>
-                                        <p:attrNameLst>
-                                          <p:attrName>style.visibility</p:attrName>
-                                        </p:attrNameLst>
-                                      </p:cBhvr>
-                                      <p:to>
-                                        <p:strVal val="visible"/>
-                                      </p:to>
-                                    </p:set>
-                                  </p:childTnLst>
-                                </p:cTn>
-                              </p:par>
-                              <p:par>
-                                <p:cTn id="17" presetID="1" presetClass="entr" presetSubtype="0" fill="hold" grpId="0" nodeType="withEffect">
-                                  <p:stCondLst>
-                                    <p:cond delay="0"/>
-                                  </p:stCondLst>
-                                  <p:childTnLst>
-                                    <p:set>
-                                      <p:cBhvr>
-                                        <p:cTn id="18" dur="1" fill="hold">
-                                          <p:stCondLst>
-                                            <p:cond delay="0"/>
-                                          </p:stCondLst>
-                                        </p:cTn>
-                                        <p:tgtEl>
-                                          <p:spTgt spid="9"/>
-                                        </p:tgtEl>
-                                        <p:attrNameLst>
-                                          <p:attrName>style.visibility</p:attrName>
-                                        </p:attrNameLst>
-                                      </p:cBhvr>
-                                      <p:to>
-                                        <p:strVal val="visible"/>
-                                      </p:to>
-                                    </p:set>
-                                  </p:childTnLst>
-                                </p:cTn>
-                              </p:par>
-                            </p:childTnLst>
-                          </p:cTn>
-                        </p:par>
-                      </p:childTnLst>
-                    </p:cTn>
-                  </p:par>
-                  <p:par>
-                    <p:cTn id="19" fill="hold" nodeType="clickPar">
-                      <p:stCondLst>
-                        <p:cond delay="indefinite"/>
-                      </p:stCondLst>
-                      <p:childTnLst>
-                        <p:par>
-                          <p:cTn id="20" fill="hold" nodeType="withGroup">
-                            <p:stCondLst>
-                              <p:cond delay="0"/>
-                            </p:stCondLst>
-                            <p:childTnLst>
-                              <p:par>
-                                <p:cTn id="21" presetID="1" presetClass="exit" presetSubtype="0" fill="hold" grpId="1" nodeType="clickEffect">
-                                  <p:stCondLst>
-                                    <p:cond delay="0"/>
-                                  </p:stCondLst>
-                                  <p:childTnLst>
-                                    <p:set>
-                                      <p:cBhvr>
-                                        <p:cTn id="22" dur="1" fill="hold">
-                                          <p:stCondLst>
-                                            <p:cond delay="0"/>
-                                          </p:stCondLst>
-                                        </p:cTn>
-                                        <p:tgtEl>
-                                          <p:spTgt spid="10"/>
-                                        </p:tgtEl>
-                                        <p:attrNameLst>
-                                          <p:attrName>style.visibility</p:attrName>
-                                        </p:attrNameLst>
-                                      </p:cBhvr>
-                                      <p:to>
-                                        <p:strVal val="hidden"/>
-                                      </p:to>
-                                    </p:set>
-                                  </p:childTnLst>
-                                </p:cTn>
-                              </p:par>
-                              <p:par>
-                                <p:cTn id="23" presetID="1" presetClass="exit" presetSubtype="0" fill="hold" grpId="1" nodeType="withEffect">
-                                  <p:stCondLst>
-                                    <p:cond delay="0"/>
-                                  </p:stCondLst>
-                                  <p:childTnLst>
-                                    <p:set>
-                                      <p:cBhvr>
-                                        <p:cTn id="24" dur="1" fill="hold">
-                                          <p:stCondLst>
-                                            <p:cond delay="0"/>
-                                          </p:stCondLst>
-                                        </p:cTn>
-                                        <p:tgtEl>
-                                          <p:spTgt spid="9"/>
-                                        </p:tgtEl>
-                                        <p:attrNameLst>
-                                          <p:attrName>style.visibility</p:attrName>
-                                        </p:attrNameLst>
-                                      </p:cBhvr>
-                                      <p:to>
-                                        <p:strVal val="hidden"/>
-                                      </p:to>
-                                    </p:set>
-                                  </p:childTnLst>
-                                </p:cTn>
-                              </p:par>
-                              <p:par>
-                                <p:cTn id="25" presetID="1" presetClass="entr" presetSubtype="0" fill="hold" grpId="0" nodeType="withEffect">
-                                  <p:stCondLst>
-                                    <p:cond delay="0"/>
-                                  </p:stCondLst>
-                                  <p:childTnLst>
-                                    <p:set>
-                                      <p:cBhvr>
-                                        <p:cTn id="26" dur="1" fill="hold">
-                                          <p:stCondLst>
-                                            <p:cond delay="0"/>
-                                          </p:stCondLst>
-                                        </p:cTn>
-                                        <p:tgtEl>
-                                          <p:spTgt spid="12"/>
-                                        </p:tgtEl>
-                                        <p:attrNameLst>
-                                          <p:attrName>style.visibility</p:attrName>
-                                        </p:attrNameLst>
-                                      </p:cBhvr>
-                                      <p:to>
-                                        <p:strVal val="visible"/>
-                                      </p:to>
-                                    </p:set>
-                                  </p:childTnLst>
-                                </p:cTn>
-                              </p:par>
-                              <p:par>
-                                <p:cTn id="27" presetID="1" presetClass="entr" presetSubtype="0" fill="hold" grpId="0" nodeType="withEffect">
-                                  <p:stCondLst>
-                                    <p:cond delay="0"/>
-                                  </p:stCondLst>
-                                  <p:childTnLst>
-                                    <p:set>
-                                      <p:cBhvr>
-                                        <p:cTn id="28" dur="1" fill="hold">
-                                          <p:stCondLst>
-                                            <p:cond delay="0"/>
-                                          </p:stCondLst>
-                                        </p:cTn>
-                                        <p:tgtEl>
-                                          <p:spTgt spid="11"/>
-                                        </p:tgtEl>
-                                        <p:attrNameLst>
-                                          <p:attrName>style.visibility</p:attrName>
-                                        </p:attrNameLst>
-                                      </p:cBhvr>
-                                      <p:to>
-                                        <p:strVal val="visible"/>
-                                      </p:to>
-                                    </p:set>
-                                  </p:childTnLst>
-                                </p:cTn>
-                              </p:par>
-                            </p:childTnLst>
-                          </p:cTn>
-                        </p:par>
-                      </p:childTnLst>
-                    </p:cTn>
-                  </p:par>
-                </p:childTnLst>
-              </p:cTn>
-              <p:prevCondLst>
-                <p:cond evt="onPrev" delay="0">
-                  <p:tgtEl>
-                    <p:sldTgt/>
-                  </p:tgtEl>
-                </p:cond>
-              </p:prevCondLst>
-              <p:nextCondLst>
-                <p:cond evt="onNext" delay="0">
-                  <p:tgtEl>
-                    <p:sldTgt/>
-                  </p:tgtEl>
-                </p:cond>
-              </p:nextCondLst>
-            </p:seq>
-          </p:childTnLst>
-        </p:cTn>
-      </p:par>
-    </p:tnLst>
-    <p:bldLst>
-      <p:bldP spid="7" grpId="0" animBg="1"/>
-      <p:bldP spid="7" grpId="1" animBg="1"/>
-      <p:bldP spid="8" grpId="0" animBg="1"/>
-      <p:bldP spid="8" grpId="1" animBg="1"/>
-      <p:bldP spid="9" grpId="0" animBg="1"/>
-      <p:bldP spid="9" grpId="1" animBg="1"/>
-      <p:bldP spid="10" grpId="0" animBg="1"/>
-      <p:bldP spid="10" grpId="1" animBg="1"/>
-      <p:bldP spid="11" grpId="0" animBg="1"/>
-      <p:bldP spid="12" grpId="0" animBg="1"/>
-    </p:bldLst>
-  </p:timing>
 </p:sld>
 </file>
 
@@ -41929,8 +39816,8 @@
         </p:nvSpPr>
         <p:spPr>
           <a:xfrm>
-            <a:off x="1422401" y="1476375"/>
-            <a:ext cx="9434286" cy="4114800"/>
+            <a:off x="667488" y="1561435"/>
+            <a:ext cx="11155915" cy="4114800"/>
           </a:xfrm>
         </p:spPr>
         <p:txBody>
@@ -42203,8 +40090,8 @@
         </p:nvSpPr>
         <p:spPr>
           <a:xfrm>
-            <a:off x="3802063" y="2617391"/>
-            <a:ext cx="3865562" cy="1095375"/>
+            <a:off x="3802063" y="2980412"/>
+            <a:ext cx="3865562" cy="369332"/>
           </a:xfrm>
           <a:prstGeom prst="rect">
             <a:avLst/>
@@ -42212,67 +40099,67 @@
           <a:noFill/>
         </p:spPr>
         <p:txBody>
-          <a:bodyPr wrap="square" anchor="ctr" lIns="0" rIns="0" tIns="0" bIns="0">
+          <a:bodyPr wrap="square" lIns="0" tIns="0" rIns="0" bIns="0" anchor="ctr">
             <a:spAutoFit/>
           </a:bodyPr>
           <a:lstStyle/>
           <a:p>
             <a:r>
-              <a:rPr sz="2100">
+              <a:rPr sz="2400">
                 <a:latin typeface="Cambria"/>
               </a:rPr>
               <a:t>E(X) = μ</a:t>
             </a:r>
             <a:r>
-              <a:rPr sz="2100" baseline="-25000">
+              <a:rPr sz="2400" baseline="-25000">
                 <a:latin typeface="Cambria"/>
               </a:rPr>
               <a:t>X</a:t>
             </a:r>
             <a:r>
-              <a:rPr sz="2100">
+              <a:rPr sz="2400">
                 <a:latin typeface="Cambria"/>
               </a:rPr>
               <a:t> = Σ</a:t>
             </a:r>
             <a:r>
-              <a:rPr sz="2100" baseline="-25000">
+              <a:rPr sz="2400" baseline="-25000">
                 <a:latin typeface="Cambria"/>
               </a:rPr>
               <a:t>i=1</a:t>
             </a:r>
             <a:r>
-              <a:rPr sz="2100" baseline="30000">
+              <a:rPr sz="2400" baseline="30000">
                 <a:latin typeface="Cambria"/>
               </a:rPr>
               <a:t>N</a:t>
             </a:r>
             <a:r>
-              <a:rPr sz="2100">
+              <a:rPr sz="2400">
                 <a:latin typeface="Cambria"/>
               </a:rPr>
               <a:t> x</a:t>
             </a:r>
             <a:r>
-              <a:rPr sz="2100" baseline="-25000">
+              <a:rPr sz="2400" baseline="-25000">
                 <a:latin typeface="Cambria"/>
               </a:rPr>
               <a:t>i</a:t>
             </a:r>
             <a:r>
-              <a:rPr sz="2100">
+              <a:rPr sz="2400">
                 <a:latin typeface="Cambria"/>
               </a:rPr>
               <a:t> P(x</a:t>
             </a:r>
             <a:r>
-              <a:rPr sz="2100" baseline="-25000">
+              <a:rPr sz="2400" baseline="-25000">
                 <a:latin typeface="Cambria"/>
               </a:rPr>
               <a:t>i</a:t>
             </a:r>
             <a:r>
-              <a:rPr sz="2100">
+              <a:rPr sz="2400">
                 <a:latin typeface="Cambria"/>
               </a:rPr>
               <a:t>)</a:t>
@@ -43022,8 +40909,8 @@
         </p:nvSpPr>
         <p:spPr>
           <a:xfrm>
-            <a:off x="4881076" y="2434774"/>
-            <a:ext cx="2855913" cy="882650"/>
+            <a:off x="4881076" y="2691433"/>
+            <a:ext cx="3316626" cy="369332"/>
           </a:xfrm>
           <a:prstGeom prst="rect">
             <a:avLst/>
@@ -43031,79 +40918,79 @@
           <a:noFill/>
         </p:spPr>
         <p:txBody>
-          <a:bodyPr wrap="square" anchor="ctr" lIns="0" rIns="0" tIns="0" bIns="0">
+          <a:bodyPr wrap="square" lIns="0" tIns="0" rIns="0" bIns="0" anchor="ctr">
             <a:spAutoFit/>
           </a:bodyPr>
           <a:lstStyle/>
           <a:p>
             <a:r>
-              <a:rPr sz="1500">
+              <a:rPr sz="2400">
                 <a:latin typeface="Cambria"/>
               </a:rPr>
               <a:t>σ</a:t>
             </a:r>
             <a:r>
-              <a:rPr sz="1500" baseline="30000">
+              <a:rPr sz="2400" baseline="30000">
                 <a:latin typeface="Cambria"/>
               </a:rPr>
               <a:t>2</a:t>
             </a:r>
             <a:r>
-              <a:rPr sz="1500">
+              <a:rPr sz="2400">
                 <a:latin typeface="Cambria"/>
               </a:rPr>
               <a:t> = Σ</a:t>
             </a:r>
             <a:r>
-              <a:rPr sz="1500" baseline="-25000">
+              <a:rPr sz="2400" baseline="-25000">
                 <a:latin typeface="Cambria"/>
               </a:rPr>
               <a:t>i=1</a:t>
             </a:r>
             <a:r>
-              <a:rPr sz="1500" baseline="30000">
+              <a:rPr sz="2400" baseline="30000">
                 <a:latin typeface="Cambria"/>
               </a:rPr>
               <a:t>N</a:t>
             </a:r>
             <a:r>
-              <a:rPr sz="1500">
+              <a:rPr sz="2400">
                 <a:latin typeface="Cambria"/>
               </a:rPr>
               <a:t> (x</a:t>
             </a:r>
             <a:r>
-              <a:rPr sz="1500" baseline="-25000">
+              <a:rPr sz="2400" baseline="-25000">
                 <a:latin typeface="Cambria"/>
               </a:rPr>
               <a:t>i</a:t>
             </a:r>
             <a:r>
-              <a:rPr sz="1500">
+              <a:rPr sz="2400">
                 <a:latin typeface="Cambria"/>
               </a:rPr>
               <a:t> − μ)</a:t>
             </a:r>
             <a:r>
-              <a:rPr sz="1500" baseline="30000">
+              <a:rPr sz="2400" baseline="30000">
                 <a:latin typeface="Cambria"/>
               </a:rPr>
               <a:t>2</a:t>
             </a:r>
             <a:r>
-              <a:rPr sz="1500">
+              <a:rPr sz="2400">
                 <a:latin typeface="Cambria"/>
               </a:rPr>
               <a:t> P(x</a:t>
             </a:r>
             <a:r>
-              <a:rPr sz="1500" baseline="-25000">
+              <a:rPr sz="2400" baseline="-25000">
                 <a:latin typeface="Cambria"/>
               </a:rPr>
               <a:t>i</a:t>
             </a:r>
             <a:r>
-              <a:rPr sz="1500">
+              <a:rPr sz="2400">
                 <a:latin typeface="Cambria"/>
               </a:rPr>
               <a:t>)</a:t>
@@ -43128,67 +41015,85 @@
           <a:noFill/>
         </p:spPr>
         <p:txBody>
-          <a:bodyPr wrap="square" anchor="ctr" lIns="0" rIns="0" tIns="0" bIns="0">
+          <a:bodyPr wrap="square" lIns="0" tIns="0" rIns="0" bIns="0" anchor="ctr">
             <a:spAutoFit/>
           </a:bodyPr>
           <a:lstStyle/>
           <a:p>
             <a:r>
-              <a:rPr sz="2100">
+              <a:rPr sz="2100" dirty="0">
                 <a:latin typeface="Cambria"/>
               </a:rPr>
-              <a:t>E(X) = μ</a:t>
-            </a:r>
-            <a:r>
-              <a:rPr sz="2100" baseline="-25000">
+              <a:t>E(X) = </a:t>
+            </a:r>
+            <a:r>
+              <a:rPr sz="2100" dirty="0" err="1">
+                <a:latin typeface="Cambria"/>
+              </a:rPr>
+              <a:t>μ</a:t>
+            </a:r>
+            <a:r>
+              <a:rPr sz="2100" baseline="-25000" dirty="0" err="1">
                 <a:latin typeface="Cambria"/>
               </a:rPr>
               <a:t>X</a:t>
             </a:r>
             <a:r>
-              <a:rPr sz="2100">
+              <a:rPr sz="2100" dirty="0">
                 <a:latin typeface="Cambria"/>
               </a:rPr>
-              <a:t> = Σ</a:t>
-            </a:r>
-            <a:r>
-              <a:rPr sz="2100" baseline="-25000">
+              <a:t> = </a:t>
+            </a:r>
+            <a:r>
+              <a:rPr sz="2100" dirty="0" err="1">
                 <a:latin typeface="Cambria"/>
               </a:rPr>
-              <a:t>i=1</a:t>
-            </a:r>
-            <a:r>
-              <a:rPr sz="2100" baseline="30000">
+              <a:t>Σ</a:t>
+            </a:r>
+            <a:r>
+              <a:rPr sz="2100" baseline="-25000" dirty="0" err="1">
+                <a:latin typeface="Cambria"/>
+              </a:rPr>
+              <a:t>i</a:t>
+            </a:r>
+            <a:r>
+              <a:rPr sz="2100" baseline="-25000" dirty="0">
+                <a:latin typeface="Cambria"/>
+              </a:rPr>
+              <a:t>=1</a:t>
+            </a:r>
+            <a:r>
+              <a:rPr sz="2100" baseline="30000" dirty="0">
                 <a:latin typeface="Cambria"/>
               </a:rPr>
               <a:t>N</a:t>
             </a:r>
             <a:r>
-              <a:rPr sz="2100">
+              <a:rPr sz="2100" dirty="0">
                 <a:latin typeface="Cambria"/>
               </a:rPr>
               <a:t> x</a:t>
             </a:r>
             <a:r>
-              <a:rPr sz="2100" baseline="-25000">
+              <a:rPr sz="2100" baseline="-25000" dirty="0">
                 <a:latin typeface="Cambria"/>
               </a:rPr>
               <a:t>i</a:t>
             </a:r>
             <a:r>
-              <a:rPr sz="2100">
+              <a:rPr sz="2100" dirty="0">
                 <a:latin typeface="Cambria"/>
               </a:rPr>
               <a:t> P(x</a:t>
             </a:r>
             <a:r>
-              <a:rPr sz="2100" baseline="-25000">
+              <a:rPr sz="2100" baseline="-25000" dirty="0">
                 <a:latin typeface="Cambria"/>
               </a:rPr>
               <a:t>i</a:t>
             </a:r>
             <a:r>
-              <a:rPr sz="2100">
+              <a:rPr sz="2100" dirty="0">
                 <a:latin typeface="Cambria"/>
               </a:rPr>
               <a:t>)</a:t>
@@ -43206,111 +41111,6 @@
   <p:clrMapOvr>
     <a:masterClrMapping/>
   </p:clrMapOvr>
-  <p:timing>
-    <p:tnLst>
-      <p:par>
-        <p:cTn id="1" dur="indefinite" restart="never" nodeType="tmRoot">
-          <p:childTnLst>
-            <p:seq concurrent="1" nextAc="seek">
-              <p:cTn id="2" dur="indefinite" nodeType="mainSeq">
-                <p:childTnLst>
-                  <p:par>
-                    <p:cTn id="3" fill="hold">
-                      <p:stCondLst>
-                        <p:cond delay="indefinite"/>
-                      </p:stCondLst>
-                      <p:childTnLst>
-                        <p:par>
-                          <p:cTn id="4" fill="hold">
-                            <p:stCondLst>
-                              <p:cond delay="0"/>
-                            </p:stCondLst>
-                            <p:childTnLst>
-                              <p:par>
-                                <p:cTn id="5" presetID="1" presetClass="entr" presetSubtype="0" fill="hold" grpId="0" nodeType="clickEffect">
-                                  <p:stCondLst>
-                                    <p:cond delay="0"/>
-                                  </p:stCondLst>
-                                  <p:childTnLst>
-                                    <p:set>
-                                      <p:cBhvr>
-                                        <p:cTn id="6" dur="1" fill="hold">
-                                          <p:stCondLst>
-                                            <p:cond delay="0"/>
-                                          </p:stCondLst>
-                                        </p:cTn>
-                                        <p:tgtEl>
-                                          <p:spTgt spid="2"/>
-                                        </p:tgtEl>
-                                        <p:attrNameLst>
-                                          <p:attrName>style.visibility</p:attrName>
-                                        </p:attrNameLst>
-                                      </p:cBhvr>
-                                      <p:to>
-                                        <p:strVal val="visible"/>
-                                      </p:to>
-                                    </p:set>
-                                  </p:childTnLst>
-                                </p:cTn>
-                              </p:par>
-                              <p:par>
-                                <p:cTn id="7" presetID="1" presetClass="entr" presetSubtype="0" fill="hold" nodeType="withEffect">
-                                  <p:stCondLst>
-                                    <p:cond delay="0"/>
-                                  </p:stCondLst>
-                                  <p:childTnLst>
-                                    <p:set>
-                                      <p:cBhvr>
-                                        <p:cTn id="8" dur="1" fill="hold">
-                                          <p:stCondLst>
-                                            <p:cond delay="0"/>
-                                          </p:stCondLst>
-                                        </p:cTn>
-                                        <p:tgtEl>
-                                          <p:spTgt spid="8"/>
-                                        </p:tgtEl>
-                                        <p:attrNameLst>
-                                          <p:attrName>style.visibility</p:attrName>
-                                        </p:attrNameLst>
-                                      </p:cBhvr>
-                                      <p:to>
-                                        <p:strVal val="visible"/>
-                                      </p:to>
-                                    </p:set>
-                                  </p:childTnLst>
-                                </p:cTn>
-                              </p:par>
-                            </p:childTnLst>
-                          </p:cTn>
-                        </p:par>
-                      </p:childTnLst>
-                    </p:cTn>
-                  </p:par>
-                </p:childTnLst>
-              </p:cTn>
-              <p:prevCondLst>
-                <p:cond evt="onPrev" delay="0">
-                  <p:tgtEl>
-                    <p:sldTgt/>
-                  </p:tgtEl>
-                </p:cond>
-              </p:prevCondLst>
-              <p:nextCondLst>
-                <p:cond evt="onNext" delay="0">
-                  <p:tgtEl>
-                    <p:sldTgt/>
-                  </p:tgtEl>
-                </p:cond>
-              </p:nextCondLst>
-            </p:seq>
-          </p:childTnLst>
-        </p:cTn>
-      </p:par>
-    </p:tnLst>
-    <p:bldLst>
-      <p:bldP spid="2" grpId="0"/>
-    </p:bldLst>
-  </p:timing>
 </p:sld>
 </file>
 
@@ -43352,7 +41152,7 @@
         </p:blipFill>
         <p:spPr>
           <a:xfrm>
-            <a:off x="1306285" y="0"/>
+            <a:off x="1020146" y="-29052"/>
             <a:ext cx="10151707" cy="6916103"/>
           </a:xfrm>
           <a:prstGeom prst="rect">
@@ -43753,7 +41553,7 @@
           <a:noFill/>
         </p:spPr>
         <p:txBody>
-          <a:bodyPr wrap="square" anchor="t" lIns="0" rIns="0" tIns="0" bIns="0">
+          <a:bodyPr wrap="square" lIns="0" tIns="0" rIns="0" bIns="0" anchor="t">
             <a:spAutoFit/>
           </a:bodyPr>
           <a:lstStyle/>
@@ -43787,7 +41587,7 @@
           <a:noFill/>
         </p:spPr>
         <p:txBody>
-          <a:bodyPr wrap="square" anchor="t" lIns="0" rIns="0" tIns="0" bIns="0">
+          <a:bodyPr wrap="square" lIns="0" tIns="0" rIns="0" bIns="0" anchor="t">
             <a:spAutoFit/>
           </a:bodyPr>
           <a:lstStyle/>
@@ -43807,11 +41607,17 @@
           <p:cNvGraphicFramePr>
             <a:graphicFrameLocks noGrp="1"/>
           </p:cNvGraphicFramePr>
-          <p:nvPr/>
+          <p:nvPr>
+            <p:extLst>
+              <p:ext uri="{D42A27DB-BD31-4B8C-83A1-F6EECF244321}">
+                <p14:modId xmlns:p14="http://schemas.microsoft.com/office/powerpoint/2010/main" val="2651647992"/>
+              </p:ext>
+            </p:extLst>
+          </p:nvPr>
         </p:nvGraphicFramePr>
         <p:xfrm>
-          <a:off x="832767" y="1907773"/>
-          <a:ext cx="5852160" cy="660400"/>
+          <a:off x="2009553" y="2290545"/>
+          <a:ext cx="6046974" cy="1402080"/>
         </p:xfrm>
         <a:graphic>
           <a:graphicData uri="http://schemas.openxmlformats.org/drawingml/2006/table">
@@ -43820,22 +41626,58 @@
                 <a:tableStyleId>{5C22544A-7EE6-4342-B048-85BDC9FD1C3A}</a:tableStyleId>
               </a:tblPr>
               <a:tblGrid>
-                <a:gridCol w="975360"/>
-                <a:gridCol w="975360"/>
-                <a:gridCol w="975360"/>
-                <a:gridCol w="975360"/>
-                <a:gridCol w="975360"/>
-                <a:gridCol w="975360"/>
+                <a:gridCol w="1007829">
+                  <a:extLst>
+                    <a:ext uri="{9D8B030D-6E8A-4147-A177-3AD203B41FA5}">
+                      <a16:colId xmlns:a16="http://schemas.microsoft.com/office/drawing/2014/main" val="20000"/>
+                    </a:ext>
+                  </a:extLst>
+                </a:gridCol>
+                <a:gridCol w="1007829">
+                  <a:extLst>
+                    <a:ext uri="{9D8B030D-6E8A-4147-A177-3AD203B41FA5}">
+                      <a16:colId xmlns:a16="http://schemas.microsoft.com/office/drawing/2014/main" val="20001"/>
+                    </a:ext>
+                  </a:extLst>
+                </a:gridCol>
+                <a:gridCol w="1007829">
+                  <a:extLst>
+                    <a:ext uri="{9D8B030D-6E8A-4147-A177-3AD203B41FA5}">
+                      <a16:colId xmlns:a16="http://schemas.microsoft.com/office/drawing/2014/main" val="20002"/>
+                    </a:ext>
+                  </a:extLst>
+                </a:gridCol>
+                <a:gridCol w="1007829">
+                  <a:extLst>
+                    <a:ext uri="{9D8B030D-6E8A-4147-A177-3AD203B41FA5}">
+                      <a16:colId xmlns:a16="http://schemas.microsoft.com/office/drawing/2014/main" val="20003"/>
+                    </a:ext>
+                  </a:extLst>
+                </a:gridCol>
+                <a:gridCol w="1007829">
+                  <a:extLst>
+                    <a:ext uri="{9D8B030D-6E8A-4147-A177-3AD203B41FA5}">
+                      <a16:colId xmlns:a16="http://schemas.microsoft.com/office/drawing/2014/main" val="20004"/>
+                    </a:ext>
+                  </a:extLst>
+                </a:gridCol>
+                <a:gridCol w="1007829">
+                  <a:extLst>
+                    <a:ext uri="{9D8B030D-6E8A-4147-A177-3AD203B41FA5}">
+                      <a16:colId xmlns:a16="http://schemas.microsoft.com/office/drawing/2014/main" val="20005"/>
+                    </a:ext>
+                  </a:extLst>
+                </a:gridCol>
               </a:tblGrid>
               <a:tr h="330200">
                 <a:tc>
                   <a:txBody>
-                    <a:bodyPr wrap="none" lIns="27432" rIns="27432" tIns="27432" bIns="27432"/>
+                    <a:bodyPr/>
                     <a:lstStyle/>
                     <a:p>
                       <a:pPr algn="r"/>
                       <a:r>
-                        <a:rPr sz="1600" b="1">
+                        <a:rPr sz="2000" b="1">
                           <a:latin typeface="Cambria"/>
                         </a:rPr>
                         <a:t>values x</a:t>
@@ -43846,12 +41688,12 @@
                 </a:tc>
                 <a:tc>
                   <a:txBody>
-                    <a:bodyPr wrap="none" lIns="27432" rIns="27432" tIns="27432" bIns="27432"/>
+                    <a:bodyPr/>
                     <a:lstStyle/>
                     <a:p>
                       <a:pPr algn="ctr"/>
                       <a:r>
-                        <a:rPr sz="1600" b="0">
+                        <a:rPr sz="2000" b="0">
                           <a:latin typeface="Cambria"/>
                         </a:rPr>
                         <a:t>1</a:t>
@@ -43862,12 +41704,12 @@
                 </a:tc>
                 <a:tc>
                   <a:txBody>
-                    <a:bodyPr wrap="none" lIns="27432" rIns="27432" tIns="27432" bIns="27432"/>
+                    <a:bodyPr/>
                     <a:lstStyle/>
                     <a:p>
                       <a:pPr algn="ctr"/>
                       <a:r>
-                        <a:rPr sz="1600" b="0">
+                        <a:rPr sz="2000" b="0">
                           <a:latin typeface="Cambria"/>
                         </a:rPr>
                         <a:t>2</a:t>
@@ -43878,12 +41720,12 @@
                 </a:tc>
                 <a:tc>
                   <a:txBody>
-                    <a:bodyPr wrap="none" lIns="27432" rIns="27432" tIns="27432" bIns="27432"/>
+                    <a:bodyPr/>
                     <a:lstStyle/>
                     <a:p>
                       <a:pPr algn="ctr"/>
                       <a:r>
-                        <a:rPr sz="1600" b="0">
+                        <a:rPr sz="2000" b="0">
                           <a:latin typeface="Cambria"/>
                         </a:rPr>
                         <a:t>3</a:t>
@@ -43894,12 +41736,12 @@
                 </a:tc>
                 <a:tc>
                   <a:txBody>
-                    <a:bodyPr wrap="none" lIns="27432" rIns="27432" tIns="27432" bIns="27432"/>
+                    <a:bodyPr/>
                     <a:lstStyle/>
                     <a:p>
                       <a:pPr algn="ctr"/>
                       <a:r>
-                        <a:rPr sz="1600" b="0">
+                        <a:rPr sz="2000" b="0">
                           <a:latin typeface="Cambria"/>
                         </a:rPr>
                         <a:t>4</a:t>
@@ -43910,12 +41752,12 @@
                 </a:tc>
                 <a:tc>
                   <a:txBody>
-                    <a:bodyPr wrap="none" lIns="27432" rIns="27432" tIns="27432" bIns="27432"/>
+                    <a:bodyPr/>
                     <a:lstStyle/>
                     <a:p>
                       <a:pPr algn="ctr"/>
                       <a:r>
-                        <a:rPr sz="1600" b="0">
+                        <a:rPr sz="2000" b="0">
                           <a:latin typeface="Cambria"/>
                         </a:rPr>
                         <a:t>5</a:t>
@@ -43924,19 +41766,30 @@
                   </a:txBody>
                   <a:tcPr/>
                 </a:tc>
+                <a:extLst>
+                  <a:ext uri="{0D108BD9-81ED-4DB2-BD59-A6C34878D82A}">
+                    <a16:rowId xmlns:a16="http://schemas.microsoft.com/office/drawing/2014/main" val="10000"/>
+                  </a:ext>
+                </a:extLst>
               </a:tr>
               <a:tr h="330200">
                 <a:tc>
                   <a:txBody>
-                    <a:bodyPr wrap="none" lIns="27432" rIns="27432" tIns="27432" bIns="27432"/>
+                    <a:bodyPr/>
                     <a:lstStyle/>
                     <a:p>
                       <a:pPr algn="r"/>
                       <a:r>
-                        <a:rPr sz="1600" b="1">
+                        <a:rPr sz="2000" b="1" dirty="0" err="1">
                           <a:latin typeface="Cambria"/>
                         </a:rPr>
-                        <a:t>pmf p(x)</a:t>
+                        <a:t>pmf</a:t>
+                      </a:r>
+                      <a:r>
+                        <a:rPr sz="2000" b="1" dirty="0">
+                          <a:latin typeface="Cambria"/>
+                        </a:rPr>
+                        <a:t> p(x)</a:t>
                       </a:r>
                     </a:p>
                   </a:txBody>
@@ -43944,12 +41797,12 @@
                 </a:tc>
                 <a:tc>
                   <a:txBody>
-                    <a:bodyPr wrap="none" lIns="27432" rIns="27432" tIns="27432" bIns="27432"/>
+                    <a:bodyPr/>
                     <a:lstStyle/>
                     <a:p>
                       <a:pPr algn="ctr"/>
                       <a:r>
-                        <a:rPr sz="1600" b="0">
+                        <a:rPr sz="2000" b="0">
                           <a:latin typeface="Cambria"/>
                         </a:rPr>
                         <a:t>1/10</a:t>
@@ -43960,12 +41813,12 @@
                 </a:tc>
                 <a:tc>
                   <a:txBody>
-                    <a:bodyPr wrap="none" lIns="27432" rIns="27432" tIns="27432" bIns="27432"/>
+                    <a:bodyPr/>
                     <a:lstStyle/>
                     <a:p>
                       <a:pPr algn="ctr"/>
                       <a:r>
-                        <a:rPr sz="1600" b="0">
+                        <a:rPr sz="2000" b="0">
                           <a:latin typeface="Cambria"/>
                         </a:rPr>
                         <a:t>2/10</a:t>
@@ -43976,12 +41829,12 @@
                 </a:tc>
                 <a:tc>
                   <a:txBody>
-                    <a:bodyPr wrap="none" lIns="27432" rIns="27432" tIns="27432" bIns="27432"/>
+                    <a:bodyPr/>
                     <a:lstStyle/>
                     <a:p>
                       <a:pPr algn="ctr"/>
                       <a:r>
-                        <a:rPr sz="1600" b="0">
+                        <a:rPr sz="2000" b="0">
                           <a:latin typeface="Cambria"/>
                         </a:rPr>
                         <a:t>4/10</a:t>
@@ -43992,12 +41845,12 @@
                 </a:tc>
                 <a:tc>
                   <a:txBody>
-                    <a:bodyPr wrap="none" lIns="27432" rIns="27432" tIns="27432" bIns="27432"/>
+                    <a:bodyPr/>
                     <a:lstStyle/>
                     <a:p>
                       <a:pPr algn="ctr"/>
                       <a:r>
-                        <a:rPr sz="1600" b="0">
+                        <a:rPr sz="2000" b="0">
                           <a:latin typeface="Cambria"/>
                         </a:rPr>
                         <a:t>2/10</a:t>
@@ -44008,12 +41861,12 @@
                 </a:tc>
                 <a:tc>
                   <a:txBody>
-                    <a:bodyPr wrap="none" lIns="27432" rIns="27432" tIns="27432" bIns="27432"/>
+                    <a:bodyPr/>
                     <a:lstStyle/>
                     <a:p>
                       <a:pPr algn="ctr"/>
                       <a:r>
-                        <a:rPr sz="1600" b="0">
+                        <a:rPr sz="2000" b="0" dirty="0">
                           <a:latin typeface="Cambria"/>
                         </a:rPr>
                         <a:t>1/10</a:t>
@@ -44022,6 +41875,11 @@
                   </a:txBody>
                   <a:tcPr/>
                 </a:tc>
+                <a:extLst>
+                  <a:ext uri="{0D108BD9-81ED-4DB2-BD59-A6C34878D82A}">
+                    <a16:rowId xmlns:a16="http://schemas.microsoft.com/office/drawing/2014/main" val="10001"/>
+                  </a:ext>
+                </a:extLst>
               </a:tr>
             </a:tbl>
           </a:graphicData>
@@ -44074,7 +41932,7 @@
           <a:noFill/>
         </p:spPr>
         <p:txBody>
-          <a:bodyPr wrap="square" anchor="t" lIns="0" rIns="0" tIns="0" bIns="0">
+          <a:bodyPr wrap="square" lIns="0" tIns="0" rIns="0" bIns="0" anchor="t">
             <a:spAutoFit/>
           </a:bodyPr>
           <a:lstStyle/>
@@ -44100,7 +41958,7 @@
         <p:spPr>
           <a:xfrm>
             <a:off x="1564182" y="884682"/>
-            <a:ext cx="9598588" cy="346329"/>
+            <a:ext cx="9598588" cy="369332"/>
           </a:xfrm>
           <a:prstGeom prst="rect">
             <a:avLst/>
@@ -44108,13 +41966,13 @@
           <a:noFill/>
         </p:spPr>
         <p:txBody>
-          <a:bodyPr wrap="square" anchor="t" lIns="0" rIns="0" tIns="0" bIns="0">
+          <a:bodyPr wrap="square" lIns="0" tIns="0" rIns="0" bIns="0" anchor="t">
             <a:spAutoFit/>
           </a:bodyPr>
           <a:lstStyle/>
           <a:p>
             <a:r>
-              <a:rPr sz="1700" b="0">
+              <a:rPr sz="2400" b="0">
                 <a:latin typeface="Calibri"/>
               </a:rPr>
               <a:t>From the table we compute the mean:</a:t>
@@ -44130,8 +41988,8 @@
         </p:nvSpPr>
         <p:spPr>
           <a:xfrm>
-            <a:off x="1564182" y="1322451"/>
-            <a:ext cx="9598588" cy="346329"/>
+            <a:off x="1564182" y="1450046"/>
+            <a:ext cx="9598588" cy="369332"/>
           </a:xfrm>
           <a:prstGeom prst="rect">
             <a:avLst/>
@@ -44139,17 +41997,23 @@
           <a:noFill/>
         </p:spPr>
         <p:txBody>
-          <a:bodyPr wrap="square" anchor="t" lIns="0" rIns="0" tIns="0" bIns="0">
+          <a:bodyPr wrap="square" lIns="0" tIns="0" rIns="0" bIns="0" anchor="t">
             <a:spAutoFit/>
           </a:bodyPr>
           <a:lstStyle/>
           <a:p>
             <a:pPr algn="ctr"/>
             <a:r>
-              <a:rPr sz="1700" b="0">
+              <a:rPr sz="2400" b="0" dirty="0" err="1">
                 <a:latin typeface="Cambria"/>
               </a:rPr>
-              <a:t>μ = 1/10 + 4/10 + 12/10 + 8/10 + 5/10 = 3.</a:t>
+              <a:t>μ</a:t>
+            </a:r>
+            <a:r>
+              <a:rPr sz="2400" b="0" dirty="0">
+                <a:latin typeface="Cambria"/>
+              </a:rPr>
+              <a:t> = 1/10 + 4/10 + 12/10 + 8/10 + 5/10 = 3</a:t>
             </a:r>
           </a:p>
         </p:txBody>
@@ -44162,8 +42026,8 @@
         </p:nvSpPr>
         <p:spPr>
           <a:xfrm>
-            <a:off x="1564182" y="1851660"/>
-            <a:ext cx="9598588" cy="346329"/>
+            <a:off x="1564182" y="2223810"/>
+            <a:ext cx="9598588" cy="369332"/>
           </a:xfrm>
           <a:prstGeom prst="rect">
             <a:avLst/>
@@ -44171,25 +42035,37 @@
           <a:noFill/>
         </p:spPr>
         <p:txBody>
-          <a:bodyPr wrap="square" anchor="t" lIns="0" rIns="0" tIns="0" bIns="0">
+          <a:bodyPr wrap="square" lIns="0" tIns="0" rIns="0" bIns="0" anchor="t">
             <a:spAutoFit/>
           </a:bodyPr>
           <a:lstStyle/>
           <a:p>
             <a:r>
-              <a:rPr sz="1700" b="0">
+              <a:rPr sz="2400" b="0" dirty="0">
                 <a:latin typeface="Calibri"/>
               </a:rPr>
-              <a:t>Then we add a line to the table for (X − μ)</a:t>
-            </a:r>
-            <a:r>
-              <a:rPr sz="1700" b="0" baseline="30000">
+              <a:t>Then we add a line to the table for (X − </a:t>
+            </a:r>
+            <a:r>
+              <a:rPr sz="2400" b="0" dirty="0" err="1">
+                <a:latin typeface="Calibri"/>
+              </a:rPr>
+              <a:t>μ</a:t>
+            </a:r>
+            <a:r>
+              <a:rPr sz="2400" b="0" dirty="0">
+                <a:latin typeface="Calibri"/>
+              </a:rPr>
+              <a:t>)</a:t>
+            </a:r>
+            <a:r>
+              <a:rPr sz="2400" b="0" baseline="30000" dirty="0">
                 <a:latin typeface="Calibri"/>
               </a:rPr>
               <a:t>2</a:t>
             </a:r>
             <a:r>
-              <a:rPr sz="1700" b="0">
+              <a:rPr sz="2400" b="0" dirty="0">
                 <a:latin typeface="Calibri"/>
               </a:rPr>
               <a:t>.</a:t>
@@ -44203,11 +42079,17 @@
           <p:cNvGraphicFramePr>
             <a:graphicFrameLocks noGrp="1"/>
           </p:cNvGraphicFramePr>
-          <p:nvPr/>
+          <p:nvPr>
+            <p:extLst>
+              <p:ext uri="{D42A27DB-BD31-4B8C-83A1-F6EECF244321}">
+                <p14:modId xmlns:p14="http://schemas.microsoft.com/office/powerpoint/2010/main" val="445235684"/>
+              </p:ext>
+            </p:extLst>
+          </p:nvPr>
         </p:nvGraphicFramePr>
         <p:xfrm>
-          <a:off x="1564182" y="2307717"/>
-          <a:ext cx="5394960" cy="914400"/>
+          <a:off x="1564181" y="2764930"/>
+          <a:ext cx="7260840" cy="1188720"/>
         </p:xfrm>
         <a:graphic>
           <a:graphicData uri="http://schemas.openxmlformats.org/drawingml/2006/table">
@@ -44216,22 +42098,58 @@
                 <a:tableStyleId>{5C22544A-7EE6-4342-B048-85BDC9FD1C3A}</a:tableStyleId>
               </a:tblPr>
               <a:tblGrid>
-                <a:gridCol w="899160"/>
-                <a:gridCol w="899160"/>
-                <a:gridCol w="899160"/>
-                <a:gridCol w="899160"/>
-                <a:gridCol w="899160"/>
-                <a:gridCol w="899160"/>
+                <a:gridCol w="1210140">
+                  <a:extLst>
+                    <a:ext uri="{9D8B030D-6E8A-4147-A177-3AD203B41FA5}">
+                      <a16:colId xmlns:a16="http://schemas.microsoft.com/office/drawing/2014/main" val="20000"/>
+                    </a:ext>
+                  </a:extLst>
+                </a:gridCol>
+                <a:gridCol w="1210140">
+                  <a:extLst>
+                    <a:ext uri="{9D8B030D-6E8A-4147-A177-3AD203B41FA5}">
+                      <a16:colId xmlns:a16="http://schemas.microsoft.com/office/drawing/2014/main" val="20001"/>
+                    </a:ext>
+                  </a:extLst>
+                </a:gridCol>
+                <a:gridCol w="1210140">
+                  <a:extLst>
+                    <a:ext uri="{9D8B030D-6E8A-4147-A177-3AD203B41FA5}">
+                      <a16:colId xmlns:a16="http://schemas.microsoft.com/office/drawing/2014/main" val="20002"/>
+                    </a:ext>
+                  </a:extLst>
+                </a:gridCol>
+                <a:gridCol w="1210140">
+                  <a:extLst>
+                    <a:ext uri="{9D8B030D-6E8A-4147-A177-3AD203B41FA5}">
+                      <a16:colId xmlns:a16="http://schemas.microsoft.com/office/drawing/2014/main" val="20003"/>
+                    </a:ext>
+                  </a:extLst>
+                </a:gridCol>
+                <a:gridCol w="1210140">
+                  <a:extLst>
+                    <a:ext uri="{9D8B030D-6E8A-4147-A177-3AD203B41FA5}">
+                      <a16:colId xmlns:a16="http://schemas.microsoft.com/office/drawing/2014/main" val="20004"/>
+                    </a:ext>
+                  </a:extLst>
+                </a:gridCol>
+                <a:gridCol w="1210140">
+                  <a:extLst>
+                    <a:ext uri="{9D8B030D-6E8A-4147-A177-3AD203B41FA5}">
+                      <a16:colId xmlns:a16="http://schemas.microsoft.com/office/drawing/2014/main" val="20005"/>
+                    </a:ext>
+                  </a:extLst>
+                </a:gridCol>
               </a:tblGrid>
               <a:tr h="304800">
                 <a:tc>
                   <a:txBody>
-                    <a:bodyPr wrap="none" lIns="27432" rIns="27432" tIns="27432" bIns="27432"/>
+                    <a:bodyPr/>
                     <a:lstStyle/>
                     <a:p>
                       <a:pPr algn="r"/>
                       <a:r>
-                        <a:rPr sz="1400" b="1">
+                        <a:rPr sz="2000" b="1">
                           <a:latin typeface="Cambria"/>
                         </a:rPr>
                         <a:t>values X</a:t>
@@ -44242,12 +42160,12 @@
                 </a:tc>
                 <a:tc>
                   <a:txBody>
-                    <a:bodyPr wrap="none" lIns="27432" rIns="27432" tIns="27432" bIns="27432"/>
+                    <a:bodyPr/>
                     <a:lstStyle/>
                     <a:p>
                       <a:pPr algn="ctr"/>
                       <a:r>
-                        <a:rPr sz="1400" b="0">
+                        <a:rPr sz="2000" b="0" dirty="0">
                           <a:latin typeface="Cambria"/>
                         </a:rPr>
                         <a:t>1</a:t>
@@ -44258,12 +42176,12 @@
                 </a:tc>
                 <a:tc>
                   <a:txBody>
-                    <a:bodyPr wrap="none" lIns="27432" rIns="27432" tIns="27432" bIns="27432"/>
+                    <a:bodyPr/>
                     <a:lstStyle/>
                     <a:p>
                       <a:pPr algn="ctr"/>
                       <a:r>
-                        <a:rPr sz="1400" b="0">
+                        <a:rPr sz="2000" b="0">
                           <a:latin typeface="Cambria"/>
                         </a:rPr>
                         <a:t>2</a:t>
@@ -44274,12 +42192,12 @@
                 </a:tc>
                 <a:tc>
                   <a:txBody>
-                    <a:bodyPr wrap="none" lIns="27432" rIns="27432" tIns="27432" bIns="27432"/>
+                    <a:bodyPr/>
                     <a:lstStyle/>
                     <a:p>
                       <a:pPr algn="ctr"/>
                       <a:r>
-                        <a:rPr sz="1400" b="0">
+                        <a:rPr sz="2000" b="0">
                           <a:latin typeface="Cambria"/>
                         </a:rPr>
                         <a:t>3</a:t>
@@ -44290,12 +42208,12 @@
                 </a:tc>
                 <a:tc>
                   <a:txBody>
-                    <a:bodyPr wrap="none" lIns="27432" rIns="27432" tIns="27432" bIns="27432"/>
+                    <a:bodyPr/>
                     <a:lstStyle/>
                     <a:p>
                       <a:pPr algn="ctr"/>
                       <a:r>
-                        <a:rPr sz="1400" b="0">
+                        <a:rPr sz="2000" b="0">
                           <a:latin typeface="Cambria"/>
                         </a:rPr>
                         <a:t>4</a:t>
@@ -44306,12 +42224,12 @@
                 </a:tc>
                 <a:tc>
                   <a:txBody>
-                    <a:bodyPr wrap="none" lIns="27432" rIns="27432" tIns="27432" bIns="27432"/>
+                    <a:bodyPr/>
                     <a:lstStyle/>
                     <a:p>
                       <a:pPr algn="ctr"/>
                       <a:r>
-                        <a:rPr sz="1400" b="0">
+                        <a:rPr sz="2000" b="0">
                           <a:latin typeface="Cambria"/>
                         </a:rPr>
                         <a:t>5</a:t>
@@ -44320,16 +42238,21 @@
                   </a:txBody>
                   <a:tcPr/>
                 </a:tc>
+                <a:extLst>
+                  <a:ext uri="{0D108BD9-81ED-4DB2-BD59-A6C34878D82A}">
+                    <a16:rowId xmlns:a16="http://schemas.microsoft.com/office/drawing/2014/main" val="10000"/>
+                  </a:ext>
+                </a:extLst>
               </a:tr>
               <a:tr h="304800">
                 <a:tc>
                   <a:txBody>
-                    <a:bodyPr wrap="none" lIns="27432" rIns="27432" tIns="27432" bIns="27432"/>
+                    <a:bodyPr/>
                     <a:lstStyle/>
                     <a:p>
                       <a:pPr algn="r"/>
                       <a:r>
-                        <a:rPr sz="1400" b="1">
+                        <a:rPr sz="2000" b="1">
                           <a:latin typeface="Cambria"/>
                         </a:rPr>
                         <a:t>pmf p(x)</a:t>
@@ -44340,12 +42263,12 @@
                 </a:tc>
                 <a:tc>
                   <a:txBody>
-                    <a:bodyPr wrap="none" lIns="27432" rIns="27432" tIns="27432" bIns="27432"/>
+                    <a:bodyPr/>
                     <a:lstStyle/>
                     <a:p>
                       <a:pPr algn="ctr"/>
                       <a:r>
-                        <a:rPr sz="1400" b="0">
+                        <a:rPr sz="2000" b="0">
                           <a:latin typeface="Cambria"/>
                         </a:rPr>
                         <a:t>1/10</a:t>
@@ -44356,12 +42279,12 @@
                 </a:tc>
                 <a:tc>
                   <a:txBody>
-                    <a:bodyPr wrap="none" lIns="27432" rIns="27432" tIns="27432" bIns="27432"/>
+                    <a:bodyPr/>
                     <a:lstStyle/>
                     <a:p>
                       <a:pPr algn="ctr"/>
                       <a:r>
-                        <a:rPr sz="1400" b="0">
+                        <a:rPr sz="2000" b="0">
                           <a:latin typeface="Cambria"/>
                         </a:rPr>
                         <a:t>2/10</a:t>
@@ -44372,12 +42295,12 @@
                 </a:tc>
                 <a:tc>
                   <a:txBody>
-                    <a:bodyPr wrap="none" lIns="27432" rIns="27432" tIns="27432" bIns="27432"/>
+                    <a:bodyPr/>
                     <a:lstStyle/>
                     <a:p>
                       <a:pPr algn="ctr"/>
                       <a:r>
-                        <a:rPr sz="1400" b="0">
+                        <a:rPr sz="2000" b="0">
                           <a:latin typeface="Cambria"/>
                         </a:rPr>
                         <a:t>4/10</a:t>
@@ -44388,12 +42311,12 @@
                 </a:tc>
                 <a:tc>
                   <a:txBody>
-                    <a:bodyPr wrap="none" lIns="27432" rIns="27432" tIns="27432" bIns="27432"/>
+                    <a:bodyPr/>
                     <a:lstStyle/>
                     <a:p>
                       <a:pPr algn="ctr"/>
                       <a:r>
-                        <a:rPr sz="1400" b="0">
+                        <a:rPr sz="2000" b="0">
                           <a:latin typeface="Cambria"/>
                         </a:rPr>
                         <a:t>2/10</a:t>
@@ -44404,12 +42327,12 @@
                 </a:tc>
                 <a:tc>
                   <a:txBody>
-                    <a:bodyPr wrap="none" lIns="27432" rIns="27432" tIns="27432" bIns="27432"/>
+                    <a:bodyPr/>
                     <a:lstStyle/>
                     <a:p>
                       <a:pPr algn="ctr"/>
                       <a:r>
-                        <a:rPr sz="1400" b="0">
+                        <a:rPr sz="2000" b="0">
                           <a:latin typeface="Cambria"/>
                         </a:rPr>
                         <a:t>1/10</a:t>
@@ -44418,22 +42341,27 @@
                   </a:txBody>
                   <a:tcPr/>
                 </a:tc>
+                <a:extLst>
+                  <a:ext uri="{0D108BD9-81ED-4DB2-BD59-A6C34878D82A}">
+                    <a16:rowId xmlns:a16="http://schemas.microsoft.com/office/drawing/2014/main" val="10001"/>
+                  </a:ext>
+                </a:extLst>
               </a:tr>
               <a:tr h="304800">
                 <a:tc>
                   <a:txBody>
-                    <a:bodyPr wrap="none" lIns="27432" rIns="27432" tIns="27432" bIns="27432"/>
+                    <a:bodyPr/>
                     <a:lstStyle/>
                     <a:p>
                       <a:pPr algn="r"/>
                       <a:r>
-                        <a:rPr sz="1400" b="1">
+                        <a:rPr sz="2000" b="1">
                           <a:latin typeface="Cambria"/>
                         </a:rPr>
                         <a:t>(X − μ)</a:t>
                       </a:r>
                       <a:r>
-                        <a:rPr sz="1400" b="1" baseline="30000">
+                        <a:rPr sz="2000" b="1" baseline="30000">
                           <a:latin typeface="Cambria"/>
                         </a:rPr>
                         <a:t>2</a:t>
@@ -44444,12 +42372,12 @@
                 </a:tc>
                 <a:tc>
                   <a:txBody>
-                    <a:bodyPr wrap="none" lIns="27432" rIns="27432" tIns="27432" bIns="27432"/>
+                    <a:bodyPr/>
                     <a:lstStyle/>
                     <a:p>
                       <a:pPr algn="ctr"/>
                       <a:r>
-                        <a:rPr sz="1400" b="0">
+                        <a:rPr sz="2000" b="0">
                           <a:latin typeface="Cambria"/>
                         </a:rPr>
                         <a:t>4</a:t>
@@ -44460,12 +42388,12 @@
                 </a:tc>
                 <a:tc>
                   <a:txBody>
-                    <a:bodyPr wrap="none" lIns="27432" rIns="27432" tIns="27432" bIns="27432"/>
+                    <a:bodyPr/>
                     <a:lstStyle/>
                     <a:p>
                       <a:pPr algn="ctr"/>
                       <a:r>
-                        <a:rPr sz="1400" b="0">
+                        <a:rPr sz="2000" b="0">
                           <a:latin typeface="Cambria"/>
                         </a:rPr>
                         <a:t>1</a:t>
@@ -44476,12 +42404,12 @@
                 </a:tc>
                 <a:tc>
                   <a:txBody>
-                    <a:bodyPr wrap="none" lIns="27432" rIns="27432" tIns="27432" bIns="27432"/>
+                    <a:bodyPr/>
                     <a:lstStyle/>
                     <a:p>
                       <a:pPr algn="ctr"/>
                       <a:r>
-                        <a:rPr sz="1400" b="0">
+                        <a:rPr sz="2000" b="0">
                           <a:latin typeface="Cambria"/>
                         </a:rPr>
                         <a:t>0</a:t>
@@ -44492,12 +42420,12 @@
                 </a:tc>
                 <a:tc>
                   <a:txBody>
-                    <a:bodyPr wrap="none" lIns="27432" rIns="27432" tIns="27432" bIns="27432"/>
+                    <a:bodyPr/>
                     <a:lstStyle/>
                     <a:p>
                       <a:pPr algn="ctr"/>
                       <a:r>
-                        <a:rPr sz="1400" b="0">
+                        <a:rPr sz="2000" b="0">
                           <a:latin typeface="Cambria"/>
                         </a:rPr>
                         <a:t>1</a:t>
@@ -44508,12 +42436,12 @@
                 </a:tc>
                 <a:tc>
                   <a:txBody>
-                    <a:bodyPr wrap="none" lIns="27432" rIns="27432" tIns="27432" bIns="27432"/>
+                    <a:bodyPr/>
                     <a:lstStyle/>
                     <a:p>
                       <a:pPr algn="ctr"/>
                       <a:r>
-                        <a:rPr sz="1400" b="0">
+                        <a:rPr sz="2000" b="0" dirty="0">
                           <a:latin typeface="Cambria"/>
                         </a:rPr>
                         <a:t>4</a:t>
@@ -44522,6 +42450,11 @@
                   </a:txBody>
                   <a:tcPr/>
                 </a:tc>
+                <a:extLst>
+                  <a:ext uri="{0D108BD9-81ED-4DB2-BD59-A6C34878D82A}">
+                    <a16:rowId xmlns:a16="http://schemas.microsoft.com/office/drawing/2014/main" val="10002"/>
+                  </a:ext>
+                </a:extLst>
               </a:tr>
             </a:tbl>
           </a:graphicData>
@@ -44535,8 +42468,8 @@
         </p:nvSpPr>
         <p:spPr>
           <a:xfrm>
-            <a:off x="1564182" y="3386709"/>
-            <a:ext cx="9598588" cy="346329"/>
+            <a:off x="1564182" y="4375551"/>
+            <a:ext cx="9598588" cy="369332"/>
           </a:xfrm>
           <a:prstGeom prst="rect">
             <a:avLst/>
@@ -44544,25 +42477,37 @@
           <a:noFill/>
         </p:spPr>
         <p:txBody>
-          <a:bodyPr wrap="square" anchor="t" lIns="0" rIns="0" tIns="0" bIns="0">
+          <a:bodyPr wrap="square" lIns="0" tIns="0" rIns="0" bIns="0" anchor="t">
             <a:spAutoFit/>
           </a:bodyPr>
           <a:lstStyle/>
           <a:p>
             <a:r>
-              <a:rPr sz="1700" b="0">
+              <a:rPr sz="2400" b="0" dirty="0">
                 <a:latin typeface="Calibri"/>
               </a:rPr>
-              <a:t>Using the table we compute variance E((X − μ)</a:t>
-            </a:r>
-            <a:r>
-              <a:rPr sz="1700" b="0" baseline="30000">
+              <a:t>Using the table we compute variance E((X − </a:t>
+            </a:r>
+            <a:r>
+              <a:rPr sz="2400" b="0" dirty="0" err="1">
+                <a:latin typeface="Calibri"/>
+              </a:rPr>
+              <a:t>μ</a:t>
+            </a:r>
+            <a:r>
+              <a:rPr sz="2400" b="0" dirty="0">
+                <a:latin typeface="Calibri"/>
+              </a:rPr>
+              <a:t>)</a:t>
+            </a:r>
+            <a:r>
+              <a:rPr sz="2400" b="0" baseline="30000" dirty="0">
                 <a:latin typeface="Calibri"/>
               </a:rPr>
               <a:t>2</a:t>
             </a:r>
             <a:r>
-              <a:rPr sz="1700" b="0">
+              <a:rPr sz="2400" b="0" dirty="0">
                 <a:latin typeface="Calibri"/>
               </a:rPr>
               <a:t>):</a:t>
@@ -44578,8 +42523,8 @@
         </p:nvSpPr>
         <p:spPr>
           <a:xfrm>
-            <a:off x="1564182" y="3842766"/>
-            <a:ext cx="9598588" cy="346329"/>
+            <a:off x="1564182" y="4831608"/>
+            <a:ext cx="9598588" cy="369332"/>
           </a:xfrm>
           <a:prstGeom prst="rect">
             <a:avLst/>
@@ -44587,14 +42532,14 @@
           <a:noFill/>
         </p:spPr>
         <p:txBody>
-          <a:bodyPr wrap="square" anchor="t" lIns="0" rIns="0" tIns="0" bIns="0">
+          <a:bodyPr wrap="square" lIns="0" tIns="0" rIns="0" bIns="0" anchor="t">
             <a:spAutoFit/>
           </a:bodyPr>
           <a:lstStyle/>
           <a:p>
             <a:pPr algn="ctr"/>
             <a:r>
-              <a:rPr sz="1700" b="0">
+              <a:rPr sz="2400" b="0" dirty="0">
                 <a:latin typeface="Cambria"/>
               </a:rPr>
               <a:t>1/10 · 4 + 2/10 · 1 + 4/10 · 0 + 2/10 · 1 + 1/10 · 4 = 1.2</a:t>
@@ -44610,8 +42555,8 @@
         </p:nvSpPr>
         <p:spPr>
           <a:xfrm>
-            <a:off x="1564182" y="4371975"/>
-            <a:ext cx="9598588" cy="346329"/>
+            <a:off x="1564182" y="5592554"/>
+            <a:ext cx="9598588" cy="369332"/>
           </a:xfrm>
           <a:prstGeom prst="rect">
             <a:avLst/>
@@ -44619,13 +42564,13 @@
           <a:noFill/>
         </p:spPr>
         <p:txBody>
-          <a:bodyPr wrap="square" anchor="t" lIns="0" rIns="0" tIns="0" bIns="0">
+          <a:bodyPr wrap="square" lIns="0" tIns="0" rIns="0" bIns="0" anchor="t">
             <a:spAutoFit/>
           </a:bodyPr>
           <a:lstStyle/>
           <a:p>
             <a:r>
-              <a:rPr sz="1700" b="0">
+              <a:rPr sz="2400" b="0">
                 <a:latin typeface="Calibri"/>
               </a:rPr>
               <a:t>The standard deviation is then σ = √1.2.</a:t>
@@ -44651,7 +42596,13 @@
   <p:cSld>
     <p:spTree>
       <p:nvGrpSpPr>
-        <p:cNvPr id="1" name=""/>
+        <p:cNvPr id="1" name="">
+          <a:extLst>
+            <a:ext uri="{FF2B5EF4-FFF2-40B4-BE49-F238E27FC236}">
+              <a16:creationId xmlns:a16="http://schemas.microsoft.com/office/drawing/2014/main" id="{51F75882-1C38-BA47-09AA-FB93D5540831}"/>
+            </a:ext>
+          </a:extLst>
+        </p:cNvPr>
         <p:cNvGrpSpPr/>
         <p:nvPr/>
       </p:nvGrpSpPr>
@@ -44665,7 +42616,13 @@
       </p:grpSpPr>
       <p:sp>
         <p:nvSpPr>
-          <p:cNvPr id="2" name="Title 1"/>
+          <p:cNvPr id="2" name="Title 1">
+            <a:extLst>
+              <a:ext uri="{FF2B5EF4-FFF2-40B4-BE49-F238E27FC236}">
+                <a16:creationId xmlns:a16="http://schemas.microsoft.com/office/drawing/2014/main" id="{32E31EFA-68DB-DEC6-6192-8A72DC8EF08E}"/>
+              </a:ext>
+            </a:extLst>
+          </p:cNvPr>
           <p:cNvSpPr>
             <a:spLocks noGrp="1"/>
           </p:cNvSpPr>
@@ -44673,37 +42630,10 @@
             <p:ph type="title"/>
           </p:nvPr>
         </p:nvSpPr>
-        <p:spPr/>
-        <p:txBody>
-          <a:bodyPr/>
-          <a:lstStyle/>
-          <a:p>
-            <a:r>
-              <a:rPr lang="en-US" dirty="0"/>
-              <a:t>Algebra </a:t>
-            </a:r>
-            <a:r>
-              <a:rPr lang="en-US"/>
-              <a:t>with Expectation and Variance</a:t>
-            </a:r>
-            <a:endParaRPr lang="en-US" dirty="0"/>
-          </a:p>
-        </p:txBody>
-      </p:sp>
-      <p:sp>
-        <p:nvSpPr>
-          <p:cNvPr id="3" name="Text Placeholder 2"/>
-          <p:cNvSpPr>
-            <a:spLocks noGrp="1"/>
-          </p:cNvSpPr>
-          <p:nvPr>
-            <p:ph type="body" sz="half" idx="1"/>
-          </p:nvPr>
-        </p:nvSpPr>
         <p:spPr>
           <a:xfrm>
-            <a:off x="1576916" y="2017713"/>
-            <a:ext cx="9339899" cy="4114800"/>
+            <a:off x="1564515" y="-169334"/>
+            <a:ext cx="10390716" cy="1143000"/>
           </a:xfrm>
         </p:spPr>
         <p:txBody>
@@ -44712,352 +42642,45 @@
           <a:p>
             <a:r>
               <a:rPr lang="en-US" dirty="0"/>
-              <a:t>Expectation is a linear operator that can be distributed across a function of a random variable, X, but variance is not </a:t>
-            </a:r>
-          </a:p>
-          <a:p>
-            <a:endParaRPr lang="en-US" dirty="0"/>
-          </a:p>
-          <a:p>
-            <a:r>
-              <a:rPr lang="en-US" dirty="0"/>
-              <a:t>What is </a:t>
-            </a:r>
-            <a:r>
-              <a:rPr lang="en-US" i="1" dirty="0"/>
-              <a:t>E</a:t>
-            </a:r>
-            <a:r>
-              <a:rPr lang="en-US" dirty="0"/>
-              <a:t>{a + </a:t>
-            </a:r>
-            <a:r>
-              <a:rPr lang="en-US" dirty="0" err="1"/>
-              <a:t>bX</a:t>
-            </a:r>
-            <a:r>
-              <a:rPr lang="en-US" dirty="0"/>
-              <a:t>}</a:t>
-            </a:r>
-          </a:p>
-          <a:p>
-            <a:endParaRPr lang="en-US" dirty="0"/>
-          </a:p>
-          <a:p>
-            <a:r>
-              <a:rPr lang="en-US" dirty="0"/>
-              <a:t> What is </a:t>
-            </a:r>
-            <a:r>
-              <a:rPr lang="en-US" i="1" dirty="0" err="1"/>
-              <a:t>Var</a:t>
-            </a:r>
-            <a:r>
-              <a:rPr lang="en-US" dirty="0"/>
-              <a:t>{a + </a:t>
-            </a:r>
-            <a:r>
-              <a:rPr lang="en-US" dirty="0" err="1"/>
-              <a:t>bX</a:t>
-            </a:r>
-            <a:r>
-              <a:rPr lang="en-US" dirty="0"/>
-              <a:t>}</a:t>
-            </a:r>
-          </a:p>
-          <a:p>
-            <a:endParaRPr lang="en-US" dirty="0"/>
+              <a:t>Algebra with Expectation and Variance</a:t>
+            </a:r>
           </a:p>
         </p:txBody>
       </p:sp>
-      <p:sp>
-        <p:nvSpPr>
-          <p:cNvPr id="6" name="Rectangle 5"/>
-          <p:cNvSpPr>
-            <a:spLocks noChangeArrowheads="1"/>
-          </p:cNvSpPr>
+      <p:pic>
+        <p:nvPicPr>
+          <p:cNvPr id="5" name="Picture 4" descr="A math equations on a white background&#10;&#10;Description automatically generated">
+            <a:extLst>
+              <a:ext uri="{FF2B5EF4-FFF2-40B4-BE49-F238E27FC236}">
+                <a16:creationId xmlns:a16="http://schemas.microsoft.com/office/drawing/2014/main" id="{F5F3994B-C255-292C-9A3D-C6AC71E74A04}"/>
+              </a:ext>
+            </a:extLst>
+          </p:cNvPr>
+          <p:cNvPicPr>
+            <a:picLocks noChangeAspect="1"/>
+          </p:cNvPicPr>
           <p:nvPr/>
-        </p:nvSpPr>
-        <p:spPr bwMode="auto">
+        </p:nvPicPr>
+        <p:blipFill>
+          <a:blip r:embed="rId2"/>
+          <a:stretch>
+            <a:fillRect/>
+          </a:stretch>
+        </p:blipFill>
+        <p:spPr>
           <a:xfrm>
-            <a:off x="1576916" y="5435581"/>
-            <a:ext cx="8677469" cy="954107"/>
+            <a:off x="2282657" y="1143000"/>
+            <a:ext cx="7626686" cy="5618163"/>
           </a:xfrm>
           <a:prstGeom prst="rect">
             <a:avLst/>
           </a:prstGeom>
-          <a:noFill/>
-          <a:ln>
-            <a:noFill/>
-          </a:ln>
-          <a:extLst>
-            <a:ext uri="{909E8E84-426E-40DD-AFC4-6F175D3DCCD1}">
-              <a14:hiddenFill xmlns:a14="http://schemas.microsoft.com/office/drawing/2010/main">
-                <a:solidFill>
-                  <a:srgbClr val="FFFFFF"/>
-                </a:solidFill>
-              </a14:hiddenFill>
-            </a:ext>
-            <a:ext uri="{91240B29-F687-4F45-9708-019B960494DF}">
-              <a14:hiddenLine xmlns:a14="http://schemas.microsoft.com/office/drawing/2010/main" w="9525">
-                <a:solidFill>
-                  <a:srgbClr val="000000"/>
-                </a:solidFill>
-                <a:miter lim="800000"/>
-                <a:headEnd/>
-                <a:tailEnd/>
-              </a14:hiddenLine>
-            </a:ext>
-          </a:extLst>
         </p:spPr>
-        <p:txBody>
-          <a:bodyPr wrap="square">
-            <a:spAutoFit/>
-          </a:bodyPr>
-          <a:lstStyle>
-            <a:lvl1pPr>
-              <a:spcBef>
-                <a:spcPct val="20000"/>
-              </a:spcBef>
-              <a:buClr>
-                <a:schemeClr val="folHlink"/>
-              </a:buClr>
-              <a:buSzPct val="60000"/>
-              <a:buFont typeface="Wingdings" charset="2"/>
-              <a:buChar char="n"/>
-              <a:defRPr sz="3200">
-                <a:solidFill>
-                  <a:schemeClr val="tx1"/>
-                </a:solidFill>
-                <a:latin typeface="Tahoma" charset="0"/>
-              </a:defRPr>
-            </a:lvl1pPr>
-            <a:lvl2pPr marL="742950" indent="-285750">
-              <a:spcBef>
-                <a:spcPct val="20000"/>
-              </a:spcBef>
-              <a:buClr>
-                <a:schemeClr val="hlink"/>
-              </a:buClr>
-              <a:buSzPct val="55000"/>
-              <a:buFont typeface="Wingdings" charset="2"/>
-              <a:buChar char="n"/>
-              <a:defRPr sz="2800">
-                <a:solidFill>
-                  <a:schemeClr val="tx1"/>
-                </a:solidFill>
-                <a:latin typeface="Tahoma" charset="0"/>
-              </a:defRPr>
-            </a:lvl2pPr>
-            <a:lvl3pPr marL="1143000" indent="-228600">
-              <a:spcBef>
-                <a:spcPct val="20000"/>
-              </a:spcBef>
-              <a:buClr>
-                <a:schemeClr val="folHlink"/>
-              </a:buClr>
-              <a:buSzPct val="50000"/>
-              <a:buFont typeface="Wingdings" charset="2"/>
-              <a:buChar char="n"/>
-              <a:defRPr sz="2400">
-                <a:solidFill>
-                  <a:schemeClr val="tx1"/>
-                </a:solidFill>
-                <a:latin typeface="Tahoma" charset="0"/>
-              </a:defRPr>
-            </a:lvl3pPr>
-            <a:lvl4pPr marL="1600200" indent="-228600">
-              <a:spcBef>
-                <a:spcPct val="20000"/>
-              </a:spcBef>
-              <a:buClr>
-                <a:schemeClr val="accent2"/>
-              </a:buClr>
-              <a:buSzPct val="55000"/>
-              <a:buFont typeface="Wingdings" charset="2"/>
-              <a:buChar char="n"/>
-              <a:defRPr sz="2000">
-                <a:solidFill>
-                  <a:schemeClr val="tx1"/>
-                </a:solidFill>
-                <a:latin typeface="Tahoma" charset="0"/>
-              </a:defRPr>
-            </a:lvl4pPr>
-            <a:lvl5pPr marL="2057400" indent="-228600">
-              <a:spcBef>
-                <a:spcPct val="20000"/>
-              </a:spcBef>
-              <a:buClr>
-                <a:schemeClr val="accent1"/>
-              </a:buClr>
-              <a:buSzPct val="50000"/>
-              <a:buFont typeface="Wingdings" charset="2"/>
-              <a:buChar char="n"/>
-              <a:defRPr sz="2000">
-                <a:solidFill>
-                  <a:schemeClr val="tx1"/>
-                </a:solidFill>
-                <a:latin typeface="Tahoma" charset="0"/>
-              </a:defRPr>
-            </a:lvl5pPr>
-            <a:lvl6pPr marL="2514600" indent="-228600" eaLnBrk="0" fontAlgn="base" hangingPunct="0">
-              <a:spcBef>
-                <a:spcPct val="20000"/>
-              </a:spcBef>
-              <a:spcAft>
-                <a:spcPct val="0"/>
-              </a:spcAft>
-              <a:buClr>
-                <a:schemeClr val="accent1"/>
-              </a:buClr>
-              <a:buSzPct val="50000"/>
-              <a:buFont typeface="Wingdings" charset="2"/>
-              <a:buChar char="n"/>
-              <a:defRPr sz="2000">
-                <a:solidFill>
-                  <a:schemeClr val="tx1"/>
-                </a:solidFill>
-                <a:latin typeface="Tahoma" charset="0"/>
-              </a:defRPr>
-            </a:lvl6pPr>
-            <a:lvl7pPr marL="2971800" indent="-228600" eaLnBrk="0" fontAlgn="base" hangingPunct="0">
-              <a:spcBef>
-                <a:spcPct val="20000"/>
-              </a:spcBef>
-              <a:spcAft>
-                <a:spcPct val="0"/>
-              </a:spcAft>
-              <a:buClr>
-                <a:schemeClr val="accent1"/>
-              </a:buClr>
-              <a:buSzPct val="50000"/>
-              <a:buFont typeface="Wingdings" charset="2"/>
-              <a:buChar char="n"/>
-              <a:defRPr sz="2000">
-                <a:solidFill>
-                  <a:schemeClr val="tx1"/>
-                </a:solidFill>
-                <a:latin typeface="Tahoma" charset="0"/>
-              </a:defRPr>
-            </a:lvl7pPr>
-            <a:lvl8pPr marL="3429000" indent="-228600" eaLnBrk="0" fontAlgn="base" hangingPunct="0">
-              <a:spcBef>
-                <a:spcPct val="20000"/>
-              </a:spcBef>
-              <a:spcAft>
-                <a:spcPct val="0"/>
-              </a:spcAft>
-              <a:buClr>
-                <a:schemeClr val="accent1"/>
-              </a:buClr>
-              <a:buSzPct val="50000"/>
-              <a:buFont typeface="Wingdings" charset="2"/>
-              <a:buChar char="n"/>
-              <a:defRPr sz="2000">
-                <a:solidFill>
-                  <a:schemeClr val="tx1"/>
-                </a:solidFill>
-                <a:latin typeface="Tahoma" charset="0"/>
-              </a:defRPr>
-            </a:lvl8pPr>
-            <a:lvl9pPr marL="3886200" indent="-228600" eaLnBrk="0" fontAlgn="base" hangingPunct="0">
-              <a:spcBef>
-                <a:spcPct val="20000"/>
-              </a:spcBef>
-              <a:spcAft>
-                <a:spcPct val="0"/>
-              </a:spcAft>
-              <a:buClr>
-                <a:schemeClr val="accent1"/>
-              </a:buClr>
-              <a:buSzPct val="50000"/>
-              <a:buFont typeface="Wingdings" charset="2"/>
-              <a:buChar char="n"/>
-              <a:defRPr sz="2000">
-                <a:solidFill>
-                  <a:schemeClr val="tx1"/>
-                </a:solidFill>
-                <a:latin typeface="Tahoma" charset="0"/>
-              </a:defRPr>
-            </a:lvl9pPr>
-          </a:lstStyle>
-          <a:p>
-            <a:pPr algn="ctr">
-              <a:spcBef>
-                <a:spcPct val="0"/>
-              </a:spcBef>
-              <a:buClrTx/>
-              <a:buSzTx/>
-              <a:buNone/>
-            </a:pPr>
-            <a:r>
-              <a:rPr lang="en-US" altLang="en-US" sz="2800" dirty="0"/>
-              <a:t>Recall:</a:t>
-            </a:r>
-            <a:r>
-              <a:rPr lang="en-US" altLang="en-US" sz="2800" i="1" dirty="0"/>
-              <a:t> </a:t>
-            </a:r>
-            <a:r>
-              <a:rPr lang="en-US" altLang="en-US" sz="2800" i="1" dirty="0" err="1"/>
-              <a:t>Var</a:t>
-            </a:r>
-            <a:r>
-              <a:rPr lang="en-US" altLang="en-US" sz="2800" dirty="0"/>
-              <a:t>{X} = </a:t>
-            </a:r>
-            <a:r>
-              <a:rPr lang="en-US" sz="2800" i="1" dirty="0"/>
-              <a:t>E</a:t>
-            </a:r>
-            <a:r>
-              <a:rPr lang="en-US" sz="2800" dirty="0"/>
-              <a:t>{X</a:t>
-            </a:r>
-            <a:r>
-              <a:rPr lang="en-US" sz="2800" baseline="30000" dirty="0"/>
-              <a:t>2</a:t>
-            </a:r>
-            <a:r>
-              <a:rPr lang="en-US" sz="2800" dirty="0"/>
-              <a:t>} </a:t>
-            </a:r>
-            <a:r>
-              <a:rPr lang="en-US" altLang="en-US" sz="2800" dirty="0"/>
-              <a:t>- (</a:t>
-            </a:r>
-            <a:r>
-              <a:rPr lang="en-US" sz="2800" i="1" dirty="0"/>
-              <a:t>E</a:t>
-            </a:r>
-            <a:r>
-              <a:rPr lang="en-US" sz="2800" dirty="0"/>
-              <a:t>{X})</a:t>
-            </a:r>
-            <a:r>
-              <a:rPr lang="en-US" sz="2800" baseline="30000" dirty="0"/>
-              <a:t>2</a:t>
-            </a:r>
-            <a:endParaRPr lang="en-US" sz="2800" dirty="0"/>
-          </a:p>
-          <a:p>
-            <a:pPr algn="ctr" eaLnBrk="1" hangingPunct="1">
-              <a:spcBef>
-                <a:spcPct val="0"/>
-              </a:spcBef>
-              <a:buClrTx/>
-              <a:buSzTx/>
-              <a:buFont typeface="Wingdings" charset="2"/>
-              <a:buNone/>
-            </a:pPr>
-            <a:endParaRPr lang="en-US" altLang="en-US" sz="2800" dirty="0"/>
-          </a:p>
-        </p:txBody>
-      </p:sp>
+      </p:pic>
     </p:spTree>
     <p:extLst>
       <p:ext uri="{BB962C8B-B14F-4D97-AF65-F5344CB8AC3E}">
-        <p14:creationId xmlns:p14="http://schemas.microsoft.com/office/powerpoint/2010/main" val="1005111806"/>
+        <p14:creationId xmlns:p14="http://schemas.microsoft.com/office/powerpoint/2010/main" val="1689558431"/>
       </p:ext>
     </p:extLst>
   </p:cSld>
@@ -45094,26 +42717,20 @@
             <p:ph type="title"/>
           </p:nvPr>
         </p:nvSpPr>
-        <p:spPr>
-          <a:xfrm>
-            <a:off x="541175" y="412264"/>
-            <a:ext cx="11925301" cy="1143000"/>
-          </a:xfrm>
-        </p:spPr>
+        <p:spPr/>
         <p:txBody>
-          <a:bodyPr>
-            <a:normAutofit/>
-          </a:bodyPr>
+          <a:bodyPr/>
           <a:lstStyle/>
           <a:p>
             <a:r>
+              <a:rPr lang="en-US" dirty="0"/>
+              <a:t>Algebra </a:t>
+            </a:r>
+            <a:r>
               <a:rPr lang="en-US"/>
-              <a:t>Answer: Algebra </a:t>
-            </a:r>
-            <a:r>
-              <a:rPr lang="en-US" dirty="0"/>
               <a:t>with Expectation and Variance</a:t>
             </a:r>
+            <a:endParaRPr lang="en-US" dirty="0"/>
           </a:p>
         </p:txBody>
       </p:sp>
@@ -45130,7 +42747,7 @@
         <p:spPr>
           <a:xfrm>
             <a:off x="1576916" y="2017713"/>
-            <a:ext cx="10179655" cy="4114800"/>
+            <a:ext cx="9339899" cy="4114800"/>
           </a:xfrm>
         </p:spPr>
         <p:txBody>
@@ -45138,6 +42755,19 @@
           <a:lstStyle/>
           <a:p>
             <a:r>
+              <a:rPr lang="en-US" dirty="0"/>
+              <a:t>Expectation is a linear operator that can be distributed across a function of a random variable, X, but variance is not </a:t>
+            </a:r>
+          </a:p>
+          <a:p>
+            <a:endParaRPr lang="en-US" dirty="0"/>
+          </a:p>
+          <a:p>
+            <a:r>
+              <a:rPr lang="en-US" dirty="0"/>
+              <a:t>What is </a:t>
+            </a:r>
+            <a:r>
               <a:rPr lang="en-US" i="1" dirty="0"/>
               <a:t>E</a:t>
             </a:r>
@@ -45151,13 +42781,17 @@
             </a:r>
             <a:r>
               <a:rPr lang="en-US" dirty="0"/>
-              <a:t>} = E{a} +b*E{X} = a + b*E{X}</a:t>
+              <a:t>}</a:t>
             </a:r>
           </a:p>
           <a:p>
             <a:endParaRPr lang="en-US" dirty="0"/>
           </a:p>
           <a:p>
+            <a:r>
+              <a:rPr lang="en-US" dirty="0"/>
+              <a:t> What is </a:t>
+            </a:r>
             <a:r>
               <a:rPr lang="en-US" i="1" dirty="0" err="1"/>
               <a:t>Var</a:t>
@@ -45172,201 +42806,7 @@
             </a:r>
             <a:r>
               <a:rPr lang="en-US" dirty="0"/>
-              <a:t>} = </a:t>
-            </a:r>
-            <a:r>
-              <a:rPr lang="en-US" i="1" dirty="0"/>
-              <a:t>E</a:t>
-            </a:r>
-            <a:r>
-              <a:rPr lang="en-US" dirty="0"/>
-              <a:t>{(a + </a:t>
-            </a:r>
-            <a:r>
-              <a:rPr lang="en-US" dirty="0" err="1"/>
-              <a:t>bX</a:t>
-            </a:r>
-            <a:r>
-              <a:rPr lang="en-US" dirty="0"/>
-              <a:t>)</a:t>
-            </a:r>
-            <a:r>
-              <a:rPr lang="en-US" baseline="30000" dirty="0"/>
-              <a:t>2</a:t>
-            </a:r>
-            <a:r>
-              <a:rPr lang="en-US" dirty="0"/>
-              <a:t>} </a:t>
-            </a:r>
-            <a:r>
-              <a:rPr lang="en-US" altLang="en-US" dirty="0"/>
-              <a:t>- (</a:t>
-            </a:r>
-            <a:r>
-              <a:rPr lang="en-US" i="1" dirty="0"/>
-              <a:t>E</a:t>
-            </a:r>
-            <a:r>
-              <a:rPr lang="en-US" dirty="0"/>
-              <a:t>{a + </a:t>
-            </a:r>
-            <a:r>
-              <a:rPr lang="en-US" dirty="0" err="1"/>
-              <a:t>bX</a:t>
-            </a:r>
-            <a:r>
-              <a:rPr lang="en-US" dirty="0"/>
-              <a:t>})</a:t>
-            </a:r>
-            <a:r>
-              <a:rPr lang="en-US" baseline="30000" dirty="0"/>
-              <a:t>2</a:t>
-            </a:r>
-            <a:r>
-              <a:rPr lang="en-US" dirty="0"/>
-              <a:t> = E{a</a:t>
-            </a:r>
-            <a:r>
-              <a:rPr lang="en-US" baseline="30000" dirty="0"/>
-              <a:t>2 </a:t>
-            </a:r>
-            <a:r>
-              <a:rPr lang="en-US" dirty="0"/>
-              <a:t>+ 2abX + b</a:t>
-            </a:r>
-            <a:r>
-              <a:rPr lang="en-US" baseline="30000" dirty="0"/>
-              <a:t>2</a:t>
-            </a:r>
-            <a:r>
-              <a:rPr lang="en-US" dirty="0"/>
-              <a:t>X</a:t>
-            </a:r>
-            <a:r>
-              <a:rPr lang="en-US" baseline="30000" dirty="0"/>
-              <a:t>2</a:t>
-            </a:r>
-            <a:r>
-              <a:rPr lang="en-US" dirty="0"/>
-              <a:t>} </a:t>
-            </a:r>
-            <a:r>
-              <a:rPr lang="mr-IN" dirty="0"/>
-              <a:t>–</a:t>
-            </a:r>
-            <a:r>
-              <a:rPr lang="en-US" dirty="0"/>
-              <a:t> (a + b*E{X})</a:t>
-            </a:r>
-            <a:r>
-              <a:rPr lang="en-US" baseline="30000" dirty="0"/>
-              <a:t>2</a:t>
-            </a:r>
-          </a:p>
-          <a:p>
-            <a:r>
-              <a:rPr lang="en-US" dirty="0"/>
-              <a:t>a</a:t>
-            </a:r>
-            <a:r>
-              <a:rPr lang="en-US" baseline="30000" dirty="0"/>
-              <a:t>2</a:t>
-            </a:r>
-            <a:r>
-              <a:rPr lang="en-US" dirty="0"/>
-              <a:t>+2abE{X}+b</a:t>
-            </a:r>
-            <a:r>
-              <a:rPr lang="en-US" baseline="30000" dirty="0"/>
-              <a:t>2 </a:t>
-            </a:r>
-            <a:r>
-              <a:rPr lang="en-US" dirty="0"/>
-              <a:t>E{X</a:t>
-            </a:r>
-            <a:r>
-              <a:rPr lang="en-US" baseline="30000" dirty="0"/>
-              <a:t>2</a:t>
-            </a:r>
-            <a:r>
-              <a:rPr lang="en-US" dirty="0"/>
-              <a:t>} </a:t>
-            </a:r>
-            <a:r>
-              <a:rPr lang="mr-IN" dirty="0"/>
-              <a:t>–</a:t>
-            </a:r>
-            <a:r>
-              <a:rPr lang="en-US" dirty="0"/>
-              <a:t> (a</a:t>
-            </a:r>
-            <a:r>
-              <a:rPr lang="en-US" baseline="30000" dirty="0"/>
-              <a:t>2</a:t>
-            </a:r>
-            <a:r>
-              <a:rPr lang="en-US" dirty="0"/>
-              <a:t>+2abE{X}+b</a:t>
-            </a:r>
-            <a:r>
-              <a:rPr lang="en-US" baseline="30000" dirty="0"/>
-              <a:t>2 </a:t>
-            </a:r>
-            <a:r>
-              <a:rPr lang="en-US" dirty="0"/>
-              <a:t>E{X}</a:t>
-            </a:r>
-            <a:r>
-              <a:rPr lang="en-US" baseline="30000" dirty="0"/>
-              <a:t>2</a:t>
-            </a:r>
-            <a:r>
-              <a:rPr lang="en-US" dirty="0"/>
-              <a:t>)</a:t>
-            </a:r>
-          </a:p>
-          <a:p>
-            <a:r>
-              <a:rPr lang="en-US" dirty="0"/>
-              <a:t>b</a:t>
-            </a:r>
-            <a:r>
-              <a:rPr lang="en-US" baseline="30000" dirty="0"/>
-              <a:t>2</a:t>
-            </a:r>
-            <a:r>
-              <a:rPr lang="en-US" dirty="0"/>
-              <a:t>(E{X</a:t>
-            </a:r>
-            <a:r>
-              <a:rPr lang="en-US" baseline="30000" dirty="0"/>
-              <a:t>2</a:t>
-            </a:r>
-            <a:r>
-              <a:rPr lang="en-US" dirty="0"/>
-              <a:t>} - E{X}</a:t>
-            </a:r>
-            <a:r>
-              <a:rPr lang="en-US" baseline="30000" dirty="0"/>
-              <a:t>2</a:t>
-            </a:r>
-            <a:r>
-              <a:rPr lang="en-US" dirty="0"/>
-              <a:t>)</a:t>
-            </a:r>
-          </a:p>
-          <a:p>
-            <a:r>
-              <a:rPr lang="en-US" dirty="0"/>
-              <a:t>b</a:t>
-            </a:r>
-            <a:r>
-              <a:rPr lang="en-US" baseline="30000" dirty="0"/>
-              <a:t>2</a:t>
-            </a:r>
-            <a:r>
-              <a:rPr lang="en-US" dirty="0"/>
-              <a:t>Var{X}</a:t>
+              <a:t>}</a:t>
             </a:r>
           </a:p>
           <a:p>
@@ -45377,7 +42817,7 @@
     </p:spTree>
     <p:extLst>
       <p:ext uri="{BB962C8B-B14F-4D97-AF65-F5344CB8AC3E}">
-        <p14:creationId xmlns:p14="http://schemas.microsoft.com/office/powerpoint/2010/main" val="1063733744"/>
+        <p14:creationId xmlns:p14="http://schemas.microsoft.com/office/powerpoint/2010/main" val="1005111806"/>
       </p:ext>
     </p:extLst>
   </p:cSld>
@@ -45456,12 +42896,12 @@
               <a:t>If X and Y are independent, what is </a:t>
             </a:r>
             <a:r>
-              <a:rPr lang="en-US" i="1" dirty="0" err="1"/>
+              <a:rPr lang="en-US" i="1" dirty="0"/>
               <a:t>Var</a:t>
             </a:r>
             <a:r>
               <a:rPr lang="en-US" dirty="0"/>
-              <a:t>{X + Y}?</a:t>
+              <a:t>{X + Y}? Let’s derive rather than look at rules</a:t>
             </a:r>
           </a:p>
           <a:p>
@@ -45479,7 +42919,7 @@
         </p:nvSpPr>
         <p:spPr bwMode="auto">
           <a:xfrm>
-            <a:off x="1390304" y="2804348"/>
+            <a:off x="1390304" y="3024479"/>
             <a:ext cx="8677469" cy="954107"/>
           </a:xfrm>
           <a:prstGeom prst="rect">

--- a/Day1_Probability/FW536_Day1_Morning_intro to probability_accessible.pptx
+++ b/Day1_Probability/FW536_Day1_Morning_intro to probability_accessible.pptx
@@ -574,7 +574,7 @@
               </a14:hiddenEffects>
             </a:ext>
             <a:ext uri="{FAA26D3D-D897-4be2-8F04-BA451C77F1D7}">
-              <ma14:placeholderFlag xmlns:ma14="http://schemas.microsoft.com/office/mac/drawingml/2011/main" xmlns="" val="1"/>
+              <ma14:placeholderFlag xmlns="" xmlns:ma14="http://schemas.microsoft.com/office/mac/drawingml/2011/main" val="1"/>
             </a:ext>
           </a:extLst>
         </p:spPr>
@@ -659,7 +659,7 @@
               </a14:hiddenEffects>
             </a:ext>
             <a:ext uri="{FAA26D3D-D897-4be2-8F04-BA451C77F1D7}">
-              <ma14:placeholderFlag xmlns:ma14="http://schemas.microsoft.com/office/mac/drawingml/2011/main" xmlns="" val="1"/>
+              <ma14:placeholderFlag xmlns="" xmlns:ma14="http://schemas.microsoft.com/office/mac/drawingml/2011/main" val="1"/>
             </a:ext>
           </a:extLst>
         </p:spPr>
@@ -744,7 +744,7 @@
               </a14:hiddenEffects>
             </a:ext>
             <a:ext uri="{FAA26D3D-D897-4be2-8F04-BA451C77F1D7}">
-              <ma14:placeholderFlag xmlns:ma14="http://schemas.microsoft.com/office/mac/drawingml/2011/main" xmlns="" val="1"/>
+              <ma14:placeholderFlag xmlns="" xmlns:ma14="http://schemas.microsoft.com/office/mac/drawingml/2011/main" val="1"/>
             </a:ext>
           </a:extLst>
         </p:spPr>
@@ -829,7 +829,7 @@
               </a14:hiddenEffects>
             </a:ext>
             <a:ext uri="{FAA26D3D-D897-4be2-8F04-BA451C77F1D7}">
-              <ma14:placeholderFlag xmlns:ma14="http://schemas.microsoft.com/office/mac/drawingml/2011/main" xmlns="" val="1"/>
+              <ma14:placeholderFlag xmlns="" xmlns:ma14="http://schemas.microsoft.com/office/mac/drawingml/2011/main" val="1"/>
             </a:ext>
           </a:extLst>
         </p:spPr>
@@ -914,7 +914,7 @@
               </a14:hiddenEffects>
             </a:ext>
             <a:ext uri="{FAA26D3D-D897-4be2-8F04-BA451C77F1D7}">
-              <ma14:placeholderFlag xmlns:ma14="http://schemas.microsoft.com/office/mac/drawingml/2011/main" xmlns="" val="1"/>
+              <ma14:placeholderFlag xmlns="" xmlns:ma14="http://schemas.microsoft.com/office/mac/drawingml/2011/main" val="1"/>
             </a:ext>
           </a:extLst>
         </p:spPr>
@@ -999,7 +999,7 @@
               </a14:hiddenEffects>
             </a:ext>
             <a:ext uri="{FAA26D3D-D897-4be2-8F04-BA451C77F1D7}">
-              <ma14:placeholderFlag xmlns:ma14="http://schemas.microsoft.com/office/mac/drawingml/2011/main" xmlns="" val="1"/>
+              <ma14:placeholderFlag xmlns="" xmlns:ma14="http://schemas.microsoft.com/office/mac/drawingml/2011/main" val="1"/>
             </a:ext>
           </a:extLst>
         </p:spPr>
@@ -1084,7 +1084,7 @@
               </a14:hiddenEffects>
             </a:ext>
             <a:ext uri="{FAA26D3D-D897-4be2-8F04-BA451C77F1D7}">
-              <ma14:placeholderFlag xmlns:ma14="http://schemas.microsoft.com/office/mac/drawingml/2011/main" xmlns="" val="1"/>
+              <ma14:placeholderFlag xmlns="" xmlns:ma14="http://schemas.microsoft.com/office/mac/drawingml/2011/main" val="1"/>
             </a:ext>
           </a:extLst>
         </p:spPr>
@@ -1169,7 +1169,7 @@
               </a14:hiddenEffects>
             </a:ext>
             <a:ext uri="{FAA26D3D-D897-4be2-8F04-BA451C77F1D7}">
-              <ma14:placeholderFlag xmlns:ma14="http://schemas.microsoft.com/office/mac/drawingml/2011/main" xmlns="" val="1"/>
+              <ma14:placeholderFlag xmlns="" xmlns:ma14="http://schemas.microsoft.com/office/mac/drawingml/2011/main" val="1"/>
             </a:ext>
           </a:extLst>
         </p:spPr>
@@ -1254,7 +1254,7 @@
               </a14:hiddenEffects>
             </a:ext>
             <a:ext uri="{FAA26D3D-D897-4be2-8F04-BA451C77F1D7}">
-              <ma14:placeholderFlag xmlns:ma14="http://schemas.microsoft.com/office/mac/drawingml/2011/main" xmlns="" val="1"/>
+              <ma14:placeholderFlag xmlns="" xmlns:ma14="http://schemas.microsoft.com/office/mac/drawingml/2011/main" val="1"/>
             </a:ext>
           </a:extLst>
         </p:spPr>
@@ -1339,7 +1339,7 @@
               </a14:hiddenEffects>
             </a:ext>
             <a:ext uri="{FAA26D3D-D897-4be2-8F04-BA451C77F1D7}">
-              <ma14:placeholderFlag xmlns:ma14="http://schemas.microsoft.com/office/mac/drawingml/2011/main" xmlns="" val="1"/>
+              <ma14:placeholderFlag xmlns="" xmlns:ma14="http://schemas.microsoft.com/office/mac/drawingml/2011/main" val="1"/>
             </a:ext>
           </a:extLst>
         </p:spPr>
@@ -1424,7 +1424,7 @@
               </a14:hiddenEffects>
             </a:ext>
             <a:ext uri="{FAA26D3D-D897-4be2-8F04-BA451C77F1D7}">
-              <ma14:placeholderFlag xmlns:ma14="http://schemas.microsoft.com/office/mac/drawingml/2011/main" xmlns="" val="1"/>
+              <ma14:placeholderFlag xmlns="" xmlns:ma14="http://schemas.microsoft.com/office/mac/drawingml/2011/main" val="1"/>
             </a:ext>
           </a:extLst>
         </p:spPr>
@@ -1509,7 +1509,7 @@
               </a14:hiddenEffects>
             </a:ext>
             <a:ext uri="{FAA26D3D-D897-4be2-8F04-BA451C77F1D7}">
-              <ma14:placeholderFlag xmlns:ma14="http://schemas.microsoft.com/office/mac/drawingml/2011/main" xmlns="" val="1"/>
+              <ma14:placeholderFlag xmlns="" xmlns:ma14="http://schemas.microsoft.com/office/mac/drawingml/2011/main" val="1"/>
             </a:ext>
           </a:extLst>
         </p:spPr>
@@ -1594,7 +1594,7 @@
               </a14:hiddenEffects>
             </a:ext>
             <a:ext uri="{FAA26D3D-D897-4be2-8F04-BA451C77F1D7}">
-              <ma14:placeholderFlag xmlns:ma14="http://schemas.microsoft.com/office/mac/drawingml/2011/main" xmlns="" val="1"/>
+              <ma14:placeholderFlag xmlns="" xmlns:ma14="http://schemas.microsoft.com/office/mac/drawingml/2011/main" val="1"/>
             </a:ext>
           </a:extLst>
         </p:spPr>
@@ -1679,7 +1679,7 @@
               </a14:hiddenEffects>
             </a:ext>
             <a:ext uri="{FAA26D3D-D897-4be2-8F04-BA451C77F1D7}">
-              <ma14:placeholderFlag xmlns:ma14="http://schemas.microsoft.com/office/mac/drawingml/2011/main" xmlns="" val="1"/>
+              <ma14:placeholderFlag xmlns="" xmlns:ma14="http://schemas.microsoft.com/office/mac/drawingml/2011/main" val="1"/>
             </a:ext>
           </a:extLst>
         </p:spPr>
@@ -1764,7 +1764,7 @@
               </a14:hiddenEffects>
             </a:ext>
             <a:ext uri="{FAA26D3D-D897-4be2-8F04-BA451C77F1D7}">
-              <ma14:placeholderFlag xmlns:ma14="http://schemas.microsoft.com/office/mac/drawingml/2011/main" xmlns="" val="1"/>
+              <ma14:placeholderFlag xmlns="" xmlns:ma14="http://schemas.microsoft.com/office/mac/drawingml/2011/main" val="1"/>
             </a:ext>
           </a:extLst>
         </p:spPr>
@@ -1849,7 +1849,7 @@
               </a14:hiddenEffects>
             </a:ext>
             <a:ext uri="{FAA26D3D-D897-4be2-8F04-BA451C77F1D7}">
-              <ma14:placeholderFlag xmlns:ma14="http://schemas.microsoft.com/office/mac/drawingml/2011/main" xmlns="" val="1"/>
+              <ma14:placeholderFlag xmlns="" xmlns:ma14="http://schemas.microsoft.com/office/mac/drawingml/2011/main" val="1"/>
             </a:ext>
           </a:extLst>
         </p:spPr>
@@ -1934,7 +1934,7 @@
               </a14:hiddenEffects>
             </a:ext>
             <a:ext uri="{FAA26D3D-D897-4be2-8F04-BA451C77F1D7}">
-              <ma14:placeholderFlag xmlns:ma14="http://schemas.microsoft.com/office/mac/drawingml/2011/main" xmlns="" val="1"/>
+              <ma14:placeholderFlag xmlns="" xmlns:ma14="http://schemas.microsoft.com/office/mac/drawingml/2011/main" val="1"/>
             </a:ext>
           </a:extLst>
         </p:spPr>
@@ -2019,7 +2019,7 @@
               </a14:hiddenEffects>
             </a:ext>
             <a:ext uri="{FAA26D3D-D897-4be2-8F04-BA451C77F1D7}">
-              <ma14:placeholderFlag xmlns:ma14="http://schemas.microsoft.com/office/mac/drawingml/2011/main" xmlns="" val="1"/>
+              <ma14:placeholderFlag xmlns="" xmlns:ma14="http://schemas.microsoft.com/office/mac/drawingml/2011/main" val="1"/>
             </a:ext>
           </a:extLst>
         </p:spPr>
@@ -2104,7 +2104,7 @@
               </a14:hiddenEffects>
             </a:ext>
             <a:ext uri="{FAA26D3D-D897-4be2-8F04-BA451C77F1D7}">
-              <ma14:placeholderFlag xmlns:ma14="http://schemas.microsoft.com/office/mac/drawingml/2011/main" xmlns="" val="1"/>
+              <ma14:placeholderFlag xmlns="" xmlns:ma14="http://schemas.microsoft.com/office/mac/drawingml/2011/main" val="1"/>
             </a:ext>
           </a:extLst>
         </p:spPr>
@@ -2390,7 +2390,7 @@
               </a14:hiddenEffects>
             </a:ext>
             <a:ext uri="{FAA26D3D-D897-4be2-8F04-BA451C77F1D7}">
-              <ma14:placeholderFlag xmlns:ma14="http://schemas.microsoft.com/office/mac/drawingml/2011/main" xmlns="" val="1"/>
+              <ma14:placeholderFlag xmlns="" xmlns:ma14="http://schemas.microsoft.com/office/mac/drawingml/2011/main" val="1"/>
             </a:ext>
           </a:extLst>
         </p:spPr>
@@ -3078,7 +3078,7 @@
               </a14:hiddenEffects>
             </a:ext>
             <a:ext uri="{FAA26D3D-D897-4be2-8F04-BA451C77F1D7}">
-              <ma14:placeholderFlag xmlns="" xmlns:ma14="http://schemas.microsoft.com/office/mac/drawingml/2011/main" val="1"/>
+              <ma14:placeholderFlag xmlns:ma14="http://schemas.microsoft.com/office/mac/drawingml/2011/main" xmlns="" val="1"/>
             </a:ext>
           </a:extLst>
         </p:spPr>
@@ -3354,7 +3354,7 @@
               </a14:hiddenEffects>
             </a:ext>
             <a:ext uri="{FAA26D3D-D897-4be2-8F04-BA451C77F1D7}">
-              <ma14:placeholderFlag xmlns="" xmlns:ma14="http://schemas.microsoft.com/office/mac/drawingml/2011/main" val="1"/>
+              <ma14:placeholderFlag xmlns:ma14="http://schemas.microsoft.com/office/mac/drawingml/2011/main" xmlns="" val="1"/>
             </a:ext>
           </a:extLst>
         </p:spPr>
@@ -3439,7 +3439,7 @@
               </a14:hiddenEffects>
             </a:ext>
             <a:ext uri="{FAA26D3D-D897-4be2-8F04-BA451C77F1D7}">
-              <ma14:placeholderFlag xmlns:ma14="http://schemas.microsoft.com/office/mac/drawingml/2011/main" xmlns="" val="1"/>
+              <ma14:placeholderFlag xmlns="" xmlns:ma14="http://schemas.microsoft.com/office/mac/drawingml/2011/main" val="1"/>
             </a:ext>
           </a:extLst>
         </p:spPr>
@@ -3524,7 +3524,7 @@
               </a14:hiddenEffects>
             </a:ext>
             <a:ext uri="{FAA26D3D-D897-4be2-8F04-BA451C77F1D7}">
-              <ma14:placeholderFlag xmlns:ma14="http://schemas.microsoft.com/office/mac/drawingml/2011/main" xmlns="" val="1"/>
+              <ma14:placeholderFlag xmlns="" xmlns:ma14="http://schemas.microsoft.com/office/mac/drawingml/2011/main" val="1"/>
             </a:ext>
           </a:extLst>
         </p:spPr>
@@ -7167,7 +7167,9 @@
           </a:xfrm>
         </p:spPr>
         <p:txBody>
-          <a:bodyPr/>
+          <a:bodyPr>
+            <a:normAutofit fontScale="90000"/>
+          </a:bodyPr>
           <a:lstStyle/>
           <a:p>
             <a:pPr algn="ctr" eaLnBrk="1" hangingPunct="1">
@@ -7179,7 +7181,7 @@
                 <a:ea typeface="Arial" charset="0"/>
                 <a:cs typeface="Arial" charset="0"/>
               </a:rPr>
-              <a:t>FW599 - Fall 2025</a:t>
+              <a:t>FW536 – Statistical modeling for ecology and conservation </a:t>
             </a:r>
             <a:br>
               <a:rPr lang="en-US" altLang="en-US" sz="4000" b="1" dirty="0">
@@ -7201,7 +7203,7 @@
                 <a:ea typeface="Arial" charset="0"/>
                 <a:cs typeface="Arial" charset="0"/>
               </a:rPr>
-              <a:t>Get your data on!</a:t>
+              <a:t>AKA Get your data on!</a:t>
             </a:r>
             <a:endParaRPr lang="en-AU" altLang="en-US" sz="3200" b="1" dirty="0"/>
           </a:p>
@@ -36679,7 +36681,7 @@
               </a14:hiddenEffects>
             </a:ext>
             <a:ext uri="{FAA26D3D-D897-4be2-8F04-BA451C77F1D7}">
-              <ma14:placeholderFlag xmlns="" xmlns:ma14="http://schemas.microsoft.com/office/mac/drawingml/2011/main" val="1"/>
+              <ma14:placeholderFlag xmlns:ma14="http://schemas.microsoft.com/office/mac/drawingml/2011/main" xmlns="" val="1"/>
             </a:ext>
           </a:extLst>
         </p:spPr>
